--- a/MCP 身分驗證標準化：導入 OAuth 2.1.pptx
+++ b/MCP 身分驗證標準化：導入 OAuth 2.1.pptx
@@ -505,7 +505,7 @@
           <a:p>
             <a:r>
               <a:rPr lang="en-US" dirty="0"/>
-              <a:t>重點一句話：OAuth 讓用戶端「拿通行證」而不是「拿密碼」。使用者只在授權伺服器的登入頁輸入統編、帳號、密碼，用戶端與 MCP Server 都只拿到 Token。四個角色中，授權伺服器負責驗證身分與核發 Token，是本階段要建置的核心。為什麼 MCP 需要：MCP 授權規範以 OAuth 2.1 為基礎，MCP Server 透過 Protected Resource Metadata（RFC 9728）指出授權伺服器，Client 再透過 Authorization Server Metadata（RFC 8414）自動完成流程。自定義 API 無法被 Claude、ChatGPT、Gemini 等主流用戶端使用。</a:t>
+              <a:t>重點一句話：OAuth 讓 AI 工具拿「通行證」，而不是拿「密碼」。三個理由：一、這是 MCP 官方規範指定的身分驗證標準，Claude、ChatGPT、Gemini 都照這套標準來連線，自訂的驗證方式它們接不上。二、只要建置一次，所有符合標準的 AI 工具都能直接使用，不必逐家客製；未來 Web、APP、API 等內部系統之間，也能共用這台 OAuth Server 驗證身分，不再各自處理帳號密碼。三、使用者的統編、帳號、密碼只在 OAuth Server 的登入頁輸入，AI 工具和 MCP Server 都看不到密碼，只拿到幾分鐘就會到期、而且可以隨時收回的通行證。</a:t>
             </a:r>
             <a:endParaRPr lang="en-US" dirty="0"/>
           </a:p>
@@ -593,7 +593,7 @@
           <a:p>
             <a:r>
               <a:rPr lang="en-US" dirty="0"/>
-              <a:t>這是 OAuth 最經典的角色架構圖，套進 MCP 情境。① 企業用戶透過 AI 工具（MCP Client）要使用 MCP Server 提供的服務。② Client 把使用者導到授權伺服器的登入頁，統編、帳號、密碼只在這一步、只在授權伺服器輸入，這條線特別用實線標出。③ 授權伺服器驗證成功後發一次性的授權碼，經瀏覽器導回 Client。④ Client 用授權碼加 PKCE 的 code_verifier 向授權伺服器換發 Access Token。⑤ Client 帶 Token 呼叫 MCP Server 的工具。⑥ MCP Server 不需要知道密碼，只用授權伺服器公布的 JWKS 公鑰驗證 Token 的簽章、受眾與到期時間，等於把身分驗證委託給授權伺服器。下一頁的時序圖是同一個流程的逐步細節。</a:t>
+              <a:t>用一句話說：OAuth Server 像大樓的櫃台，負責核對身分、發通行證；MCP Server 像各樓層的門禁，只認通行證、不碰密碼。流程：① 員工先在 AI 工具裡新增 MCP 連線（只需設定一次）。② AI 工具把員工帶到 OAuth Server 的登入頁，員工在這裡輸入統編、帳號、密碼；OAuth Server 會到資訊雲的 GMB 資料庫比對。這是唯一需要輸入密碼的地方。③ 確認身分後，OAuth Server 發一張通行證給 AI 工具，設定完成。④ 之後員工請 AI 查資料時，AI 工具就帶著通行證去找 MCP Server；通行證到期會自動續期，不必每次重新登入。⑤ MCP Server 先檢查通行證是不是 OAuth Server 發的、有沒有過期。確認沒問題後，MCP Server 才會讀取自己的業務資料庫，或呼叫資訊雲的上游服務 API（GMB、中台、API Bank）取得資料。架構上，MCP Server 和 OAuth Server 都在公有雲執行，方便 AI 工具連線；上游服務與資料庫則留在資訊雲，屬於混合雲架構，資料本身不搬上公有雲。</a:t>
             </a:r>
             <a:endParaRPr lang="en-US" dirty="0"/>
           </a:p>
@@ -681,7 +681,7 @@
           <a:p>
             <a:r>
               <a:rPr lang="en-US" dirty="0"/>
-              <a:t>這是 OAuth 最經典的 Authorization Code Flow，加上 PKCE，也是本階段唯一實作的授權流程。① Client 先產生隨機的 code_verifier，並算出它的雜湊 code_challenge。②③ 把使用者的瀏覽器導向授權伺服器的 /authorize，帶上 code_challenge、防偽用的 state，以及目標 MCP Server 網址 resource。④ 重點：統編、帳號、密碼只在授權伺服器的登入頁輸入，Client 與 MCP Server 都看不到。⑤⑥ 授權伺服器驗證成功後，以一次性的授權碼導回 Client 的 redirect_uri，並附上 iss 讓 Client 確認是哪個授權伺服器發的。⑦ Client 用授權碼加原始的 code_verifier 換 Token；授權伺服器比對雜湊，確保換 Token 的跟發起登入的是同一個 Client，授權碼被攔截也無法使用。⑧ 授權伺服器回傳短效的 JWT Access Token 與 Refresh Token。⑨⑩ Client 帶 Token 呼叫 MCP Server，MCP Server 以授權伺服器公布的 JWKS 公鑰驗證簽章、受眾 aud 與到期時間，不需每次回呼授權伺服器。</a:t>
+              <a:t>這是 OAuth 最經典的 Authorization Code Flow，加上 PKCE，也是本階段唯一實作的授權流程。① Client 先產生隨機的 code_verifier，並算出它的雜湊 code_challenge。②③ 把使用者的瀏覽器導向 OAuth Server 的 /authorize，帶上 code_challenge、防偽用的 state，以及目標 MCP Server 網址 resource。④ 重點：統編、帳號、密碼只在 OAuth Server 的登入頁輸入，Client 與 MCP Server 都看不到。⑤⑥ OAuth Server 驗證成功後，以一次性的授權碼導回 Client 的 redirect_uri，並附上 iss 讓 Client 確認是哪個 OAuth Server 發的。⑦ Client 用授權碼加原始的 code_verifier 換 Token；OAuth Server 比對雜湊，確保換 Token 的跟發起登入的是同一個 Client，授權碼被攔截也無法使用。⑧ OAuth Server 回傳短效的 JWT Access Token 與 Refresh Token。⑨⑩ Client 帶 Token 呼叫 MCP Server，MCP Server 以 OAuth Server 公布的 JWKS 公鑰驗證簽章、受眾 aud 與到期時間，不需每次回呼 OAuth Server。</a:t>
             </a:r>
             <a:endParaRPr lang="en-US" dirty="0"/>
           </a:p>
@@ -769,7 +769,7 @@
           <a:p>
             <a:r>
               <a:rPr lang="en-US" dirty="0"/>
-              <a:t>架構分工：授權伺服器負責「發證」，MCP Server 負責「驗證」。流程四步：① MCP Client 將使用者導向授權伺服器登入頁，使用者在此輸入統編、帳號、密碼；② Client 以授權碼加上 PKCE 驗證碼向 /token 換取 Access Token；③ Client 帶 Token 呼叫 MCP 工具；④ MCP Server 以授權伺服器公布的 JWKS 公鑰驗證 Token 簽章、受眾（aud）與到期時間，不需每次回呼授權伺服器。MVP 範圍刻意收斂在標準最小集合，全部自行實作、不依賴第三方框架，方便日後接手維護。Client 註冊依 MCP 規範 2026-07-28 版：首選 Client ID Metadata Documents（CIMD）——用戶端以自己的 HTTPS 網址當 client_id，授權伺服器抓取該網址的 JSON 中繼資料，驗證 client_id 完全相符、redirect_uri 在清單內，並在中繼資料宣告 client_id_metadata_document_supported: true。這讓 Claude 等公開用戶端不需事先登記也能接入，且授權伺服器不必維護註冊資料庫。已知的內部用戶端則用預先註冊。動態註冊（DCR）在新規範中已標為棄用，僅為向下相容保留，第一階段不做。另外規範建議授權回應帶 iss 參數（RFC 9207）防範混用攻擊，建議一併實作。</a:t>
+              <a:t>本階段全部自行實作，不使用第三方框架或服務，方便日後接手維護。本階段六項：登入頁；標準授權流程，採 Authorization Code Flow 加 PKCE，並在回應帶 iss 參數；短效的 JWT Access Token；Refresh Token 自動續期，每次換新都輪替；Client 註冊；Metadata 與 JWKS 端點，也就是 OAuth Server 的 Authorization Server Metadata（RFC 8414）與驗證用公鑰。Client 註冊依 MCP 規範 2026-07-28 版：Claude 與 ChatGPT 使用 Client ID Metadata Documents（CIMD），用自己的網址當身分，不需事先登記；Gemini 目前保守起見採預先註冊，由管理員發給 Client ID。動態註冊（DCR）在新規範已標為棄用，不實作。Token 撤銷放在後續階段：包含 /revoke 端點（自家 Web、APP 登出時呼叫），以及帳號停用或異常時由 OAuth Server 作廢該使用者所有 Refresh Token。本階段先以短效的 Access Token 控制風險。</a:t>
             </a:r>
             <a:endParaRPr lang="en-US" dirty="0"/>
           </a:p>
@@ -875,7 +875,7 @@
         </p:nvSpPr>
         <p:spPr>
           <a:xfrm>
-            <a:off x="812800" y="609600"/>
+            <a:off x="812800" y="457200"/>
             <a:ext cx="10566400" cy="502890"/>
           </a:xfrm>
           <a:prstGeom prst="rect">
@@ -923,8 +923,8 @@
         </p:nvSpPr>
         <p:spPr>
           <a:xfrm>
-            <a:off x="812800" y="1417290"/>
-            <a:ext cx="10566400" cy="4627910"/>
+            <a:off x="812800" y="1264890"/>
+            <a:ext cx="10566400" cy="4780310"/>
           </a:xfrm>
           <a:prstGeom prst="rect">
             <a:avLst/>
@@ -1003,7 +1003,7 @@
         </p:nvSpPr>
         <p:spPr>
           <a:xfrm>
-            <a:off x="812800" y="609600"/>
+            <a:off x="812800" y="457200"/>
             <a:ext cx="10566400" cy="502890"/>
           </a:xfrm>
           <a:prstGeom prst="rect">
@@ -1051,8 +1051,8 @@
         </p:nvSpPr>
         <p:spPr>
           <a:xfrm>
-            <a:off x="812800" y="1417290"/>
-            <a:ext cx="10566400" cy="4627910"/>
+            <a:off x="812800" y="1264890"/>
+            <a:ext cx="10566400" cy="4780310"/>
           </a:xfrm>
           <a:prstGeom prst="rect">
             <a:avLst/>
@@ -1384,7 +1384,7 @@
         </p:nvSpPr>
         <p:spPr>
           <a:xfrm>
-            <a:off x="812800" y="609600"/>
+            <a:off x="812800" y="457200"/>
             <a:ext cx="10883392" cy="528290"/>
           </a:xfrm>
           <a:prstGeom prst="rect">
@@ -1414,7 +1414,7 @@
                 <a:ea typeface="Arial" pitchFamily="34" charset="-122"/>
                 <a:cs typeface="Arial" pitchFamily="34" charset="-120"/>
               </a:rPr>
-              <a:t>OAuth：發通行證，不交鑰匙</a:t>
+              <a:t>為什麼需要 OAuth</a:t>
             </a:r>
             <a:endParaRPr lang="en-US" sz="3600" dirty="0"/>
           </a:p>
@@ -1428,8 +1428,8 @@
         </p:nvSpPr>
         <p:spPr>
           <a:xfrm>
-            <a:off x="812800" y="1188690"/>
-            <a:ext cx="10883392" cy="274290"/>
+            <a:off x="812800" y="1036290"/>
+            <a:ext cx="10883392" cy="309860"/>
           </a:xfrm>
           <a:prstGeom prst="rect">
             <a:avLst/>
@@ -1445,12 +1445,12 @@
           <a:p>
             <a:pPr algn="l" indent="0" marL="0">
               <a:lnSpc>
-                <a:spcPts val="1960"/>
+                <a:spcPts val="2240"/>
               </a:lnSpc>
               <a:buNone/>
             </a:pPr>
             <a:r>
-              <a:rPr lang="en-US" sz="1400" dirty="0">
+              <a:rPr lang="en-US" sz="1600" dirty="0">
                 <a:solidFill>
                   <a:srgbClr val="7F7F7F"/>
                 </a:solidFill>
@@ -1458,22 +1458,42 @@
                 <a:ea typeface="Arial" pitchFamily="34" charset="-122"/>
                 <a:cs typeface="Arial" pitchFamily="34" charset="-120"/>
               </a:rPr>
-              <a:t>也是 MCP 官方指定的授權標準</a:t>
+              <a:t>讓 AI 工具「拿通行證」，而不是「拿密碼」</a:t>
             </a:r>
-            <a:endParaRPr lang="en-US" sz="1400" dirty="0"/>
+            <a:endParaRPr lang="en-US" sz="1600" dirty="0"/>
           </a:p>
         </p:txBody>
       </p:sp>
       <p:sp>
         <p:nvSpPr>
-          <p:cNvPr id="4" name="Text 2"/>
+          <p:cNvPr id="4" name="Shape 2"/>
           <p:cNvSpPr/>
           <p:nvPr/>
         </p:nvSpPr>
         <p:spPr>
           <a:xfrm>
-            <a:off x="812800" y="1691580"/>
-            <a:ext cx="6906768" cy="292100"/>
+            <a:off x="812800" y="1473150"/>
+            <a:ext cx="3386634" cy="4775250"/>
+          </a:xfrm>
+          <a:prstGeom prst="rect">
+            <a:avLst/>
+          </a:prstGeom>
+          <a:solidFill>
+            <a:srgbClr val="F3F3F3"/>
+          </a:solidFill>
+          <a:ln/>
+        </p:spPr>
+      </p:sp>
+      <p:sp>
+        <p:nvSpPr>
+          <p:cNvPr id="5" name="Text 3"/>
+          <p:cNvSpPr/>
+          <p:nvPr/>
+        </p:nvSpPr>
+        <p:spPr>
+          <a:xfrm>
+            <a:off x="1117600" y="1777950"/>
+            <a:ext cx="2860345" cy="482600"/>
           </a:xfrm>
           <a:prstGeom prst="rect">
             <a:avLst/>
@@ -1489,23 +1509,56 @@
           <a:p>
             <a:pPr algn="l" indent="0" marL="0">
               <a:lnSpc>
-                <a:spcPts val="2100"/>
+                <a:spcPts val="3600"/>
               </a:lnSpc>
               <a:buNone/>
             </a:pPr>
             <a:r>
-              <a:rPr lang="en-US" sz="1400" b="1" dirty="0">
+              <a:rPr lang="en-US" sz="3600" b="1" dirty="0">
                 <a:solidFill>
-                  <a:srgbClr val="000000"/>
+                  <a:srgbClr val="01A964"/>
                 </a:solidFill>
                 <a:latin typeface="Arial" pitchFamily="34" charset="0"/>
                 <a:ea typeface="Arial" pitchFamily="34" charset="-122"/>
                 <a:cs typeface="Arial" pitchFamily="34" charset="-120"/>
               </a:rPr>
-              <a:t>密碼只在授權伺服器輸入；用戶端拿到的是</a:t>
+              <a:t>01</a:t>
             </a:r>
+            <a:endParaRPr lang="en-US" sz="3600" dirty="0"/>
+          </a:p>
+        </p:txBody>
+      </p:sp>
+      <p:sp>
+        <p:nvSpPr>
+          <p:cNvPr id="6" name="Text 4"/>
+          <p:cNvSpPr/>
+          <p:nvPr/>
+        </p:nvSpPr>
+        <p:spPr>
+          <a:xfrm>
+            <a:off x="1117600" y="2362150"/>
+            <a:ext cx="2860345" cy="360660"/>
+          </a:xfrm>
+          <a:prstGeom prst="rect">
+            <a:avLst/>
+          </a:prstGeom>
+          <a:noFill/>
+          <a:ln/>
+        </p:spPr>
+        <p:txBody>
+          <a:bodyPr wrap="square" lIns="0" tIns="0" rIns="0" bIns="0" rtlCol="0" anchor="t">
+            <a:normAutofit/>
+          </a:bodyPr>
+          <a:lstStyle/>
+          <a:p>
+            <a:pPr algn="l" indent="0" marL="0">
+              <a:lnSpc>
+                <a:spcPts val="2640"/>
+              </a:lnSpc>
+              <a:buNone/>
+            </a:pPr>
             <a:r>
-              <a:rPr lang="en-US" sz="1400" b="1" dirty="0">
+              <a:rPr lang="en-US" sz="2200" b="1" dirty="0">
                 <a:solidFill>
                   <a:srgbClr val="036B3F"/>
                 </a:solidFill>
@@ -1513,53 +1566,22 @@
                 <a:ea typeface="Arial" pitchFamily="34" charset="-122"/>
                 <a:cs typeface="Arial" pitchFamily="34" charset="-120"/>
               </a:rPr>
-              <a:t>有範圍、有時效、可撤銷</a:t>
+              <a:t>業界共同標準</a:t>
             </a:r>
-            <a:r>
-              <a:rPr lang="en-US" sz="1400" b="1" dirty="0">
-                <a:solidFill>
-                  <a:srgbClr val="000000"/>
-                </a:solidFill>
-                <a:latin typeface="Arial" pitchFamily="34" charset="0"/>
-                <a:ea typeface="Arial" pitchFamily="34" charset="-122"/>
-                <a:cs typeface="Arial" pitchFamily="34" charset="-120"/>
-              </a:rPr>
-              <a:t>的 Token。</a:t>
-            </a:r>
-            <a:endParaRPr lang="en-US" sz="1400" dirty="0"/>
+            <a:endParaRPr lang="en-US" sz="2200" dirty="0"/>
           </a:p>
         </p:txBody>
       </p:sp>
       <p:sp>
         <p:nvSpPr>
-          <p:cNvPr id="5" name="Shape 3"/>
+          <p:cNvPr id="7" name="Text 5"/>
           <p:cNvSpPr/>
           <p:nvPr/>
         </p:nvSpPr>
         <p:spPr>
           <a:xfrm>
-            <a:off x="812800" y="2110680"/>
-            <a:ext cx="3276600" cy="1229271"/>
-          </a:xfrm>
-          <a:prstGeom prst="rect">
-            <a:avLst/>
-          </a:prstGeom>
-          <a:solidFill>
-            <a:srgbClr val="F3F3F3"/>
-          </a:solidFill>
-          <a:ln/>
-        </p:spPr>
-      </p:sp>
-      <p:sp>
-        <p:nvSpPr>
-          <p:cNvPr id="6" name="Text 4"/>
-          <p:cNvSpPr/>
-          <p:nvPr/>
-        </p:nvSpPr>
-        <p:spPr>
-          <a:xfrm>
-            <a:off x="1016000" y="2313880"/>
-            <a:ext cx="2956306" cy="299690"/>
+            <a:off x="1117600" y="2824411"/>
+            <a:ext cx="2860345" cy="878780"/>
           </a:xfrm>
           <a:prstGeom prst="rect">
             <a:avLst/>
@@ -1575,51 +1597,7 @@
           <a:p>
             <a:pPr algn="l" indent="0" marL="0">
               <a:lnSpc>
-                <a:spcPts val="2160"/>
-              </a:lnSpc>
-              <a:buNone/>
-            </a:pPr>
-            <a:r>
-              <a:rPr lang="en-US" sz="1800" b="1" dirty="0">
-                <a:solidFill>
-                  <a:srgbClr val="036B3F"/>
-                </a:solidFill>
-                <a:latin typeface="Arial" pitchFamily="34" charset="0"/>
-                <a:ea typeface="Arial" pitchFamily="34" charset="-122"/>
-                <a:cs typeface="Arial" pitchFamily="34" charset="-120"/>
-              </a:rPr>
-              <a:t>資源擁有者</a:t>
-            </a:r>
-            <a:endParaRPr lang="en-US" sz="1800" dirty="0"/>
-          </a:p>
-        </p:txBody>
-      </p:sp>
-      <p:sp>
-        <p:nvSpPr>
-          <p:cNvPr id="7" name="Text 5"/>
-          <p:cNvSpPr/>
-          <p:nvPr/>
-        </p:nvSpPr>
-        <p:spPr>
-          <a:xfrm>
-            <a:off x="1016000" y="2638971"/>
-            <a:ext cx="2956306" cy="274290"/>
-          </a:xfrm>
-          <a:prstGeom prst="rect">
-            <a:avLst/>
-          </a:prstGeom>
-          <a:noFill/>
-          <a:ln/>
-        </p:spPr>
-        <p:txBody>
-          <a:bodyPr wrap="square" lIns="0" tIns="0" rIns="0" bIns="0" rtlCol="0" anchor="t">
-            <a:normAutofit/>
-          </a:bodyPr>
-          <a:lstStyle/>
-          <a:p>
-            <a:pPr algn="l" indent="0" marL="0">
-              <a:lnSpc>
-                <a:spcPts val="1960"/>
+                <a:spcPts val="2240"/>
               </a:lnSpc>
               <a:buNone/>
             </a:pPr>
@@ -1632,7 +1610,7 @@
                 <a:ea typeface="Arial" pitchFamily="34" charset="-122"/>
                 <a:cs typeface="Arial" pitchFamily="34" charset="-120"/>
               </a:rPr>
-              <a:t>企業用戶（統編＋帳號）</a:t>
+              <a:t>MCP 官方規範指定用 OAuth 2.1 驗證身分。不照標準做，主流 AI 工具就接不上。</a:t>
             </a:r>
             <a:endParaRPr lang="en-US" sz="1400" dirty="0"/>
           </a:p>
@@ -1646,8 +1624,8 @@
         </p:nvSpPr>
         <p:spPr>
           <a:xfrm>
-            <a:off x="4241800" y="2110680"/>
-            <a:ext cx="3276600" cy="1229271"/>
+            <a:off x="4402634" y="1473150"/>
+            <a:ext cx="3386683" cy="4775250"/>
           </a:xfrm>
           <a:prstGeom prst="rect">
             <a:avLst/>
@@ -1666,8 +1644,8 @@
         </p:nvSpPr>
         <p:spPr>
           <a:xfrm>
-            <a:off x="4445000" y="2313880"/>
-            <a:ext cx="2956306" cy="299690"/>
+            <a:off x="4707434" y="1777950"/>
+            <a:ext cx="2860396" cy="482600"/>
           </a:xfrm>
           <a:prstGeom prst="rect">
             <a:avLst/>
@@ -1683,12 +1661,56 @@
           <a:p>
             <a:pPr algn="l" indent="0" marL="0">
               <a:lnSpc>
-                <a:spcPts val="2160"/>
+                <a:spcPts val="3600"/>
               </a:lnSpc>
               <a:buNone/>
             </a:pPr>
             <a:r>
-              <a:rPr lang="en-US" sz="1800" b="1" dirty="0">
+              <a:rPr lang="en-US" sz="3600" b="1" dirty="0">
+                <a:solidFill>
+                  <a:srgbClr val="01A964"/>
+                </a:solidFill>
+                <a:latin typeface="Arial" pitchFamily="34" charset="0"/>
+                <a:ea typeface="Arial" pitchFamily="34" charset="-122"/>
+                <a:cs typeface="Arial" pitchFamily="34" charset="-120"/>
+              </a:rPr>
+              <a:t>02</a:t>
+            </a:r>
+            <a:endParaRPr lang="en-US" sz="3600" dirty="0"/>
+          </a:p>
+        </p:txBody>
+      </p:sp>
+      <p:sp>
+        <p:nvSpPr>
+          <p:cNvPr id="10" name="Text 8"/>
+          <p:cNvSpPr/>
+          <p:nvPr/>
+        </p:nvSpPr>
+        <p:spPr>
+          <a:xfrm>
+            <a:off x="4707434" y="2362150"/>
+            <a:ext cx="2860396" cy="360660"/>
+          </a:xfrm>
+          <a:prstGeom prst="rect">
+            <a:avLst/>
+          </a:prstGeom>
+          <a:noFill/>
+          <a:ln/>
+        </p:spPr>
+        <p:txBody>
+          <a:bodyPr wrap="square" lIns="0" tIns="0" rIns="0" bIns="0" rtlCol="0" anchor="t">
+            <a:normAutofit/>
+          </a:bodyPr>
+          <a:lstStyle/>
+          <a:p>
+            <a:pPr algn="l" indent="0" marL="0">
+              <a:lnSpc>
+                <a:spcPts val="2640"/>
+              </a:lnSpc>
+              <a:buNone/>
+            </a:pPr>
+            <a:r>
+              <a:rPr lang="en-US" sz="2200" b="1" dirty="0">
                 <a:solidFill>
                   <a:srgbClr val="036B3F"/>
                 </a:solidFill>
@@ -1696,22 +1718,22 @@
                 <a:ea typeface="Arial" pitchFamily="34" charset="-122"/>
                 <a:cs typeface="Arial" pitchFamily="34" charset="-120"/>
               </a:rPr>
-              <a:t>用戶端 Client</a:t>
+              <a:t>一次建置，內外通用</a:t>
             </a:r>
-            <a:endParaRPr lang="en-US" sz="1800" dirty="0"/>
+            <a:endParaRPr lang="en-US" sz="2200" dirty="0"/>
           </a:p>
         </p:txBody>
       </p:sp>
       <p:sp>
         <p:nvSpPr>
-          <p:cNvPr id="10" name="Text 8"/>
+          <p:cNvPr id="11" name="Text 9"/>
           <p:cNvSpPr/>
           <p:nvPr/>
         </p:nvSpPr>
         <p:spPr>
           <a:xfrm>
-            <a:off x="4445000" y="2638971"/>
-            <a:ext cx="2956306" cy="523180"/>
+            <a:off x="4707434" y="2824411"/>
+            <a:ext cx="2860396" cy="1163241"/>
           </a:xfrm>
           <a:prstGeom prst="rect">
             <a:avLst/>
@@ -1727,7 +1749,7 @@
           <a:p>
             <a:pPr algn="l" indent="0" marL="0">
               <a:lnSpc>
-                <a:spcPts val="1960"/>
+                <a:spcPts val="2240"/>
               </a:lnSpc>
               <a:buNone/>
             </a:pPr>
@@ -1740,7 +1762,7 @@
                 <a:ea typeface="Arial" pitchFamily="34" charset="-122"/>
                 <a:cs typeface="Arial" pitchFamily="34" charset="-120"/>
               </a:rPr>
-              <a:t>MCP Client：Claude、ChatGPT、Gemini</a:t>
+              <a:t>Claude、ChatGPT、Gemini 都照同一套標準連線，不需要逐家開發。未來內部系統之間，也能用同一套 OAuth 驗證身分。</a:t>
             </a:r>
             <a:endParaRPr lang="en-US" sz="1400" dirty="0"/>
           </a:p>
@@ -1748,14 +1770,14 @@
       </p:sp>
       <p:sp>
         <p:nvSpPr>
-          <p:cNvPr id="11" name="Shape 9"/>
+          <p:cNvPr id="12" name="Shape 10"/>
           <p:cNvSpPr/>
           <p:nvPr/>
         </p:nvSpPr>
         <p:spPr>
           <a:xfrm>
-            <a:off x="812800" y="3492351"/>
-            <a:ext cx="3276600" cy="1229271"/>
+            <a:off x="7992517" y="1473150"/>
+            <a:ext cx="3386683" cy="4775250"/>
           </a:xfrm>
           <a:prstGeom prst="rect">
             <a:avLst/>
@@ -1768,14 +1790,14 @@
       </p:sp>
       <p:sp>
         <p:nvSpPr>
-          <p:cNvPr id="12" name="Text 10"/>
+          <p:cNvPr id="13" name="Text 11"/>
           <p:cNvSpPr/>
           <p:nvPr/>
         </p:nvSpPr>
         <p:spPr>
           <a:xfrm>
-            <a:off x="1016000" y="3695551"/>
-            <a:ext cx="2956306" cy="299690"/>
+            <a:off x="8297317" y="1777950"/>
+            <a:ext cx="2860396" cy="482600"/>
           </a:xfrm>
           <a:prstGeom prst="rect">
             <a:avLst/>
@@ -1791,12 +1813,56 @@
           <a:p>
             <a:pPr algn="l" indent="0" marL="0">
               <a:lnSpc>
-                <a:spcPts val="2160"/>
+                <a:spcPts val="3600"/>
               </a:lnSpc>
               <a:buNone/>
             </a:pPr>
             <a:r>
-              <a:rPr lang="en-US" sz="1800" b="1" dirty="0">
+              <a:rPr lang="en-US" sz="3600" b="1" dirty="0">
+                <a:solidFill>
+                  <a:srgbClr val="01A964"/>
+                </a:solidFill>
+                <a:latin typeface="Arial" pitchFamily="34" charset="0"/>
+                <a:ea typeface="Arial" pitchFamily="34" charset="-122"/>
+                <a:cs typeface="Arial" pitchFamily="34" charset="-120"/>
+              </a:rPr>
+              <a:t>03</a:t>
+            </a:r>
+            <a:endParaRPr lang="en-US" sz="3600" dirty="0"/>
+          </a:p>
+        </p:txBody>
+      </p:sp>
+      <p:sp>
+        <p:nvSpPr>
+          <p:cNvPr id="14" name="Text 12"/>
+          <p:cNvSpPr/>
+          <p:nvPr/>
+        </p:nvSpPr>
+        <p:spPr>
+          <a:xfrm>
+            <a:off x="8297317" y="2362150"/>
+            <a:ext cx="2860396" cy="360660"/>
+          </a:xfrm>
+          <a:prstGeom prst="rect">
+            <a:avLst/>
+          </a:prstGeom>
+          <a:noFill/>
+          <a:ln/>
+        </p:spPr>
+        <p:txBody>
+          <a:bodyPr wrap="square" lIns="0" tIns="0" rIns="0" bIns="0" rtlCol="0" anchor="t">
+            <a:normAutofit/>
+          </a:bodyPr>
+          <a:lstStyle/>
+          <a:p>
+            <a:pPr algn="l" indent="0" marL="0">
+              <a:lnSpc>
+                <a:spcPts val="2640"/>
+              </a:lnSpc>
+              <a:buNone/>
+            </a:pPr>
+            <a:r>
+              <a:rPr lang="en-US" sz="2200" b="1" dirty="0">
                 <a:solidFill>
                   <a:srgbClr val="036B3F"/>
                 </a:solidFill>
@@ -1804,22 +1870,22 @@
                 <a:ea typeface="Arial" pitchFamily="34" charset="-122"/>
                 <a:cs typeface="Arial" pitchFamily="34" charset="-120"/>
               </a:rPr>
-              <a:t>授權伺服器</a:t>
+              <a:t>密碼不外流</a:t>
             </a:r>
-            <a:endParaRPr lang="en-US" sz="1800" dirty="0"/>
+            <a:endParaRPr lang="en-US" sz="2200" dirty="0"/>
           </a:p>
         </p:txBody>
       </p:sp>
       <p:sp>
         <p:nvSpPr>
-          <p:cNvPr id="13" name="Text 11"/>
+          <p:cNvPr id="15" name="Text 13"/>
           <p:cNvSpPr/>
           <p:nvPr/>
         </p:nvSpPr>
         <p:spPr>
           <a:xfrm>
-            <a:off x="1016000" y="4020641"/>
-            <a:ext cx="2956306" cy="274290"/>
+            <a:off x="8297317" y="2824411"/>
+            <a:ext cx="2860396" cy="878780"/>
           </a:xfrm>
           <a:prstGeom prst="rect">
             <a:avLst/>
@@ -1835,7 +1901,7 @@
           <a:p>
             <a:pPr algn="l" indent="0" marL="0">
               <a:lnSpc>
-                <a:spcPts val="1960"/>
+                <a:spcPts val="2240"/>
               </a:lnSpc>
               <a:buNone/>
             </a:pPr>
@@ -1848,7 +1914,7 @@
                 <a:ea typeface="Arial" pitchFamily="34" charset="-122"/>
                 <a:cs typeface="Arial" pitchFamily="34" charset="-120"/>
               </a:rPr>
-              <a:t>驗證使用者身分、核發 Token</a:t>
+              <a:t>密碼只在 OAuth Server 輸入。AI 工具只拿到有時效、可隨時收回的通行證。</a:t>
             </a:r>
             <a:endParaRPr lang="en-US" sz="1400" dirty="0"/>
           </a:p>
@@ -1856,450 +1922,14 @@
       </p:sp>
       <p:sp>
         <p:nvSpPr>
-          <p:cNvPr id="14" name="Shape 12"/>
-          <p:cNvSpPr/>
-          <p:nvPr/>
-        </p:nvSpPr>
-        <p:spPr>
-          <a:xfrm>
-            <a:off x="4241800" y="3492351"/>
-            <a:ext cx="3276600" cy="1229271"/>
-          </a:xfrm>
-          <a:prstGeom prst="rect">
-            <a:avLst/>
-          </a:prstGeom>
-          <a:solidFill>
-            <a:srgbClr val="E6FED2"/>
-          </a:solidFill>
-          <a:ln/>
-        </p:spPr>
-      </p:sp>
-      <p:sp>
-        <p:nvSpPr>
-          <p:cNvPr id="15" name="Text 13"/>
-          <p:cNvSpPr/>
-          <p:nvPr/>
-        </p:nvSpPr>
-        <p:spPr>
-          <a:xfrm>
-            <a:off x="4445000" y="3695551"/>
-            <a:ext cx="2956306" cy="299690"/>
-          </a:xfrm>
-          <a:prstGeom prst="rect">
-            <a:avLst/>
-          </a:prstGeom>
-          <a:noFill/>
-          <a:ln/>
-        </p:spPr>
-        <p:txBody>
-          <a:bodyPr wrap="square" lIns="0" tIns="0" rIns="0" bIns="0" rtlCol="0" anchor="t">
-            <a:normAutofit/>
-          </a:bodyPr>
-          <a:lstStyle/>
-          <a:p>
-            <a:pPr algn="l" indent="0" marL="0">
-              <a:lnSpc>
-                <a:spcPts val="2160"/>
-              </a:lnSpc>
-              <a:buNone/>
-            </a:pPr>
-            <a:r>
-              <a:rPr lang="en-US" sz="1800" b="1" dirty="0">
-                <a:solidFill>
-                  <a:srgbClr val="036B3F"/>
-                </a:solidFill>
-                <a:latin typeface="Arial" pitchFamily="34" charset="0"/>
-                <a:ea typeface="Arial" pitchFamily="34" charset="-122"/>
-                <a:cs typeface="Arial" pitchFamily="34" charset="-120"/>
-              </a:rPr>
-              <a:t>資源伺服器</a:t>
-            </a:r>
-            <a:endParaRPr lang="en-US" sz="1800" dirty="0"/>
-          </a:p>
-        </p:txBody>
-      </p:sp>
-      <p:sp>
-        <p:nvSpPr>
           <p:cNvPr id="16" name="Text 14"/>
           <p:cNvSpPr/>
           <p:nvPr/>
         </p:nvSpPr>
         <p:spPr>
           <a:xfrm>
-            <a:off x="4445000" y="4020641"/>
-            <a:ext cx="2956306" cy="523180"/>
-          </a:xfrm>
-          <a:prstGeom prst="rect">
-            <a:avLst/>
-          </a:prstGeom>
-          <a:noFill/>
-          <a:ln/>
-        </p:spPr>
-        <p:txBody>
-          <a:bodyPr wrap="square" lIns="0" tIns="0" rIns="0" bIns="0" rtlCol="0" anchor="t">
-            <a:normAutofit/>
-          </a:bodyPr>
-          <a:lstStyle/>
-          <a:p>
-            <a:pPr algn="l" indent="0" marL="0">
-              <a:lnSpc>
-                <a:spcPts val="1960"/>
-              </a:lnSpc>
-              <a:buNone/>
-            </a:pPr>
-            <a:r>
-              <a:rPr lang="en-US" sz="1400" dirty="0">
-                <a:solidFill>
-                  <a:srgbClr val="000000"/>
-                </a:solidFill>
-                <a:latin typeface="Arial" pitchFamily="34" charset="0"/>
-                <a:ea typeface="Arial" pitchFamily="34" charset="-122"/>
-                <a:cs typeface="Arial" pitchFamily="34" charset="-120"/>
-              </a:rPr>
-              <a:t>MCP Server：驗證 Token、提供資料</a:t>
-            </a:r>
-            <a:endParaRPr lang="en-US" sz="1400" dirty="0"/>
-          </a:p>
-        </p:txBody>
-      </p:sp>
-      <p:sp>
-        <p:nvSpPr>
-          <p:cNvPr id="17" name="Shape 15"/>
-          <p:cNvSpPr/>
-          <p:nvPr/>
-        </p:nvSpPr>
-        <p:spPr>
-          <a:xfrm>
-            <a:off x="7823200" y="1691580"/>
-            <a:ext cx="3556000" cy="4150420"/>
-          </a:xfrm>
-          <a:prstGeom prst="rect">
-            <a:avLst/>
-          </a:prstGeom>
-          <a:solidFill>
-            <a:srgbClr val="036B3F"/>
-          </a:solidFill>
-          <a:ln/>
-        </p:spPr>
-      </p:sp>
-      <p:sp>
-        <p:nvSpPr>
-          <p:cNvPr id="18" name="Text 16"/>
-          <p:cNvSpPr/>
-          <p:nvPr/>
-        </p:nvSpPr>
-        <p:spPr>
-          <a:xfrm>
-            <a:off x="8128000" y="1996380"/>
-            <a:ext cx="3034792" cy="299690"/>
-          </a:xfrm>
-          <a:prstGeom prst="rect">
-            <a:avLst/>
-          </a:prstGeom>
-          <a:noFill/>
-          <a:ln/>
-        </p:spPr>
-        <p:txBody>
-          <a:bodyPr wrap="square" lIns="0" tIns="0" rIns="0" bIns="0" rtlCol="0" anchor="t">
-            <a:normAutofit/>
-          </a:bodyPr>
-          <a:lstStyle/>
-          <a:p>
-            <a:pPr algn="l" indent="0" marL="0">
-              <a:lnSpc>
-                <a:spcPts val="2160"/>
-              </a:lnSpc>
-              <a:buNone/>
-            </a:pPr>
-            <a:r>
-              <a:rPr lang="en-US" sz="1800" b="1" dirty="0">
-                <a:solidFill>
-                  <a:srgbClr val="F3FC77"/>
-                </a:solidFill>
-                <a:latin typeface="Arial" pitchFamily="34" charset="0"/>
-                <a:ea typeface="Arial" pitchFamily="34" charset="-122"/>
-                <a:cs typeface="Arial" pitchFamily="34" charset="-120"/>
-              </a:rPr>
-              <a:t>為什麼 MCP 需要</a:t>
-            </a:r>
-            <a:endParaRPr lang="en-US" sz="1800" dirty="0"/>
-          </a:p>
-        </p:txBody>
-      </p:sp>
-      <p:sp>
-        <p:nvSpPr>
-          <p:cNvPr id="19" name="Text 17"/>
-          <p:cNvSpPr/>
-          <p:nvPr/>
-        </p:nvSpPr>
-        <p:spPr>
-          <a:xfrm>
-            <a:off x="8128000" y="2448471"/>
-            <a:ext cx="3034792" cy="274290"/>
-          </a:xfrm>
-          <a:prstGeom prst="rect">
-            <a:avLst/>
-          </a:prstGeom>
-          <a:noFill/>
-          <a:ln/>
-        </p:spPr>
-        <p:txBody>
-          <a:bodyPr wrap="square" lIns="0" tIns="0" rIns="0" bIns="0" rtlCol="0" anchor="t">
-            <a:normAutofit/>
-          </a:bodyPr>
-          <a:lstStyle/>
-          <a:p>
-            <a:pPr algn="l" indent="0" marL="0">
-              <a:lnSpc>
-                <a:spcPts val="1960"/>
-              </a:lnSpc>
-              <a:buNone/>
-            </a:pPr>
-            <a:r>
-              <a:rPr lang="en-US" sz="1400" b="1" dirty="0">
-                <a:solidFill>
-                  <a:srgbClr val="FFFFFF"/>
-                </a:solidFill>
-                <a:latin typeface="Arial" pitchFamily="34" charset="0"/>
-                <a:ea typeface="Arial" pitchFamily="34" charset="-122"/>
-                <a:cs typeface="Arial" pitchFamily="34" charset="-120"/>
-              </a:rPr>
-              <a:t>01 規範明定</a:t>
-            </a:r>
-            <a:endParaRPr lang="en-US" sz="1400" dirty="0"/>
-          </a:p>
-        </p:txBody>
-      </p:sp>
-      <p:sp>
-        <p:nvSpPr>
-          <p:cNvPr id="20" name="Text 18"/>
-          <p:cNvSpPr/>
-          <p:nvPr/>
-        </p:nvSpPr>
-        <p:spPr>
-          <a:xfrm>
-            <a:off x="8128000" y="2748161"/>
-            <a:ext cx="3034792" cy="482600"/>
-          </a:xfrm>
-          <a:prstGeom prst="rect">
-            <a:avLst/>
-          </a:prstGeom>
-          <a:noFill/>
-          <a:ln/>
-        </p:spPr>
-        <p:txBody>
-          <a:bodyPr wrap="square" lIns="0" tIns="0" rIns="0" bIns="0" rtlCol="0" anchor="t">
-            <a:normAutofit/>
-          </a:bodyPr>
-          <a:lstStyle/>
-          <a:p>
-            <a:pPr algn="l" indent="0" marL="0">
-              <a:lnSpc>
-                <a:spcPts val="1800"/>
-              </a:lnSpc>
-              <a:buNone/>
-            </a:pPr>
-            <a:r>
-              <a:rPr lang="en-US" sz="1200" dirty="0">
-                <a:solidFill>
-                  <a:srgbClr val="FFFFFF"/>
-                </a:solidFill>
-                <a:latin typeface="Arial" pitchFamily="34" charset="0"/>
-                <a:ea typeface="Arial" pitchFamily="34" charset="-122"/>
-                <a:cs typeface="Arial" pitchFamily="34" charset="-120"/>
-              </a:rPr>
-              <a:t>MCP 授權採 OAuth 2.1，MCP Server 即資源伺服器</a:t>
-            </a:r>
-            <a:endParaRPr lang="en-US" sz="1200" dirty="0"/>
-          </a:p>
-        </p:txBody>
-      </p:sp>
-      <p:sp>
-        <p:nvSpPr>
-          <p:cNvPr id="21" name="Text 19"/>
-          <p:cNvSpPr/>
-          <p:nvPr/>
-        </p:nvSpPr>
-        <p:spPr>
-          <a:xfrm>
-            <a:off x="8128000" y="3383161"/>
-            <a:ext cx="3034792" cy="274290"/>
-          </a:xfrm>
-          <a:prstGeom prst="rect">
-            <a:avLst/>
-          </a:prstGeom>
-          <a:noFill/>
-          <a:ln/>
-        </p:spPr>
-        <p:txBody>
-          <a:bodyPr wrap="square" lIns="0" tIns="0" rIns="0" bIns="0" rtlCol="0" anchor="t">
-            <a:normAutofit/>
-          </a:bodyPr>
-          <a:lstStyle/>
-          <a:p>
-            <a:pPr algn="l" indent="0" marL="0">
-              <a:lnSpc>
-                <a:spcPts val="1960"/>
-              </a:lnSpc>
-              <a:buNone/>
-            </a:pPr>
-            <a:r>
-              <a:rPr lang="en-US" sz="1400" b="1" dirty="0">
-                <a:solidFill>
-                  <a:srgbClr val="FFFFFF"/>
-                </a:solidFill>
-                <a:latin typeface="Arial" pitchFamily="34" charset="0"/>
-                <a:ea typeface="Arial" pitchFamily="34" charset="-122"/>
-                <a:cs typeface="Arial" pitchFamily="34" charset="-120"/>
-              </a:rPr>
-              <a:t>02 自動對接</a:t>
-            </a:r>
-            <a:endParaRPr lang="en-US" sz="1400" dirty="0"/>
-          </a:p>
-        </p:txBody>
-      </p:sp>
-      <p:sp>
-        <p:nvSpPr>
-          <p:cNvPr id="22" name="Text 20"/>
-          <p:cNvSpPr/>
-          <p:nvPr/>
-        </p:nvSpPr>
-        <p:spPr>
-          <a:xfrm>
-            <a:off x="8128000" y="3682851"/>
-            <a:ext cx="3034792" cy="482600"/>
-          </a:xfrm>
-          <a:prstGeom prst="rect">
-            <a:avLst/>
-          </a:prstGeom>
-          <a:noFill/>
-          <a:ln/>
-        </p:spPr>
-        <p:txBody>
-          <a:bodyPr wrap="square" lIns="0" tIns="0" rIns="0" bIns="0" rtlCol="0" anchor="t">
-            <a:normAutofit/>
-          </a:bodyPr>
-          <a:lstStyle/>
-          <a:p>
-            <a:pPr algn="l" indent="0" marL="0">
-              <a:lnSpc>
-                <a:spcPts val="1800"/>
-              </a:lnSpc>
-              <a:buNone/>
-            </a:pPr>
-            <a:r>
-              <a:rPr lang="en-US" sz="1200" dirty="0">
-                <a:solidFill>
-                  <a:srgbClr val="FFFFFF"/>
-                </a:solidFill>
-                <a:latin typeface="Arial" pitchFamily="34" charset="0"/>
-                <a:ea typeface="Arial" pitchFamily="34" charset="-122"/>
-                <a:cs typeface="Arial" pitchFamily="34" charset="-120"/>
-              </a:rPr>
-              <a:t>Client 依標準中繼資料自動找到授權伺服器；自定義 API 接不上</a:t>
-            </a:r>
-            <a:endParaRPr lang="en-US" sz="1200" dirty="0"/>
-          </a:p>
-        </p:txBody>
-      </p:sp>
-      <p:sp>
-        <p:nvSpPr>
-          <p:cNvPr id="23" name="Text 21"/>
-          <p:cNvSpPr/>
-          <p:nvPr/>
-        </p:nvSpPr>
-        <p:spPr>
-          <a:xfrm>
-            <a:off x="8128000" y="4317851"/>
-            <a:ext cx="3034792" cy="274290"/>
-          </a:xfrm>
-          <a:prstGeom prst="rect">
-            <a:avLst/>
-          </a:prstGeom>
-          <a:noFill/>
-          <a:ln/>
-        </p:spPr>
-        <p:txBody>
-          <a:bodyPr wrap="square" lIns="0" tIns="0" rIns="0" bIns="0" rtlCol="0" anchor="t">
-            <a:normAutofit/>
-          </a:bodyPr>
-          <a:lstStyle/>
-          <a:p>
-            <a:pPr algn="l" indent="0" marL="0">
-              <a:lnSpc>
-                <a:spcPts val="1960"/>
-              </a:lnSpc>
-              <a:buNone/>
-            </a:pPr>
-            <a:r>
-              <a:rPr lang="en-US" sz="1400" b="1" dirty="0">
-                <a:solidFill>
-                  <a:srgbClr val="FFFFFF"/>
-                </a:solidFill>
-                <a:latin typeface="Arial" pitchFamily="34" charset="0"/>
-                <a:ea typeface="Arial" pitchFamily="34" charset="-122"/>
-                <a:cs typeface="Arial" pitchFamily="34" charset="-120"/>
-              </a:rPr>
-              <a:t>03 一次建置</a:t>
-            </a:r>
-            <a:endParaRPr lang="en-US" sz="1400" dirty="0"/>
-          </a:p>
-        </p:txBody>
-      </p:sp>
-      <p:sp>
-        <p:nvSpPr>
-          <p:cNvPr id="24" name="Text 22"/>
-          <p:cNvSpPr/>
-          <p:nvPr/>
-        </p:nvSpPr>
-        <p:spPr>
-          <a:xfrm>
-            <a:off x="8128000" y="4617541"/>
-            <a:ext cx="3251200" cy="254000"/>
-          </a:xfrm>
-          <a:prstGeom prst="rect">
-            <a:avLst/>
-          </a:prstGeom>
-          <a:noFill/>
-          <a:ln/>
-        </p:spPr>
-        <p:txBody>
-          <a:bodyPr wrap="square" lIns="0" tIns="0" rIns="0" bIns="0" rtlCol="0" anchor="t">
-            <a:normAutofit/>
-          </a:bodyPr>
-          <a:lstStyle/>
-          <a:p>
-            <a:pPr algn="l" indent="0" marL="0">
-              <a:lnSpc>
-                <a:spcPts val="1800"/>
-              </a:lnSpc>
-              <a:buNone/>
-            </a:pPr>
-            <a:r>
-              <a:rPr lang="en-US" sz="1200" dirty="0">
-                <a:solidFill>
-                  <a:srgbClr val="FFFFFF"/>
-                </a:solidFill>
-                <a:latin typeface="Arial" pitchFamily="34" charset="0"/>
-                <a:ea typeface="Arial" pitchFamily="34" charset="-122"/>
-                <a:cs typeface="Arial" pitchFamily="34" charset="-120"/>
-              </a:rPr>
-              <a:t>所有符合標準的用戶端通用，不再逐案客製</a:t>
-            </a:r>
-            <a:endParaRPr lang="en-US" sz="1200" dirty="0"/>
-          </a:p>
-        </p:txBody>
-      </p:sp>
-      <p:sp>
-        <p:nvSpPr>
-          <p:cNvPr id="25" name="Text 23"/>
-          <p:cNvSpPr/>
-          <p:nvPr/>
-        </p:nvSpPr>
-        <p:spPr>
-          <a:xfrm>
-            <a:off x="8763000" y="6238280"/>
-            <a:ext cx="2616200" cy="238720"/>
+            <a:off x="10058400" y="6441480"/>
+            <a:ext cx="1320800" cy="238720"/>
           </a:xfrm>
           <a:prstGeom prst="rect">
             <a:avLst/>
@@ -2320,15 +1950,15 @@
               <a:buNone/>
             </a:pPr>
             <a:r>
-              <a:rPr lang="en-US" sz="1200" b="1" dirty="0">
+              <a:rPr lang="en-US" sz="1200" dirty="0">
                 <a:solidFill>
-                  <a:srgbClr val="036B3F"/>
+                  <a:srgbClr val="7F7F7F"/>
                 </a:solidFill>
                 <a:latin typeface="Arial" pitchFamily="34" charset="0"/>
                 <a:ea typeface="Arial" pitchFamily="34" charset="-122"/>
                 <a:cs typeface="Arial" pitchFamily="34" charset="-120"/>
               </a:rPr>
-              <a:t>DataEco</a:t>
+              <a:t>1 / 4</a:t>
             </a:r>
             <a:endParaRPr lang="en-US" sz="1200" dirty="0"/>
           </a:p>
@@ -2370,14 +2000,12 @@
         <p:nvSpPr>
           <p:cNvPr id="2" name="Text 0"/>
           <p:cNvSpPr/>
-          <p:nvPr>
-            <p:ph type="title"/>
-          </p:nvPr>
-        </p:nvSpPr>
-        <p:spPr>
-          <a:xfrm>
-            <a:off x="812800" y="609600"/>
-            <a:ext cx="10883392" cy="528290"/>
+          <p:nvPr/>
+        </p:nvSpPr>
+        <p:spPr>
+          <a:xfrm>
+            <a:off x="10058400" y="6441480"/>
+            <a:ext cx="1320800" cy="238720"/>
           </a:xfrm>
           <a:prstGeom prst="rect">
             <a:avLst/>
@@ -2391,14 +2019,60 @@
           </a:bodyPr>
           <a:lstStyle/>
           <a:p>
-            <a:pPr algn="l" indent="0" marL="0">
+            <a:pPr algn="r" indent="0" marL="0">
               <a:lnSpc>
-                <a:spcPts val="3960"/>
+                <a:spcPts val="1680"/>
               </a:lnSpc>
               <a:buNone/>
             </a:pPr>
             <a:r>
-              <a:rPr lang="en-US" sz="3600" b="1" i="0" dirty="0">
+              <a:rPr lang="en-US" sz="1200" dirty="0">
+                <a:solidFill>
+                  <a:srgbClr val="7F7F7F"/>
+                </a:solidFill>
+                <a:latin typeface="Arial" pitchFamily="34" charset="0"/>
+                <a:ea typeface="Arial" pitchFamily="34" charset="-122"/>
+                <a:cs typeface="Arial" pitchFamily="34" charset="-120"/>
+              </a:rPr>
+              <a:t>2 / 4</a:t>
+            </a:r>
+            <a:endParaRPr lang="en-US" sz="1200" dirty="0"/>
+          </a:p>
+        </p:txBody>
+      </p:sp>
+      <p:sp>
+        <p:nvSpPr>
+          <p:cNvPr id="3" name="Text 1"/>
+          <p:cNvSpPr/>
+          <p:nvPr>
+            <p:ph type="title"/>
+          </p:nvPr>
+        </p:nvSpPr>
+        <p:spPr>
+          <a:xfrm>
+            <a:off x="812800" y="457200"/>
+            <a:ext cx="10883392" cy="505420"/>
+          </a:xfrm>
+          <a:prstGeom prst="rect">
+            <a:avLst/>
+          </a:prstGeom>
+          <a:noFill/>
+          <a:ln/>
+        </p:spPr>
+        <p:txBody>
+          <a:bodyPr wrap="square" lIns="0" tIns="0" rIns="0" bIns="0" rtlCol="0" anchor="t">
+            <a:normAutofit/>
+          </a:bodyPr>
+          <a:lstStyle/>
+          <a:p>
+            <a:pPr algn="l" indent="0" marL="0">
+              <a:lnSpc>
+                <a:spcPts val="3824"/>
+              </a:lnSpc>
+              <a:buNone/>
+            </a:pPr>
+            <a:r>
+              <a:rPr lang="en-US" sz="3476" b="1" i="0" dirty="0">
                 <a:solidFill>
                   <a:srgbClr val="036B3F"/>
                 </a:solidFill>
@@ -2406,22 +2080,86 @@
                 <a:ea typeface="Arial" pitchFamily="34" charset="-122"/>
                 <a:cs typeface="Arial" pitchFamily="34" charset="-120"/>
               </a:rPr>
-              <a:t>MCP 情境的 OAuth 全貌：四個角色怎麼互動</a:t>
+              <a:t>AI 工具如何安全地取得企業資料</a:t>
             </a:r>
-            <a:endParaRPr lang="en-US" sz="3600" dirty="0"/>
+            <a:endParaRPr lang="en-US" sz="3476" dirty="0"/>
           </a:p>
         </p:txBody>
       </p:sp>
       <p:sp>
         <p:nvSpPr>
-          <p:cNvPr id="3" name="Shape 1"/>
+          <p:cNvPr id="4" name="Text 2"/>
           <p:cNvSpPr/>
           <p:nvPr/>
         </p:nvSpPr>
         <p:spPr>
           <a:xfrm>
-            <a:off x="812800" y="1315690"/>
-            <a:ext cx="2794000" cy="1143000"/>
+            <a:off x="812800" y="988020"/>
+            <a:ext cx="10883392" cy="262930"/>
+          </a:xfrm>
+          <a:prstGeom prst="rect">
+            <a:avLst/>
+          </a:prstGeom>
+          <a:noFill/>
+          <a:ln/>
+        </p:spPr>
+        <p:txBody>
+          <a:bodyPr wrap="square" lIns="0" tIns="0" rIns="0" bIns="0" rtlCol="0" anchor="t">
+            <a:normAutofit/>
+          </a:bodyPr>
+          <a:lstStyle/>
+          <a:p>
+            <a:pPr algn="l" indent="0" marL="0">
+              <a:lnSpc>
+                <a:spcPts val="1874"/>
+              </a:lnSpc>
+              <a:buNone/>
+            </a:pPr>
+            <a:r>
+              <a:rPr lang="en-US" sz="1339" dirty="0">
+                <a:solidFill>
+                  <a:srgbClr val="7F7F7F"/>
+                </a:solidFill>
+                <a:latin typeface="Arial" pitchFamily="34" charset="0"/>
+                <a:ea typeface="Arial" pitchFamily="34" charset="-122"/>
+                <a:cs typeface="Arial" pitchFamily="34" charset="-120"/>
+              </a:rPr>
+              <a:t>混合雲架構：MCP Server 與 OAuth Server 在公有雲執行，上游服務與資料庫留在資訊雲</a:t>
+            </a:r>
+            <a:endParaRPr lang="en-US" sz="1339" dirty="0"/>
+          </a:p>
+        </p:txBody>
+      </p:sp>
+      <p:sp>
+        <p:nvSpPr>
+          <p:cNvPr id="5" name="Shape 3"/>
+          <p:cNvSpPr/>
+          <p:nvPr/>
+        </p:nvSpPr>
+        <p:spPr>
+          <a:xfrm>
+            <a:off x="4749800" y="1397000"/>
+            <a:ext cx="3429000" cy="4445000"/>
+          </a:xfrm>
+          <a:prstGeom prst="rect">
+            <a:avLst/>
+          </a:prstGeom>
+          <a:solidFill>
+            <a:srgbClr val="EAF7EF"/>
+          </a:solidFill>
+          <a:ln/>
+        </p:spPr>
+      </p:sp>
+      <p:sp>
+        <p:nvSpPr>
+          <p:cNvPr id="6" name="Shape 4"/>
+          <p:cNvSpPr/>
+          <p:nvPr/>
+        </p:nvSpPr>
+        <p:spPr>
+          <a:xfrm>
+            <a:off x="8559800" y="1397000"/>
+            <a:ext cx="2819400" cy="4445000"/>
           </a:xfrm>
           <a:prstGeom prst="rect">
             <a:avLst/>
@@ -2432,9 +2170,34 @@
           <a:ln/>
         </p:spPr>
       </p:sp>
+      <p:sp>
+        <p:nvSpPr>
+          <p:cNvPr id="7" name="Shape 5"/>
+          <p:cNvSpPr/>
+          <p:nvPr/>
+        </p:nvSpPr>
+        <p:spPr>
+          <a:xfrm>
+            <a:off x="819150" y="1657350"/>
+            <a:ext cx="2146300" cy="1066800"/>
+          </a:xfrm>
+          <a:prstGeom prst="rect">
+            <a:avLst/>
+          </a:prstGeom>
+          <a:solidFill>
+            <a:srgbClr val="FFFFFF"/>
+          </a:solidFill>
+          <a:ln w="12700">
+            <a:solidFill>
+              <a:srgbClr val="D9DAD9"/>
+            </a:solidFill>
+            <a:prstDash val="solid"/>
+          </a:ln>
+        </p:spPr>
+      </p:sp>
       <p:pic>
         <p:nvPicPr>
-          <p:cNvPr id="4" name="Image 0" descr="Chat">    </p:cNvPr>
+          <p:cNvPr id="8" name="Image 0" descr="Chat">    </p:cNvPr>
           <p:cNvPicPr>
             <a:picLocks noChangeAspect="1"/>
           </p:cNvPicPr>
@@ -2447,8 +2210,8 @@
         </p:blipFill>
         <p:spPr>
           <a:xfrm>
-            <a:off x="2044700" y="1443980"/>
-            <a:ext cx="330200" cy="330200"/>
+            <a:off x="1752600" y="1781820"/>
+            <a:ext cx="279400" cy="279400"/>
           </a:xfrm>
           <a:prstGeom prst="rect">
             <a:avLst/>
@@ -2457,14 +2220,14 @@
       </p:pic>
       <p:sp>
         <p:nvSpPr>
-          <p:cNvPr id="5" name="Text 2"/>
+          <p:cNvPr id="9" name="Text 6"/>
           <p:cNvSpPr/>
           <p:nvPr/>
         </p:nvSpPr>
         <p:spPr>
           <a:xfrm>
-            <a:off x="1608594" y="1812280"/>
-            <a:ext cx="1202412" cy="292100"/>
+            <a:off x="1539820" y="2099320"/>
+            <a:ext cx="704910" cy="274290"/>
           </a:xfrm>
           <a:prstGeom prst="rect">
             <a:avLst/>
@@ -2480,12 +2243,12 @@
           <a:p>
             <a:pPr algn="ctr" indent="0" marL="0">
               <a:lnSpc>
-                <a:spcPts val="2100"/>
+                <a:spcPts val="1960"/>
               </a:lnSpc>
               <a:buNone/>
             </a:pPr>
             <a:r>
-              <a:rPr lang="en-US" sz="1500" b="1" dirty="0">
+              <a:rPr lang="en-US" sz="1400" b="1" dirty="0">
                 <a:solidFill>
                   <a:srgbClr val="000000"/>
                 </a:solidFill>
@@ -2493,22 +2256,22 @@
                 <a:ea typeface="Arial" pitchFamily="34" charset="-122"/>
                 <a:cs typeface="Arial" pitchFamily="34" charset="-120"/>
               </a:rPr>
-              <a:t>MCP Client</a:t>
+              <a:t>AI 工具</a:t>
             </a:r>
-            <a:endParaRPr lang="en-US" sz="1500" dirty="0"/>
+            <a:endParaRPr lang="en-US" sz="1400" dirty="0"/>
           </a:p>
         </p:txBody>
       </p:sp>
       <p:sp>
         <p:nvSpPr>
-          <p:cNvPr id="6" name="Text 3"/>
+          <p:cNvPr id="10" name="Text 7"/>
           <p:cNvSpPr/>
           <p:nvPr/>
         </p:nvSpPr>
         <p:spPr>
           <a:xfrm>
-            <a:off x="1064002" y="2117080"/>
-            <a:ext cx="2291596" cy="238720"/>
+            <a:off x="876300" y="2386310"/>
+            <a:ext cx="2032000" cy="238720"/>
           </a:xfrm>
           <a:prstGeom prst="rect">
             <a:avLst/>
@@ -2545,27 +2308,32 @@
       </p:sp>
       <p:sp>
         <p:nvSpPr>
-          <p:cNvPr id="7" name="Shape 4"/>
+          <p:cNvPr id="11" name="Shape 8"/>
           <p:cNvSpPr/>
           <p:nvPr/>
         </p:nvSpPr>
         <p:spPr>
           <a:xfrm>
-            <a:off x="8585200" y="1315690"/>
-            <a:ext cx="2794000" cy="1143000"/>
+            <a:off x="819150" y="4451350"/>
+            <a:ext cx="2146300" cy="1066800"/>
           </a:xfrm>
           <a:prstGeom prst="rect">
             <a:avLst/>
           </a:prstGeom>
           <a:solidFill>
-            <a:srgbClr val="E6FED2"/>
+            <a:srgbClr val="FFFFFF"/>
           </a:solidFill>
-          <a:ln/>
+          <a:ln w="12700">
+            <a:solidFill>
+              <a:srgbClr val="D9DAD9"/>
+            </a:solidFill>
+            <a:prstDash val="solid"/>
+          </a:ln>
         </p:spPr>
       </p:sp>
       <p:pic>
         <p:nvPicPr>
-          <p:cNvPr id="8" name="Image 1" descr="Database">    </p:cNvPr>
+          <p:cNvPr id="12" name="Image 1" descr="Users">    </p:cNvPr>
           <p:cNvPicPr>
             <a:picLocks noChangeAspect="1"/>
           </p:cNvPicPr>
@@ -2578,8 +2346,8 @@
         </p:blipFill>
         <p:spPr>
           <a:xfrm>
-            <a:off x="9817100" y="1443980"/>
-            <a:ext cx="330200" cy="330200"/>
+            <a:off x="1752600" y="4575820"/>
+            <a:ext cx="279400" cy="279400"/>
           </a:xfrm>
           <a:prstGeom prst="rect">
             <a:avLst/>
@@ -2588,14 +2356,14 @@
       </p:pic>
       <p:sp>
         <p:nvSpPr>
-          <p:cNvPr id="9" name="Text 5"/>
+          <p:cNvPr id="13" name="Text 9"/>
           <p:cNvSpPr/>
           <p:nvPr/>
         </p:nvSpPr>
         <p:spPr>
           <a:xfrm>
-            <a:off x="9342596" y="1812280"/>
-            <a:ext cx="1279208" cy="292100"/>
+            <a:off x="1459989" y="4893320"/>
+            <a:ext cx="864572" cy="274290"/>
           </a:xfrm>
           <a:prstGeom prst="rect">
             <a:avLst/>
@@ -2611,35 +2379,35 @@
           <a:p>
             <a:pPr algn="ctr" indent="0" marL="0">
               <a:lnSpc>
-                <a:spcPts val="2100"/>
+                <a:spcPts val="1960"/>
               </a:lnSpc>
               <a:buNone/>
             </a:pPr>
             <a:r>
-              <a:rPr lang="en-US" sz="1500" b="1" dirty="0">
+              <a:rPr lang="en-US" sz="1400" b="1" dirty="0">
                 <a:solidFill>
-                  <a:srgbClr val="036B3F"/>
+                  <a:srgbClr val="000000"/>
                 </a:solidFill>
                 <a:latin typeface="Arial" pitchFamily="34" charset="0"/>
                 <a:ea typeface="Arial" pitchFamily="34" charset="-122"/>
                 <a:cs typeface="Arial" pitchFamily="34" charset="-120"/>
               </a:rPr>
-              <a:t>MCP Server</a:t>
+              <a:t>企業用戶</a:t>
             </a:r>
-            <a:endParaRPr lang="en-US" sz="1500" dirty="0"/>
+            <a:endParaRPr lang="en-US" sz="1400" dirty="0"/>
           </a:p>
         </p:txBody>
       </p:sp>
       <p:sp>
         <p:nvSpPr>
-          <p:cNvPr id="10" name="Text 6"/>
+          <p:cNvPr id="14" name="Text 10"/>
           <p:cNvSpPr/>
           <p:nvPr/>
         </p:nvSpPr>
         <p:spPr>
           <a:xfrm>
-            <a:off x="8778002" y="2117080"/>
-            <a:ext cx="2408396" cy="238720"/>
+            <a:off x="1106666" y="5180310"/>
+            <a:ext cx="1571268" cy="238720"/>
           </a:xfrm>
           <a:prstGeom prst="rect">
             <a:avLst/>
@@ -2668,7 +2436,7 @@
                 <a:ea typeface="Arial" pitchFamily="34" charset="-122"/>
                 <a:cs typeface="Arial" pitchFamily="34" charset="-120"/>
               </a:rPr>
-              <a:t>資源伺服器：提供工具與資料</a:t>
+              <a:t>使用 AI 工具的員工</a:t>
             </a:r>
             <a:endParaRPr lang="en-US" sz="1200" dirty="0"/>
           </a:p>
@@ -2676,27 +2444,32 @@
       </p:sp>
       <p:sp>
         <p:nvSpPr>
-          <p:cNvPr id="11" name="Shape 7"/>
+          <p:cNvPr id="15" name="Shape 11"/>
           <p:cNvSpPr/>
           <p:nvPr/>
         </p:nvSpPr>
         <p:spPr>
           <a:xfrm>
-            <a:off x="812800" y="4617690"/>
-            <a:ext cx="2794000" cy="1143000"/>
+            <a:off x="5010150" y="1689100"/>
+            <a:ext cx="2908300" cy="1003300"/>
           </a:xfrm>
           <a:prstGeom prst="rect">
             <a:avLst/>
           </a:prstGeom>
           <a:solidFill>
-            <a:srgbClr val="F3F3F3"/>
+            <a:srgbClr val="FFFFFF"/>
           </a:solidFill>
-          <a:ln/>
+          <a:ln w="12700">
+            <a:solidFill>
+              <a:srgbClr val="99E891"/>
+            </a:solidFill>
+            <a:prstDash val="solid"/>
+          </a:ln>
         </p:spPr>
       </p:sp>
       <p:pic>
         <p:nvPicPr>
-          <p:cNvPr id="12" name="Image 2" descr="Users">    </p:cNvPr>
+          <p:cNvPr id="16" name="Image 2" descr="Tool">    </p:cNvPr>
           <p:cNvPicPr>
             <a:picLocks noChangeAspect="1"/>
           </p:cNvPicPr>
@@ -2709,8 +2482,8 @@
         </p:blipFill>
         <p:spPr>
           <a:xfrm>
-            <a:off x="2044700" y="4745980"/>
-            <a:ext cx="330200" cy="330200"/>
+            <a:off x="6324600" y="1781820"/>
+            <a:ext cx="279400" cy="279400"/>
           </a:xfrm>
           <a:prstGeom prst="rect">
             <a:avLst/>
@@ -2719,14 +2492,14 @@
       </p:pic>
       <p:sp>
         <p:nvSpPr>
-          <p:cNvPr id="13" name="Text 8"/>
+          <p:cNvPr id="17" name="Text 12"/>
           <p:cNvSpPr/>
           <p:nvPr/>
         </p:nvSpPr>
         <p:spPr>
           <a:xfrm>
-            <a:off x="1747545" y="5114280"/>
-            <a:ext cx="924461" cy="292100"/>
+            <a:off x="5867326" y="2099320"/>
+            <a:ext cx="1193899" cy="274290"/>
           </a:xfrm>
           <a:prstGeom prst="rect">
             <a:avLst/>
@@ -2742,35 +2515,35 @@
           <a:p>
             <a:pPr algn="ctr" indent="0" marL="0">
               <a:lnSpc>
-                <a:spcPts val="2100"/>
+                <a:spcPts val="1960"/>
               </a:lnSpc>
               <a:buNone/>
             </a:pPr>
             <a:r>
-              <a:rPr lang="en-US" sz="1500" b="1" dirty="0">
+              <a:rPr lang="en-US" sz="1400" b="1" dirty="0">
                 <a:solidFill>
-                  <a:srgbClr val="000000"/>
+                  <a:srgbClr val="036B3F"/>
                 </a:solidFill>
                 <a:latin typeface="Arial" pitchFamily="34" charset="0"/>
                 <a:ea typeface="Arial" pitchFamily="34" charset="-122"/>
                 <a:cs typeface="Arial" pitchFamily="34" charset="-120"/>
               </a:rPr>
-              <a:t>企業用戶</a:t>
+              <a:t>MCP Server</a:t>
             </a:r>
-            <a:endParaRPr lang="en-US" sz="1500" dirty="0"/>
+            <a:endParaRPr lang="en-US" sz="1400" dirty="0"/>
           </a:p>
         </p:txBody>
       </p:sp>
       <p:sp>
         <p:nvSpPr>
-          <p:cNvPr id="14" name="Text 9"/>
+          <p:cNvPr id="18" name="Text 13"/>
           <p:cNvSpPr/>
           <p:nvPr/>
         </p:nvSpPr>
         <p:spPr>
           <a:xfrm>
-            <a:off x="1098233" y="5419080"/>
-            <a:ext cx="2223135" cy="238720"/>
+            <a:off x="5493410" y="2386310"/>
+            <a:ext cx="1941731" cy="238720"/>
           </a:xfrm>
           <a:prstGeom prst="rect">
             <a:avLst/>
@@ -2799,7 +2572,7 @@
                 <a:ea typeface="Arial" pitchFamily="34" charset="-122"/>
                 <a:cs typeface="Arial" pitchFamily="34" charset="-120"/>
               </a:rPr>
-              <a:t>資源擁有者（統編＋帳號）</a:t>
+              <a:t>提供 AI 可用的查詢服務</a:t>
             </a:r>
             <a:endParaRPr lang="en-US" sz="1200" dirty="0"/>
           </a:p>
@@ -2807,14 +2580,14 @@
       </p:sp>
       <p:sp>
         <p:nvSpPr>
-          <p:cNvPr id="15" name="Shape 10"/>
+          <p:cNvPr id="19" name="Shape 14"/>
           <p:cNvSpPr/>
           <p:nvPr/>
         </p:nvSpPr>
         <p:spPr>
           <a:xfrm>
-            <a:off x="8585200" y="4617690"/>
-            <a:ext cx="2794000" cy="1143000"/>
+            <a:off x="5003800" y="4476750"/>
+            <a:ext cx="2921000" cy="1016000"/>
           </a:xfrm>
           <a:prstGeom prst="rect">
             <a:avLst/>
@@ -2827,7 +2600,7 @@
       </p:sp>
       <p:pic>
         <p:nvPicPr>
-          <p:cNvPr id="16" name="Image 3" descr="Lock">    </p:cNvPr>
+          <p:cNvPr id="20" name="Image 3" descr="Lock">    </p:cNvPr>
           <p:cNvPicPr>
             <a:picLocks noChangeAspect="1"/>
           </p:cNvPicPr>
@@ -2840,8 +2613,8 @@
         </p:blipFill>
         <p:spPr>
           <a:xfrm>
-            <a:off x="9817100" y="4745980"/>
-            <a:ext cx="330200" cy="330200"/>
+            <a:off x="6324600" y="4575820"/>
+            <a:ext cx="279400" cy="279400"/>
           </a:xfrm>
           <a:prstGeom prst="rect">
             <a:avLst/>
@@ -2850,14 +2623,14 @@
       </p:pic>
       <p:sp>
         <p:nvSpPr>
-          <p:cNvPr id="17" name="Text 11"/>
+          <p:cNvPr id="21" name="Text 15"/>
           <p:cNvSpPr/>
           <p:nvPr/>
         </p:nvSpPr>
         <p:spPr>
           <a:xfrm>
-            <a:off x="9404390" y="5114280"/>
-            <a:ext cx="1155621" cy="292100"/>
+            <a:off x="5776595" y="4893320"/>
+            <a:ext cx="1375410" cy="274290"/>
           </a:xfrm>
           <a:prstGeom prst="rect">
             <a:avLst/>
@@ -2873,12 +2646,12 @@
           <a:p>
             <a:pPr algn="ctr" indent="0" marL="0">
               <a:lnSpc>
-                <a:spcPts val="2100"/>
+                <a:spcPts val="1960"/>
               </a:lnSpc>
               <a:buNone/>
             </a:pPr>
             <a:r>
-              <a:rPr lang="en-US" sz="1500" b="1" dirty="0">
+              <a:rPr lang="en-US" sz="1400" b="1" dirty="0">
                 <a:solidFill>
                   <a:srgbClr val="FFFFFF"/>
                 </a:solidFill>
@@ -2886,22 +2659,22 @@
                 <a:ea typeface="Arial" pitchFamily="34" charset="-122"/>
                 <a:cs typeface="Arial" pitchFamily="34" charset="-120"/>
               </a:rPr>
-              <a:t>授權伺服器</a:t>
+              <a:t>OAuth Server</a:t>
             </a:r>
-            <a:endParaRPr lang="en-US" sz="1500" dirty="0"/>
+            <a:endParaRPr lang="en-US" sz="1400" dirty="0"/>
           </a:p>
         </p:txBody>
       </p:sp>
       <p:sp>
         <p:nvSpPr>
-          <p:cNvPr id="18" name="Text 12"/>
+          <p:cNvPr id="22" name="Text 16"/>
           <p:cNvSpPr/>
           <p:nvPr/>
         </p:nvSpPr>
         <p:spPr>
           <a:xfrm>
-            <a:off x="8745260" y="5419080"/>
-            <a:ext cx="2473881" cy="238720"/>
+            <a:off x="5630624" y="5180310"/>
+            <a:ext cx="1667351" cy="238720"/>
           </a:xfrm>
           <a:prstGeom prst="rect">
             <a:avLst/>
@@ -2930,15 +2703,40 @@
                 <a:ea typeface="Arial" pitchFamily="34" charset="-122"/>
                 <a:cs typeface="Arial" pitchFamily="34" charset="-120"/>
               </a:rPr>
-              <a:t>OAuth 2.1：登入、核發 Token</a:t>
+              <a:t>負責登入、發通行證</a:t>
             </a:r>
             <a:endParaRPr lang="en-US" sz="1200" dirty="0"/>
           </a:p>
         </p:txBody>
       </p:sp>
+      <p:sp>
+        <p:nvSpPr>
+          <p:cNvPr id="23" name="Shape 17"/>
+          <p:cNvSpPr/>
+          <p:nvPr/>
+        </p:nvSpPr>
+        <p:spPr>
+          <a:xfrm>
+            <a:off x="8782050" y="1689100"/>
+            <a:ext cx="2374900" cy="1003300"/>
+          </a:xfrm>
+          <a:prstGeom prst="rect">
+            <a:avLst/>
+          </a:prstGeom>
+          <a:solidFill>
+            <a:srgbClr val="FFFFFF"/>
+          </a:solidFill>
+          <a:ln w="12700">
+            <a:solidFill>
+              <a:srgbClr val="D9DAD9"/>
+            </a:solidFill>
+            <a:prstDash val="solid"/>
+          </a:ln>
+        </p:spPr>
+      </p:sp>
       <p:pic>
         <p:nvPicPr>
-          <p:cNvPr id="19" name="Image 4" descr="connector">    </p:cNvPr>
+          <p:cNvPr id="24" name="Image 4" descr="Link">    </p:cNvPr>
           <p:cNvPicPr>
             <a:picLocks noChangeAspect="1"/>
           </p:cNvPicPr>
@@ -2951,17 +2749,130 @@
         </p:blipFill>
         <p:spPr>
           <a:xfrm>
-            <a:off x="2146300" y="2395190"/>
-            <a:ext cx="127000" cy="2286000"/>
+            <a:off x="9829800" y="1781820"/>
+            <a:ext cx="279400" cy="279400"/>
           </a:xfrm>
           <a:prstGeom prst="rect">
             <a:avLst/>
           </a:prstGeom>
         </p:spPr>
       </p:pic>
+      <p:sp>
+        <p:nvSpPr>
+          <p:cNvPr id="25" name="Text 18"/>
+          <p:cNvSpPr/>
+          <p:nvPr/>
+        </p:nvSpPr>
+        <p:spPr>
+          <a:xfrm>
+            <a:off x="9537189" y="2099320"/>
+            <a:ext cx="864572" cy="274290"/>
+          </a:xfrm>
+          <a:prstGeom prst="rect">
+            <a:avLst/>
+          </a:prstGeom>
+          <a:noFill/>
+          <a:ln/>
+        </p:spPr>
+        <p:txBody>
+          <a:bodyPr wrap="square" lIns="0" tIns="0" rIns="0" bIns="0" rtlCol="0" anchor="t">
+            <a:normAutofit/>
+          </a:bodyPr>
+          <a:lstStyle/>
+          <a:p>
+            <a:pPr algn="ctr" indent="0" marL="0">
+              <a:lnSpc>
+                <a:spcPts val="1960"/>
+              </a:lnSpc>
+              <a:buNone/>
+            </a:pPr>
+            <a:r>
+              <a:rPr lang="en-US" sz="1400" b="1" dirty="0">
+                <a:solidFill>
+                  <a:srgbClr val="000000"/>
+                </a:solidFill>
+                <a:latin typeface="Arial" pitchFamily="34" charset="0"/>
+                <a:ea typeface="Arial" pitchFamily="34" charset="-122"/>
+                <a:cs typeface="Arial" pitchFamily="34" charset="-120"/>
+              </a:rPr>
+              <a:t>上游服務</a:t>
+            </a:r>
+            <a:endParaRPr lang="en-US" sz="1400" dirty="0"/>
+          </a:p>
+        </p:txBody>
+      </p:sp>
+      <p:sp>
+        <p:nvSpPr>
+          <p:cNvPr id="26" name="Text 19"/>
+          <p:cNvSpPr/>
+          <p:nvPr/>
+        </p:nvSpPr>
+        <p:spPr>
+          <a:xfrm>
+            <a:off x="9009444" y="2386310"/>
+            <a:ext cx="1920061" cy="238720"/>
+          </a:xfrm>
+          <a:prstGeom prst="rect">
+            <a:avLst/>
+          </a:prstGeom>
+          <a:noFill/>
+          <a:ln/>
+        </p:spPr>
+        <p:txBody>
+          <a:bodyPr wrap="square" lIns="0" tIns="0" rIns="0" bIns="0" rtlCol="0" anchor="t">
+            <a:normAutofit/>
+          </a:bodyPr>
+          <a:lstStyle/>
+          <a:p>
+            <a:pPr algn="ctr" indent="0" marL="0">
+              <a:lnSpc>
+                <a:spcPts val="1680"/>
+              </a:lnSpc>
+              <a:buNone/>
+            </a:pPr>
+            <a:r>
+              <a:rPr lang="en-US" sz="1200" dirty="0">
+                <a:solidFill>
+                  <a:srgbClr val="000000"/>
+                </a:solidFill>
+                <a:latin typeface="Arial" pitchFamily="34" charset="0"/>
+                <a:ea typeface="Arial" pitchFamily="34" charset="-122"/>
+                <a:cs typeface="Arial" pitchFamily="34" charset="-120"/>
+              </a:rPr>
+              <a:t>GMB、中台、API Bank</a:t>
+            </a:r>
+            <a:endParaRPr lang="en-US" sz="1200" dirty="0"/>
+          </a:p>
+        </p:txBody>
+      </p:sp>
+      <p:sp>
+        <p:nvSpPr>
+          <p:cNvPr id="27" name="Shape 20"/>
+          <p:cNvSpPr/>
+          <p:nvPr/>
+        </p:nvSpPr>
+        <p:spPr>
+          <a:xfrm>
+            <a:off x="8782050" y="3054350"/>
+            <a:ext cx="2374900" cy="1003300"/>
+          </a:xfrm>
+          <a:prstGeom prst="rect">
+            <a:avLst/>
+          </a:prstGeom>
+          <a:solidFill>
+            <a:srgbClr val="FFFFFF"/>
+          </a:solidFill>
+          <a:ln w="12700">
+            <a:solidFill>
+              <a:srgbClr val="D9DAD9"/>
+            </a:solidFill>
+            <a:prstDash val="solid"/>
+          </a:ln>
+        </p:spPr>
+      </p:sp>
       <p:pic>
         <p:nvPicPr>
-          <p:cNvPr id="20" name="Image 5" descr="connector">    </p:cNvPr>
+          <p:cNvPr id="28" name="Image 5" descr="Database">    </p:cNvPr>
           <p:cNvPicPr>
             <a:picLocks noChangeAspect="1"/>
           </p:cNvPicPr>
@@ -2974,17 +2885,130 @@
         </p:blipFill>
         <p:spPr>
           <a:xfrm>
-            <a:off x="3530600" y="5112990"/>
-            <a:ext cx="5130800" cy="152400"/>
+            <a:off x="9829800" y="3147070"/>
+            <a:ext cx="279400" cy="279400"/>
           </a:xfrm>
           <a:prstGeom prst="rect">
             <a:avLst/>
           </a:prstGeom>
         </p:spPr>
       </p:pic>
+      <p:sp>
+        <p:nvSpPr>
+          <p:cNvPr id="29" name="Text 21"/>
+          <p:cNvSpPr/>
+          <p:nvPr/>
+        </p:nvSpPr>
+        <p:spPr>
+          <a:xfrm>
+            <a:off x="9429140" y="3464570"/>
+            <a:ext cx="1080671" cy="274290"/>
+          </a:xfrm>
+          <a:prstGeom prst="rect">
+            <a:avLst/>
+          </a:prstGeom>
+          <a:noFill/>
+          <a:ln/>
+        </p:spPr>
+        <p:txBody>
+          <a:bodyPr wrap="square" lIns="0" tIns="0" rIns="0" bIns="0" rtlCol="0" anchor="t">
+            <a:normAutofit/>
+          </a:bodyPr>
+          <a:lstStyle/>
+          <a:p>
+            <a:pPr algn="ctr" indent="0" marL="0">
+              <a:lnSpc>
+                <a:spcPts val="1960"/>
+              </a:lnSpc>
+              <a:buNone/>
+            </a:pPr>
+            <a:r>
+              <a:rPr lang="en-US" sz="1400" b="1" dirty="0">
+                <a:solidFill>
+                  <a:srgbClr val="000000"/>
+                </a:solidFill>
+                <a:latin typeface="Arial" pitchFamily="34" charset="0"/>
+                <a:ea typeface="Arial" pitchFamily="34" charset="-122"/>
+                <a:cs typeface="Arial" pitchFamily="34" charset="-120"/>
+              </a:rPr>
+              <a:t>業務資料庫</a:t>
+            </a:r>
+            <a:endParaRPr lang="en-US" sz="1400" dirty="0"/>
+          </a:p>
+        </p:txBody>
+      </p:sp>
+      <p:sp>
+        <p:nvSpPr>
+          <p:cNvPr id="30" name="Text 22"/>
+          <p:cNvSpPr/>
+          <p:nvPr/>
+        </p:nvSpPr>
+        <p:spPr>
+          <a:xfrm>
+            <a:off x="9321086" y="3751560"/>
+            <a:ext cx="1296829" cy="238720"/>
+          </a:xfrm>
+          <a:prstGeom prst="rect">
+            <a:avLst/>
+          </a:prstGeom>
+          <a:noFill/>
+          <a:ln/>
+        </p:spPr>
+        <p:txBody>
+          <a:bodyPr wrap="square" lIns="0" tIns="0" rIns="0" bIns="0" rtlCol="0" anchor="t">
+            <a:normAutofit/>
+          </a:bodyPr>
+          <a:lstStyle/>
+          <a:p>
+            <a:pPr algn="ctr" indent="0" marL="0">
+              <a:lnSpc>
+                <a:spcPts val="1680"/>
+              </a:lnSpc>
+              <a:buNone/>
+            </a:pPr>
+            <a:r>
+              <a:rPr lang="en-US" sz="1200" dirty="0">
+                <a:solidFill>
+                  <a:srgbClr val="000000"/>
+                </a:solidFill>
+                <a:latin typeface="Arial" pitchFamily="34" charset="0"/>
+                <a:ea typeface="Arial" pitchFamily="34" charset="-122"/>
+                <a:cs typeface="Arial" pitchFamily="34" charset="-120"/>
+              </a:rPr>
+              <a:t>企業的服務資料</a:t>
+            </a:r>
+            <a:endParaRPr lang="en-US" sz="1200" dirty="0"/>
+          </a:p>
+        </p:txBody>
+      </p:sp>
+      <p:sp>
+        <p:nvSpPr>
+          <p:cNvPr id="31" name="Shape 23"/>
+          <p:cNvSpPr/>
+          <p:nvPr/>
+        </p:nvSpPr>
+        <p:spPr>
+          <a:xfrm>
+            <a:off x="8782050" y="4483100"/>
+            <a:ext cx="2374900" cy="1003300"/>
+          </a:xfrm>
+          <a:prstGeom prst="rect">
+            <a:avLst/>
+          </a:prstGeom>
+          <a:solidFill>
+            <a:srgbClr val="FFFFFF"/>
+          </a:solidFill>
+          <a:ln w="12700">
+            <a:solidFill>
+              <a:srgbClr val="D9DAD9"/>
+            </a:solidFill>
+            <a:prstDash val="solid"/>
+          </a:ln>
+        </p:spPr>
+      </p:sp>
       <p:pic>
         <p:nvPicPr>
-          <p:cNvPr id="21" name="Image 6" descr="connector">    </p:cNvPr>
+          <p:cNvPr id="32" name="Image 6" descr="Database">    </p:cNvPr>
           <p:cNvPicPr>
             <a:picLocks noChangeAspect="1"/>
           </p:cNvPicPr>
@@ -2997,17 +3021,105 @@
         </p:blipFill>
         <p:spPr>
           <a:xfrm>
-            <a:off x="3543300" y="2204690"/>
-            <a:ext cx="5105400" cy="2730500"/>
+            <a:off x="9829800" y="4575820"/>
+            <a:ext cx="279400" cy="279400"/>
           </a:xfrm>
           <a:prstGeom prst="rect">
             <a:avLst/>
           </a:prstGeom>
         </p:spPr>
       </p:pic>
+      <p:sp>
+        <p:nvSpPr>
+          <p:cNvPr id="33" name="Text 24"/>
+          <p:cNvSpPr/>
+          <p:nvPr/>
+        </p:nvSpPr>
+        <p:spPr>
+          <a:xfrm>
+            <a:off x="9366746" y="4893320"/>
+            <a:ext cx="1205508" cy="274290"/>
+          </a:xfrm>
+          <a:prstGeom prst="rect">
+            <a:avLst/>
+          </a:prstGeom>
+          <a:noFill/>
+          <a:ln/>
+        </p:spPr>
+        <p:txBody>
+          <a:bodyPr wrap="square" lIns="0" tIns="0" rIns="0" bIns="0" rtlCol="0" anchor="t">
+            <a:normAutofit/>
+          </a:bodyPr>
+          <a:lstStyle/>
+          <a:p>
+            <a:pPr algn="ctr" indent="0" marL="0">
+              <a:lnSpc>
+                <a:spcPts val="1960"/>
+              </a:lnSpc>
+              <a:buNone/>
+            </a:pPr>
+            <a:r>
+              <a:rPr lang="en-US" sz="1400" b="1" dirty="0">
+                <a:solidFill>
+                  <a:srgbClr val="000000"/>
+                </a:solidFill>
+                <a:latin typeface="Arial" pitchFamily="34" charset="0"/>
+                <a:ea typeface="Arial" pitchFamily="34" charset="-122"/>
+                <a:cs typeface="Arial" pitchFamily="34" charset="-120"/>
+              </a:rPr>
+              <a:t>GMB 資料庫</a:t>
+            </a:r>
+            <a:endParaRPr lang="en-US" sz="1400" dirty="0"/>
+          </a:p>
+        </p:txBody>
+      </p:sp>
+      <p:sp>
+        <p:nvSpPr>
+          <p:cNvPr id="34" name="Text 25"/>
+          <p:cNvSpPr/>
+          <p:nvPr/>
+        </p:nvSpPr>
+        <p:spPr>
+          <a:xfrm>
+            <a:off x="9228455" y="5180310"/>
+            <a:ext cx="1482090" cy="238720"/>
+          </a:xfrm>
+          <a:prstGeom prst="rect">
+            <a:avLst/>
+          </a:prstGeom>
+          <a:noFill/>
+          <a:ln/>
+        </p:spPr>
+        <p:txBody>
+          <a:bodyPr wrap="square" lIns="0" tIns="0" rIns="0" bIns="0" rtlCol="0" anchor="t">
+            <a:normAutofit/>
+          </a:bodyPr>
+          <a:lstStyle/>
+          <a:p>
+            <a:pPr algn="ctr" indent="0" marL="0">
+              <a:lnSpc>
+                <a:spcPts val="1680"/>
+              </a:lnSpc>
+              <a:buNone/>
+            </a:pPr>
+            <a:r>
+              <a:rPr lang="en-US" sz="1200" dirty="0">
+                <a:solidFill>
+                  <a:srgbClr val="000000"/>
+                </a:solidFill>
+                <a:latin typeface="Arial" pitchFamily="34" charset="0"/>
+                <a:ea typeface="Arial" pitchFamily="34" charset="-122"/>
+                <a:cs typeface="Arial" pitchFamily="34" charset="-120"/>
+              </a:rPr>
+              <a:t>統編、帳號、密碼</a:t>
+            </a:r>
+            <a:endParaRPr lang="en-US" sz="1200" dirty="0"/>
+          </a:p>
+        </p:txBody>
+      </p:sp>
       <p:pic>
         <p:nvPicPr>
-          <p:cNvPr id="22" name="Image 7" descr="connector">    </p:cNvPr>
+          <p:cNvPr id="35" name="Image 7" descr="connector">    </p:cNvPr>
           <p:cNvPicPr>
             <a:picLocks noChangeAspect="1"/>
           </p:cNvPicPr>
@@ -3020,8 +3132,8 @@
         </p:blipFill>
         <p:spPr>
           <a:xfrm>
-            <a:off x="3543300" y="1823690"/>
-            <a:ext cx="5105400" cy="127000"/>
+            <a:off x="1828800" y="2667000"/>
+            <a:ext cx="127000" cy="1841500"/>
           </a:xfrm>
           <a:prstGeom prst="rect">
             <a:avLst/>
@@ -3030,7 +3142,7 @@
       </p:pic>
       <p:pic>
         <p:nvPicPr>
-          <p:cNvPr id="23" name="Image 8" descr="connector">    </p:cNvPr>
+          <p:cNvPr id="36" name="Image 8" descr="connector">    </p:cNvPr>
           <p:cNvPicPr>
             <a:picLocks noChangeAspect="1"/>
           </p:cNvPicPr>
@@ -3043,24 +3155,162 @@
         </p:blipFill>
         <p:spPr>
           <a:xfrm>
-            <a:off x="9918700" y="2395190"/>
-            <a:ext cx="127000" cy="2286000"/>
+            <a:off x="2908300" y="4921250"/>
+            <a:ext cx="2159000" cy="127000"/>
           </a:xfrm>
           <a:prstGeom prst="rect">
             <a:avLst/>
           </a:prstGeom>
         </p:spPr>
       </p:pic>
-      <p:sp>
-        <p:nvSpPr>
-          <p:cNvPr id="24" name="Text 13"/>
+      <p:pic>
+        <p:nvPicPr>
+          <p:cNvPr id="37" name="Image 9" descr="connector">    </p:cNvPr>
+          <p:cNvPicPr>
+            <a:picLocks noChangeAspect="1"/>
+          </p:cNvPicPr>
+          <p:nvPr/>
+        </p:nvPicPr>
+        <p:blipFill>
+          <a:blip r:embed="rId10"/>
+          <a:srcRect l="0" r="0" t="0" b="0"/>
+          <a:stretch/>
+        </p:blipFill>
+        <p:spPr>
+          <a:xfrm>
+            <a:off x="2908300" y="2476500"/>
+            <a:ext cx="2159000" cy="2159000"/>
+          </a:xfrm>
+          <a:prstGeom prst="rect">
+            <a:avLst/>
+          </a:prstGeom>
+        </p:spPr>
+      </p:pic>
+      <p:pic>
+        <p:nvPicPr>
+          <p:cNvPr id="38" name="Image 10" descr="connector">    </p:cNvPr>
+          <p:cNvPicPr>
+            <a:picLocks noChangeAspect="1"/>
+          </p:cNvPicPr>
+          <p:nvPr/>
+        </p:nvPicPr>
+        <p:blipFill>
+          <a:blip r:embed="rId11"/>
+          <a:srcRect l="0" r="0" t="0" b="0"/>
+          <a:stretch/>
+        </p:blipFill>
+        <p:spPr>
+          <a:xfrm>
+            <a:off x="2908300" y="2127250"/>
+            <a:ext cx="2159000" cy="127000"/>
+          </a:xfrm>
+          <a:prstGeom prst="rect">
+            <a:avLst/>
+          </a:prstGeom>
+        </p:spPr>
+      </p:pic>
+      <p:pic>
+        <p:nvPicPr>
+          <p:cNvPr id="39" name="Image 11" descr="connector">    </p:cNvPr>
+          <p:cNvPicPr>
+            <a:picLocks noChangeAspect="1"/>
+          </p:cNvPicPr>
+          <p:nvPr/>
+        </p:nvPicPr>
+        <p:blipFill>
+          <a:blip r:embed="rId12"/>
+          <a:srcRect l="0" r="0" t="0" b="0"/>
+          <a:stretch/>
+        </p:blipFill>
+        <p:spPr>
+          <a:xfrm>
+            <a:off x="6400800" y="2635250"/>
+            <a:ext cx="127000" cy="1905000"/>
+          </a:xfrm>
+          <a:prstGeom prst="rect">
+            <a:avLst/>
+          </a:prstGeom>
+        </p:spPr>
+      </p:pic>
+      <p:pic>
+        <p:nvPicPr>
+          <p:cNvPr id="40" name="Image 12" descr="connector">    </p:cNvPr>
+          <p:cNvPicPr>
+            <a:picLocks noChangeAspect="1"/>
+          </p:cNvPicPr>
+          <p:nvPr/>
+        </p:nvPicPr>
+        <p:blipFill>
+          <a:blip r:embed="rId13"/>
+          <a:srcRect l="0" r="0" t="0" b="0"/>
+          <a:stretch/>
+        </p:blipFill>
+        <p:spPr>
+          <a:xfrm>
+            <a:off x="7861300" y="2127250"/>
+            <a:ext cx="977900" cy="127000"/>
+          </a:xfrm>
+          <a:prstGeom prst="rect">
+            <a:avLst/>
+          </a:prstGeom>
+        </p:spPr>
+      </p:pic>
+      <p:pic>
+        <p:nvPicPr>
+          <p:cNvPr id="41" name="Image 13" descr="connector">    </p:cNvPr>
+          <p:cNvPicPr>
+            <a:picLocks noChangeAspect="1"/>
+          </p:cNvPicPr>
+          <p:nvPr/>
+        </p:nvPicPr>
+        <p:blipFill>
+          <a:blip r:embed="rId14"/>
+          <a:srcRect l="0" r="0" t="0" b="0"/>
+          <a:stretch/>
+        </p:blipFill>
+        <p:spPr>
+          <a:xfrm>
+            <a:off x="7607300" y="2635250"/>
+            <a:ext cx="1231900" cy="984250"/>
+          </a:xfrm>
+          <a:prstGeom prst="rect">
+            <a:avLst/>
+          </a:prstGeom>
+        </p:spPr>
+      </p:pic>
+      <p:pic>
+        <p:nvPicPr>
+          <p:cNvPr id="42" name="Image 14" descr="connector">    </p:cNvPr>
+          <p:cNvPicPr>
+            <a:picLocks noChangeAspect="1"/>
+          </p:cNvPicPr>
+          <p:nvPr/>
+        </p:nvPicPr>
+        <p:blipFill>
+          <a:blip r:embed="rId15"/>
+          <a:srcRect l="0" r="0" t="0" b="0"/>
+          <a:stretch/>
+        </p:blipFill>
+        <p:spPr>
+          <a:xfrm>
+            <a:off x="7861300" y="4921250"/>
+            <a:ext cx="977900" cy="127000"/>
+          </a:xfrm>
+          <a:prstGeom prst="rect">
+            <a:avLst/>
+          </a:prstGeom>
+        </p:spPr>
+      </p:pic>
+      <p:sp>
+        <p:nvSpPr>
+          <p:cNvPr id="43" name="Text 26"/>
           <p:cNvSpPr/>
           <p:nvPr/>
         </p:nvSpPr>
         <p:spPr>
           <a:xfrm>
-            <a:off x="2336800" y="3347690"/>
-            <a:ext cx="1962150" cy="256530"/>
+            <a:off x="1993900" y="3302000"/>
+            <a:ext cx="1003300" cy="665361"/>
           </a:xfrm>
           <a:prstGeom prst="rect">
             <a:avLst/>
@@ -3075,246 +3325,6 @@
           <a:lstStyle/>
           <a:p>
             <a:pPr algn="l" indent="0" marL="0">
-              <a:lnSpc>
-                <a:spcPts val="1820"/>
-              </a:lnSpc>
-              <a:buNone/>
-            </a:pPr>
-            <a:r>
-              <a:rPr lang="en-US" sz="1300" b="1" dirty="0">
-                <a:solidFill>
-                  <a:srgbClr val="036B3F"/>
-                </a:solidFill>
-                <a:latin typeface="Arial" pitchFamily="34" charset="0"/>
-                <a:ea typeface="Arial" pitchFamily="34" charset="-122"/>
-                <a:cs typeface="Arial" pitchFamily="34" charset="-120"/>
-              </a:rPr>
-              <a:t>① 使用 AI 工具存取服務</a:t>
-            </a:r>
-            <a:endParaRPr lang="en-US" sz="1300" dirty="0"/>
-          </a:p>
-        </p:txBody>
-      </p:sp>
-      <p:sp>
-        <p:nvSpPr>
-          <p:cNvPr id="25" name="Text 14"/>
-          <p:cNvSpPr/>
-          <p:nvPr/>
-        </p:nvSpPr>
-        <p:spPr>
-          <a:xfrm>
-            <a:off x="3793744" y="4744690"/>
-            <a:ext cx="4604512" cy="256530"/>
-          </a:xfrm>
-          <a:prstGeom prst="rect">
-            <a:avLst/>
-          </a:prstGeom>
-          <a:noFill/>
-          <a:ln/>
-        </p:spPr>
-        <p:txBody>
-          <a:bodyPr wrap="square" lIns="0" tIns="0" rIns="0" bIns="0" rtlCol="0" anchor="t">
-            <a:normAutofit/>
-          </a:bodyPr>
-          <a:lstStyle/>
-          <a:p>
-            <a:pPr algn="ctr" indent="0" marL="0">
-              <a:lnSpc>
-                <a:spcPts val="1820"/>
-              </a:lnSpc>
-              <a:buNone/>
-            </a:pPr>
-            <a:r>
-              <a:rPr lang="en-US" sz="1300" b="1" dirty="0">
-                <a:solidFill>
-                  <a:srgbClr val="036B3F"/>
-                </a:solidFill>
-                <a:latin typeface="Arial" pitchFamily="34" charset="0"/>
-                <a:ea typeface="Arial" pitchFamily="34" charset="-122"/>
-                <a:cs typeface="Arial" pitchFamily="34" charset="-120"/>
-              </a:rPr>
-              <a:t>② 在授權伺服器登入頁輸入統編＋帳號＋密碼，同意授權</a:t>
-            </a:r>
-            <a:endParaRPr lang="en-US" sz="1300" dirty="0"/>
-          </a:p>
-        </p:txBody>
-      </p:sp>
-      <p:sp>
-        <p:nvSpPr>
-          <p:cNvPr id="26" name="Text 15"/>
-          <p:cNvSpPr/>
-          <p:nvPr/>
-        </p:nvSpPr>
-        <p:spPr>
-          <a:xfrm>
-            <a:off x="5638800" y="2522190"/>
-            <a:ext cx="2877820" cy="718790"/>
-          </a:xfrm>
-          <a:prstGeom prst="rect">
-            <a:avLst/>
-          </a:prstGeom>
-          <a:noFill/>
-          <a:ln/>
-        </p:spPr>
-        <p:txBody>
-          <a:bodyPr wrap="square" lIns="0" tIns="0" rIns="0" bIns="0" rtlCol="0" anchor="t">
-            <a:normAutofit/>
-          </a:bodyPr>
-          <a:lstStyle/>
-          <a:p>
-            <a:pPr algn="l" indent="0" marL="0">
-              <a:lnSpc>
-                <a:spcPts val="1820"/>
-              </a:lnSpc>
-              <a:buNone/>
-            </a:pPr>
-            <a:r>
-              <a:rPr lang="en-US" sz="1300" b="1" dirty="0">
-                <a:solidFill>
-                  <a:srgbClr val="036B3F"/>
-                </a:solidFill>
-                <a:latin typeface="Arial" pitchFamily="34" charset="0"/>
-                <a:ea typeface="Arial" pitchFamily="34" charset="-122"/>
-                <a:cs typeface="Arial" pitchFamily="34" charset="-120"/>
-              </a:rPr>
-              <a:t>③ 核發授權碼（經瀏覽器導回）</a:t>
-            </a:r>
-            <a:endParaRPr lang="en-US" sz="1300" dirty="0"/>
-          </a:p>
-          <a:p>
-            <a:pPr algn="l" indent="0" marL="0">
-              <a:lnSpc>
-                <a:spcPts val="1820"/>
-              </a:lnSpc>
-              <a:buNone/>
-            </a:pPr>
-            <a:r>
-              <a:rPr lang="en-US" sz="1300" b="1" dirty="0">
-                <a:solidFill>
-                  <a:srgbClr val="036B3F"/>
-                </a:solidFill>
-                <a:latin typeface="Arial" pitchFamily="34" charset="0"/>
-                <a:ea typeface="Arial" pitchFamily="34" charset="-122"/>
-                <a:cs typeface="Arial" pitchFamily="34" charset="-120"/>
-              </a:rPr>
-              <a:t>④ 授權碼＋PKCE 換發 Access Token</a:t>
-            </a:r>
-            <a:endParaRPr lang="en-US" sz="1300" dirty="0"/>
-          </a:p>
-        </p:txBody>
-      </p:sp>
-      <p:sp>
-        <p:nvSpPr>
-          <p:cNvPr id="27" name="Text 16"/>
-          <p:cNvSpPr/>
-          <p:nvPr/>
-        </p:nvSpPr>
-        <p:spPr>
-          <a:xfrm>
-            <a:off x="4186174" y="1544290"/>
-            <a:ext cx="3819652" cy="256530"/>
-          </a:xfrm>
-          <a:prstGeom prst="rect">
-            <a:avLst/>
-          </a:prstGeom>
-          <a:noFill/>
-          <a:ln/>
-        </p:spPr>
-        <p:txBody>
-          <a:bodyPr wrap="square" lIns="0" tIns="0" rIns="0" bIns="0" rtlCol="0" anchor="t">
-            <a:normAutofit/>
-          </a:bodyPr>
-          <a:lstStyle/>
-          <a:p>
-            <a:pPr algn="ctr" indent="0" marL="0">
-              <a:lnSpc>
-                <a:spcPts val="1820"/>
-              </a:lnSpc>
-              <a:buNone/>
-            </a:pPr>
-            <a:r>
-              <a:rPr lang="en-US" sz="1300" b="1" dirty="0">
-                <a:solidFill>
-                  <a:srgbClr val="036B3F"/>
-                </a:solidFill>
-                <a:latin typeface="Arial" pitchFamily="34" charset="0"/>
-                <a:ea typeface="Arial" pitchFamily="34" charset="-122"/>
-                <a:cs typeface="Arial" pitchFamily="34" charset="-120"/>
-              </a:rPr>
-              <a:t>⑤ 帶 Access Token 呼叫 MCP 工具</a:t>
-            </a:r>
-            <a:endParaRPr lang="en-US" sz="1300" dirty="0"/>
-          </a:p>
-        </p:txBody>
-      </p:sp>
-      <p:sp>
-        <p:nvSpPr>
-          <p:cNvPr id="28" name="Text 17"/>
-          <p:cNvSpPr/>
-          <p:nvPr/>
-        </p:nvSpPr>
-        <p:spPr>
-          <a:xfrm>
-            <a:off x="7081266" y="3411190"/>
-            <a:ext cx="2799334" cy="256530"/>
-          </a:xfrm>
-          <a:prstGeom prst="rect">
-            <a:avLst/>
-          </a:prstGeom>
-          <a:noFill/>
-          <a:ln/>
-        </p:spPr>
-        <p:txBody>
-          <a:bodyPr wrap="square" lIns="0" tIns="0" rIns="0" bIns="0" rtlCol="0" anchor="t">
-            <a:normAutofit/>
-          </a:bodyPr>
-          <a:lstStyle/>
-          <a:p>
-            <a:pPr algn="r" indent="0" marL="0">
-              <a:lnSpc>
-                <a:spcPts val="1820"/>
-              </a:lnSpc>
-              <a:buNone/>
-            </a:pPr>
-            <a:r>
-              <a:rPr lang="en-US" sz="1300" b="1" dirty="0">
-                <a:solidFill>
-                  <a:srgbClr val="036B3F"/>
-                </a:solidFill>
-                <a:latin typeface="Arial" pitchFamily="34" charset="0"/>
-                <a:ea typeface="Arial" pitchFamily="34" charset="-122"/>
-                <a:cs typeface="Arial" pitchFamily="34" charset="-120"/>
-              </a:rPr>
-              <a:t>⑥ 以 JWKS 公鑰驗證 Token</a:t>
-            </a:r>
-            <a:endParaRPr lang="en-US" sz="1300" dirty="0"/>
-          </a:p>
-        </p:txBody>
-      </p:sp>
-      <p:sp>
-        <p:nvSpPr>
-          <p:cNvPr id="29" name="Text 18"/>
-          <p:cNvSpPr/>
-          <p:nvPr/>
-        </p:nvSpPr>
-        <p:spPr>
-          <a:xfrm>
-            <a:off x="8763000" y="6238280"/>
-            <a:ext cx="2616200" cy="238720"/>
-          </a:xfrm>
-          <a:prstGeom prst="rect">
-            <a:avLst/>
-          </a:prstGeom>
-          <a:noFill/>
-          <a:ln/>
-        </p:spPr>
-        <p:txBody>
-          <a:bodyPr wrap="square" lIns="0" tIns="0" rIns="0" bIns="0" rtlCol="0" anchor="t">
-            <a:normAutofit/>
-          </a:bodyPr>
-          <a:lstStyle/>
-          <a:p>
-            <a:pPr algn="r" indent="0" marL="0">
               <a:lnSpc>
                 <a:spcPts val="1680"/>
               </a:lnSpc>
@@ -3329,7 +3339,483 @@
                 <a:ea typeface="Arial" pitchFamily="34" charset="-122"/>
                 <a:cs typeface="Arial" pitchFamily="34" charset="-120"/>
               </a:rPr>
-              <a:t>DataEco</a:t>
+              <a:t>① 在 AI 工具設定 MCP 連線</a:t>
+            </a:r>
+            <a:endParaRPr lang="en-US" sz="1200" dirty="0"/>
+          </a:p>
+        </p:txBody>
+      </p:sp>
+      <p:sp>
+        <p:nvSpPr>
+          <p:cNvPr id="44" name="Text 27"/>
+          <p:cNvSpPr/>
+          <p:nvPr/>
+        </p:nvSpPr>
+        <p:spPr>
+          <a:xfrm>
+            <a:off x="3073400" y="4483100"/>
+            <a:ext cx="1896745" cy="452041"/>
+          </a:xfrm>
+          <a:prstGeom prst="rect">
+            <a:avLst/>
+          </a:prstGeom>
+          <a:noFill/>
+          <a:ln/>
+        </p:spPr>
+        <p:txBody>
+          <a:bodyPr wrap="square" lIns="0" tIns="0" rIns="0" bIns="0" rtlCol="0" anchor="t">
+            <a:normAutofit/>
+          </a:bodyPr>
+          <a:lstStyle/>
+          <a:p>
+            <a:pPr algn="l" indent="0" marL="0">
+              <a:lnSpc>
+                <a:spcPts val="1680"/>
+              </a:lnSpc>
+              <a:buNone/>
+            </a:pPr>
+            <a:r>
+              <a:rPr lang="en-US" sz="1200" b="1" dirty="0">
+                <a:solidFill>
+                  <a:srgbClr val="036B3F"/>
+                </a:solidFill>
+                <a:latin typeface="Arial" pitchFamily="34" charset="0"/>
+                <a:ea typeface="Arial" pitchFamily="34" charset="-122"/>
+                <a:cs typeface="Arial" pitchFamily="34" charset="-120"/>
+              </a:rPr>
+              <a:t>② 到 OAuth Server 登入</a:t>
+            </a:r>
+            <a:endParaRPr lang="en-US" sz="1200" dirty="0"/>
+          </a:p>
+          <a:p>
+            <a:pPr algn="l" indent="0" marL="0">
+              <a:lnSpc>
+                <a:spcPts val="1680"/>
+              </a:lnSpc>
+              <a:buNone/>
+            </a:pPr>
+            <a:r>
+              <a:rPr lang="en-US" sz="1200" b="1" dirty="0">
+                <a:solidFill>
+                  <a:srgbClr val="036B3F"/>
+                </a:solidFill>
+                <a:latin typeface="Arial" pitchFamily="34" charset="0"/>
+                <a:ea typeface="Arial" pitchFamily="34" charset="-122"/>
+                <a:cs typeface="Arial" pitchFamily="34" charset="-120"/>
+              </a:rPr>
+              <a:t>輸入統編、帳號、密碼</a:t>
+            </a:r>
+            <a:endParaRPr lang="en-US" sz="1200" dirty="0"/>
+          </a:p>
+        </p:txBody>
+      </p:sp>
+      <p:sp>
+        <p:nvSpPr>
+          <p:cNvPr id="45" name="Text 28"/>
+          <p:cNvSpPr/>
+          <p:nvPr/>
+        </p:nvSpPr>
+        <p:spPr>
+          <a:xfrm>
+            <a:off x="3073400" y="1841500"/>
+            <a:ext cx="1896745" cy="238720"/>
+          </a:xfrm>
+          <a:prstGeom prst="rect">
+            <a:avLst/>
+          </a:prstGeom>
+          <a:noFill/>
+          <a:ln/>
+        </p:spPr>
+        <p:txBody>
+          <a:bodyPr wrap="square" lIns="0" tIns="0" rIns="0" bIns="0" rtlCol="0" anchor="t">
+            <a:normAutofit/>
+          </a:bodyPr>
+          <a:lstStyle/>
+          <a:p>
+            <a:pPr algn="l" indent="0" marL="0">
+              <a:lnSpc>
+                <a:spcPts val="1680"/>
+              </a:lnSpc>
+              <a:buNone/>
+            </a:pPr>
+            <a:r>
+              <a:rPr lang="en-US" sz="1200" b="1" dirty="0">
+                <a:solidFill>
+                  <a:srgbClr val="036B3F"/>
+                </a:solidFill>
+                <a:latin typeface="Arial" pitchFamily="34" charset="0"/>
+                <a:ea typeface="Arial" pitchFamily="34" charset="-122"/>
+                <a:cs typeface="Arial" pitchFamily="34" charset="-120"/>
+              </a:rPr>
+              <a:t>④ 帶通行證去查資料</a:t>
+            </a:r>
+            <a:endParaRPr lang="en-US" sz="1200" dirty="0"/>
+          </a:p>
+        </p:txBody>
+      </p:sp>
+      <p:sp>
+        <p:nvSpPr>
+          <p:cNvPr id="46" name="Text 29"/>
+          <p:cNvSpPr/>
+          <p:nvPr/>
+        </p:nvSpPr>
+        <p:spPr>
+          <a:xfrm>
+            <a:off x="6565900" y="3302000"/>
+            <a:ext cx="1066800" cy="452041"/>
+          </a:xfrm>
+          <a:prstGeom prst="rect">
+            <a:avLst/>
+          </a:prstGeom>
+          <a:noFill/>
+          <a:ln/>
+        </p:spPr>
+        <p:txBody>
+          <a:bodyPr wrap="square" lIns="0" tIns="0" rIns="0" bIns="0" rtlCol="0" anchor="t">
+            <a:normAutofit/>
+          </a:bodyPr>
+          <a:lstStyle/>
+          <a:p>
+            <a:pPr algn="l" indent="0" marL="0">
+              <a:lnSpc>
+                <a:spcPts val="1680"/>
+              </a:lnSpc>
+              <a:buNone/>
+            </a:pPr>
+            <a:r>
+              <a:rPr lang="en-US" sz="1200" b="1" dirty="0">
+                <a:solidFill>
+                  <a:srgbClr val="036B3F"/>
+                </a:solidFill>
+                <a:latin typeface="Arial" pitchFamily="34" charset="0"/>
+                <a:ea typeface="Arial" pitchFamily="34" charset="-122"/>
+                <a:cs typeface="Arial" pitchFamily="34" charset="-120"/>
+              </a:rPr>
+              <a:t>⑤ 檢查通行證</a:t>
+            </a:r>
+            <a:endParaRPr lang="en-US" sz="1200" dirty="0"/>
+          </a:p>
+          <a:p>
+            <a:pPr algn="l" indent="0" marL="0">
+              <a:lnSpc>
+                <a:spcPts val="1680"/>
+              </a:lnSpc>
+              <a:buNone/>
+            </a:pPr>
+            <a:r>
+              <a:rPr lang="en-US" sz="1200" b="1" dirty="0">
+                <a:solidFill>
+                  <a:srgbClr val="036B3F"/>
+                </a:solidFill>
+                <a:latin typeface="Arial" pitchFamily="34" charset="0"/>
+                <a:ea typeface="Arial" pitchFamily="34" charset="-122"/>
+                <a:cs typeface="Arial" pitchFamily="34" charset="-120"/>
+              </a:rPr>
+              <a:t>是不是真的</a:t>
+            </a:r>
+            <a:endParaRPr lang="en-US" sz="1200" dirty="0"/>
+          </a:p>
+        </p:txBody>
+      </p:sp>
+      <p:sp>
+        <p:nvSpPr>
+          <p:cNvPr id="47" name="Text 30"/>
+          <p:cNvSpPr/>
+          <p:nvPr/>
+        </p:nvSpPr>
+        <p:spPr>
+          <a:xfrm>
+            <a:off x="7962900" y="2260600"/>
+            <a:ext cx="838200" cy="238720"/>
+          </a:xfrm>
+          <a:prstGeom prst="rect">
+            <a:avLst/>
+          </a:prstGeom>
+          <a:noFill/>
+          <a:ln/>
+        </p:spPr>
+        <p:txBody>
+          <a:bodyPr wrap="square" lIns="0" tIns="0" rIns="0" bIns="0" rtlCol="0" anchor="t">
+            <a:normAutofit/>
+          </a:bodyPr>
+          <a:lstStyle/>
+          <a:p>
+            <a:pPr algn="l" indent="0" marL="0">
+              <a:lnSpc>
+                <a:spcPts val="1680"/>
+              </a:lnSpc>
+              <a:buNone/>
+            </a:pPr>
+            <a:r>
+              <a:rPr lang="en-US" sz="1200" b="1" dirty="0">
+                <a:solidFill>
+                  <a:srgbClr val="7F7F7F"/>
+                </a:solidFill>
+                <a:latin typeface="Arial" pitchFamily="34" charset="0"/>
+                <a:ea typeface="Arial" pitchFamily="34" charset="-122"/>
+                <a:cs typeface="Arial" pitchFamily="34" charset="-120"/>
+              </a:rPr>
+              <a:t>呼叫 API</a:t>
+            </a:r>
+            <a:endParaRPr lang="en-US" sz="1200" dirty="0"/>
+          </a:p>
+        </p:txBody>
+      </p:sp>
+      <p:sp>
+        <p:nvSpPr>
+          <p:cNvPr id="48" name="Text 31"/>
+          <p:cNvSpPr/>
+          <p:nvPr/>
+        </p:nvSpPr>
+        <p:spPr>
+          <a:xfrm>
+            <a:off x="7747000" y="3238500"/>
+            <a:ext cx="812800" cy="238720"/>
+          </a:xfrm>
+          <a:prstGeom prst="rect">
+            <a:avLst/>
+          </a:prstGeom>
+          <a:noFill/>
+          <a:ln/>
+        </p:spPr>
+        <p:txBody>
+          <a:bodyPr wrap="square" lIns="0" tIns="0" rIns="0" bIns="0" rtlCol="0" anchor="t">
+            <a:normAutofit/>
+          </a:bodyPr>
+          <a:lstStyle/>
+          <a:p>
+            <a:pPr algn="l" indent="0" marL="0">
+              <a:lnSpc>
+                <a:spcPts val="1680"/>
+              </a:lnSpc>
+              <a:buNone/>
+            </a:pPr>
+            <a:r>
+              <a:rPr lang="en-US" sz="1200" b="1" dirty="0">
+                <a:solidFill>
+                  <a:srgbClr val="7F7F7F"/>
+                </a:solidFill>
+                <a:latin typeface="Arial" pitchFamily="34" charset="0"/>
+                <a:ea typeface="Arial" pitchFamily="34" charset="-122"/>
+                <a:cs typeface="Arial" pitchFamily="34" charset="-120"/>
+              </a:rPr>
+              <a:t>讀取資料</a:t>
+            </a:r>
+            <a:endParaRPr lang="en-US" sz="1200" dirty="0"/>
+          </a:p>
+        </p:txBody>
+      </p:sp>
+      <p:sp>
+        <p:nvSpPr>
+          <p:cNvPr id="49" name="Text 32"/>
+          <p:cNvSpPr/>
+          <p:nvPr/>
+        </p:nvSpPr>
+        <p:spPr>
+          <a:xfrm>
+            <a:off x="7962900" y="5054600"/>
+            <a:ext cx="838200" cy="452041"/>
+          </a:xfrm>
+          <a:prstGeom prst="rect">
+            <a:avLst/>
+          </a:prstGeom>
+          <a:noFill/>
+          <a:ln/>
+        </p:spPr>
+        <p:txBody>
+          <a:bodyPr wrap="square" lIns="0" tIns="0" rIns="0" bIns="0" rtlCol="0" anchor="t">
+            <a:normAutofit/>
+          </a:bodyPr>
+          <a:lstStyle/>
+          <a:p>
+            <a:pPr algn="l" indent="0" marL="0">
+              <a:lnSpc>
+                <a:spcPts val="1680"/>
+              </a:lnSpc>
+              <a:buNone/>
+            </a:pPr>
+            <a:r>
+              <a:rPr lang="en-US" sz="1200" b="1" dirty="0">
+                <a:solidFill>
+                  <a:srgbClr val="7F7F7F"/>
+                </a:solidFill>
+                <a:latin typeface="Arial" pitchFamily="34" charset="0"/>
+                <a:ea typeface="Arial" pitchFamily="34" charset="-122"/>
+                <a:cs typeface="Arial" pitchFamily="34" charset="-120"/>
+              </a:rPr>
+              <a:t>比對</a:t>
+            </a:r>
+            <a:endParaRPr lang="en-US" sz="1200" dirty="0"/>
+          </a:p>
+          <a:p>
+            <a:pPr algn="l" indent="0" marL="0">
+              <a:lnSpc>
+                <a:spcPts val="1680"/>
+              </a:lnSpc>
+              <a:buNone/>
+            </a:pPr>
+            <a:r>
+              <a:rPr lang="en-US" sz="1200" b="1" dirty="0">
+                <a:solidFill>
+                  <a:srgbClr val="7F7F7F"/>
+                </a:solidFill>
+                <a:latin typeface="Arial" pitchFamily="34" charset="0"/>
+                <a:ea typeface="Arial" pitchFamily="34" charset="-122"/>
+                <a:cs typeface="Arial" pitchFamily="34" charset="-120"/>
+              </a:rPr>
+              <a:t>帳號密碼</a:t>
+            </a:r>
+            <a:endParaRPr lang="en-US" sz="1200" dirty="0"/>
+          </a:p>
+        </p:txBody>
+      </p:sp>
+      <p:sp>
+        <p:nvSpPr>
+          <p:cNvPr id="50" name="Text 33"/>
+          <p:cNvSpPr/>
+          <p:nvPr/>
+        </p:nvSpPr>
+        <p:spPr>
+          <a:xfrm>
+            <a:off x="4876800" y="5562600"/>
+            <a:ext cx="3270250" cy="238720"/>
+          </a:xfrm>
+          <a:prstGeom prst="rect">
+            <a:avLst/>
+          </a:prstGeom>
+          <a:noFill/>
+          <a:ln/>
+        </p:spPr>
+        <p:txBody>
+          <a:bodyPr wrap="square" lIns="0" tIns="0" rIns="0" bIns="0" rtlCol="0" anchor="t">
+            <a:normAutofit/>
+          </a:bodyPr>
+          <a:lstStyle/>
+          <a:p>
+            <a:pPr algn="l" indent="0" marL="0">
+              <a:lnSpc>
+                <a:spcPts val="1680"/>
+              </a:lnSpc>
+              <a:buNone/>
+            </a:pPr>
+            <a:r>
+              <a:rPr lang="en-US" sz="1200" b="1" dirty="0">
+                <a:solidFill>
+                  <a:srgbClr val="036B3F"/>
+                </a:solidFill>
+                <a:latin typeface="Arial" pitchFamily="34" charset="0"/>
+                <a:ea typeface="Arial" pitchFamily="34" charset="-122"/>
+                <a:cs typeface="Arial" pitchFamily="34" charset="-120"/>
+              </a:rPr>
+              <a:t>公有雲</a:t>
+            </a:r>
+            <a:endParaRPr lang="en-US" sz="1200" dirty="0"/>
+          </a:p>
+        </p:txBody>
+      </p:sp>
+      <p:sp>
+        <p:nvSpPr>
+          <p:cNvPr id="51" name="Text 34"/>
+          <p:cNvSpPr/>
+          <p:nvPr/>
+        </p:nvSpPr>
+        <p:spPr>
+          <a:xfrm>
+            <a:off x="8686800" y="5562600"/>
+            <a:ext cx="2642362" cy="238720"/>
+          </a:xfrm>
+          <a:prstGeom prst="rect">
+            <a:avLst/>
+          </a:prstGeom>
+          <a:noFill/>
+          <a:ln/>
+        </p:spPr>
+        <p:txBody>
+          <a:bodyPr wrap="square" lIns="0" tIns="0" rIns="0" bIns="0" rtlCol="0" anchor="t">
+            <a:normAutofit/>
+          </a:bodyPr>
+          <a:lstStyle/>
+          <a:p>
+            <a:pPr algn="l" indent="0" marL="0">
+              <a:lnSpc>
+                <a:spcPts val="1680"/>
+              </a:lnSpc>
+              <a:buNone/>
+            </a:pPr>
+            <a:r>
+              <a:rPr lang="en-US" sz="1200" b="1" dirty="0">
+                <a:solidFill>
+                  <a:srgbClr val="7F7F7F"/>
+                </a:solidFill>
+                <a:latin typeface="Arial" pitchFamily="34" charset="0"/>
+                <a:ea typeface="Arial" pitchFamily="34" charset="-122"/>
+                <a:cs typeface="Arial" pitchFamily="34" charset="-120"/>
+              </a:rPr>
+              <a:t>資訊雲</a:t>
+            </a:r>
+            <a:endParaRPr lang="en-US" sz="1200" dirty="0"/>
+          </a:p>
+        </p:txBody>
+      </p:sp>
+      <p:sp>
+        <p:nvSpPr>
+          <p:cNvPr id="52" name="Text 35"/>
+          <p:cNvSpPr/>
+          <p:nvPr/>
+        </p:nvSpPr>
+        <p:spPr>
+          <a:xfrm>
+            <a:off x="4064149" y="3115518"/>
+            <a:ext cx="1384300" cy="452041"/>
+          </a:xfrm>
+          <a:prstGeom prst="rect">
+            <a:avLst/>
+          </a:prstGeom>
+          <a:noFill/>
+          <a:ln/>
+        </p:spPr>
+        <p:txBody>
+          <a:bodyPr wrap="square" lIns="0" tIns="0" rIns="0" bIns="0" rtlCol="0" anchor="t">
+            <a:normAutofit/>
+          </a:bodyPr>
+          <a:lstStyle/>
+          <a:p>
+            <a:pPr algn="l" indent="0" marL="0">
+              <a:lnSpc>
+                <a:spcPts val="1680"/>
+              </a:lnSpc>
+              <a:buNone/>
+            </a:pPr>
+            <a:r>
+              <a:rPr lang="en-US" sz="1200" b="1" dirty="0">
+                <a:solidFill>
+                  <a:srgbClr val="036B3F"/>
+                </a:solidFill>
+                <a:latin typeface="Arial" pitchFamily="34" charset="0"/>
+                <a:ea typeface="Arial" pitchFamily="34" charset="-122"/>
+                <a:cs typeface="Arial" pitchFamily="34" charset="-120"/>
+              </a:rPr>
+              <a:t>③ 確認身分，</a:t>
+            </a:r>
+            <a:endParaRPr lang="en-US" sz="1200" dirty="0"/>
+          </a:p>
+          <a:p>
+            <a:pPr algn="l" indent="0" marL="0">
+              <a:lnSpc>
+                <a:spcPts val="1680"/>
+              </a:lnSpc>
+              <a:buNone/>
+            </a:pPr>
+            <a:r>
+              <a:rPr lang="en-US" sz="1200" b="1" dirty="0">
+                <a:solidFill>
+                  <a:srgbClr val="036B3F"/>
+                </a:solidFill>
+                <a:latin typeface="Arial" pitchFamily="34" charset="0"/>
+                <a:ea typeface="Arial" pitchFamily="34" charset="-122"/>
+                <a:cs typeface="Arial" pitchFamily="34" charset="-120"/>
+              </a:rPr>
+              <a:t>發通行證給 AI 工具</a:t>
             </a:r>
             <a:endParaRPr lang="en-US" sz="1200" dirty="0"/>
           </a:p>
@@ -3377,8 +3863,8 @@
         </p:nvSpPr>
         <p:spPr>
           <a:xfrm>
-            <a:off x="812800" y="609600"/>
-            <a:ext cx="11379200" cy="528290"/>
+            <a:off x="812800" y="457200"/>
+            <a:ext cx="10883392" cy="528290"/>
           </a:xfrm>
           <a:prstGeom prst="rect">
             <a:avLst/>
@@ -3407,7 +3893,7 @@
                 <a:ea typeface="Arial" pitchFamily="34" charset="-122"/>
                 <a:cs typeface="Arial" pitchFamily="34" charset="-120"/>
               </a:rPr>
-              <a:t>Authorization Code＋PKCE：密碼只進授權伺服器</a:t>
+              <a:t>一步步看：AI 工具怎麼拿到通行證</a:t>
             </a:r>
             <a:endParaRPr lang="en-US" sz="3600" dirty="0"/>
           </a:p>
@@ -3415,7 +3901,7 @@
       </p:sp>
       <p:pic>
         <p:nvPicPr>
-          <p:cNvPr id="3" name="Image 0" descr="OAuth 授權碼加 PKCE 流程時序圖：Client 產生 PKCE 參數並將使用者導向授權伺服器，使用者在授權伺服器輸入統編、帳號、密碼，授權伺服器以授權碼導回，Client 以授權碼加 code_verifier 換取 Access Token 與 Refresh Token，再帶 Token 呼叫 MCP Server，MCP Server 以 JWKS 驗證">    </p:cNvPr>
+          <p:cNvPr id="3" name="Image 0" descr="OAuth 授權碼加 PKCE 流程時序圖：Client 產生 PKCE 參數並將使用者導向 OAuth Server，使用者在 OAuth Server輸入統編、帳號、密碼， OAuth Server以授權碼導回，Client 以授權碼加 code_verifier 換取 Access Token 與 Refresh Token，再帶 Token 呼叫 MCP Server，MCP Server 以 JWKS 驗證">    </p:cNvPr>
           <p:cNvPicPr>
             <a:picLocks noChangeAspect="1"/>
           </p:cNvPicPr>
@@ -3428,7 +3914,7 @@
         </p:blipFill>
         <p:spPr>
           <a:xfrm>
-            <a:off x="812800" y="1315690"/>
+            <a:off x="812800" y="1112490"/>
             <a:ext cx="10566400" cy="4476750"/>
           </a:xfrm>
           <a:prstGeom prst="rect">
@@ -3444,8 +3930,8 @@
         </p:nvSpPr>
         <p:spPr>
           <a:xfrm>
-            <a:off x="8763000" y="6238280"/>
-            <a:ext cx="2616200" cy="238720"/>
+            <a:off x="10058400" y="6441480"/>
+            <a:ext cx="1320800" cy="238720"/>
           </a:xfrm>
           <a:prstGeom prst="rect">
             <a:avLst/>
@@ -3466,15 +3952,15 @@
               <a:buNone/>
             </a:pPr>
             <a:r>
-              <a:rPr lang="en-US" sz="1200" b="1" dirty="0">
+              <a:rPr lang="en-US" sz="1200" dirty="0">
                 <a:solidFill>
-                  <a:srgbClr val="036B3F"/>
+                  <a:srgbClr val="7F7F7F"/>
                 </a:solidFill>
                 <a:latin typeface="Arial" pitchFamily="34" charset="0"/>
                 <a:ea typeface="Arial" pitchFamily="34" charset="-122"/>
                 <a:cs typeface="Arial" pitchFamily="34" charset="-120"/>
               </a:rPr>
-              <a:t>DataEco</a:t>
+              <a:t>3 / 4</a:t>
             </a:r>
             <a:endParaRPr lang="en-US" sz="1200" dirty="0"/>
           </a:p>
@@ -3522,7 +4008,7 @@
         </p:nvSpPr>
         <p:spPr>
           <a:xfrm>
-            <a:off x="812800" y="609600"/>
+            <a:off x="812800" y="457200"/>
             <a:ext cx="10883392" cy="528290"/>
           </a:xfrm>
           <a:prstGeom prst="rect">
@@ -3552,65 +4038,2203 @@
                 <a:ea typeface="Arial" pitchFamily="34" charset="-122"/>
                 <a:cs typeface="Arial" pitchFamily="34" charset="-120"/>
               </a:rPr>
-              <a:t>MVP 架構：先做 OAuth 2.1 標準最小集合</a:t>
+              <a:t>階段功能規劃</a:t>
             </a:r>
             <a:endParaRPr lang="en-US" sz="3600" dirty="0"/>
           </a:p>
         </p:txBody>
       </p:sp>
-      <p:pic>
-        <p:nvPicPr>
-          <p:cNvPr id="3" name="Image 0" descr="目標架構：MCP Client 導向 OAuth 授權伺服器登入並取得 Token，再帶 Token 呼叫 MCP Server，MCP Server 以 JWKS 驗證 Token">    </p:cNvPr>
-          <p:cNvPicPr>
-            <a:picLocks noChangeAspect="1"/>
-          </p:cNvPicPr>
-          <p:nvPr/>
-        </p:nvPicPr>
-        <p:blipFill>
-          <a:blip r:embed="rId1"/>
-          <a:srcRect l="0" r="0" t="-19" b="-19"/>
-          <a:stretch/>
-        </p:blipFill>
-        <p:spPr>
-          <a:xfrm>
-            <a:off x="812800" y="1366490"/>
-            <a:ext cx="10566400" cy="2095500"/>
-          </a:xfrm>
-          <a:prstGeom prst="rect">
-            <a:avLst/>
-          </a:prstGeom>
-        </p:spPr>
-      </p:pic>
-      <p:sp>
-        <p:nvSpPr>
-          <p:cNvPr id="4" name="Shape 1"/>
+      <p:graphicFrame>
+        <p:nvGraphicFramePr>
+          <p:cNvPr id="3" name="Table 0"/>
+          <p:cNvGraphicFramePr>
+            <a:graphicFrameLocks noGrp="1"/>
+          </p:cNvGraphicFramePr>
+          <p:nvPr>
+            <p:extLst>
+              <p:ext uri="{D42A27DB-BD31-4B8C-83A1-F6EECF244321}">
+                <p14:modId xmlns:p14="http://schemas.microsoft.com/office/powerpoint/2010/main" val="1579011935"/>
+              </p:ext>
+            </p:extLst>
+          </p:nvPr>
+        </p:nvGraphicFramePr>
+        <p:xfrm>
+          <a:off x="825500" y="1175990"/>
+          <a:ext cx="10553700" cy="3824337"/>
+        </p:xfrm>
+        <a:graphic>
+          <a:graphicData uri="http://schemas.openxmlformats.org/drawingml/2006/table">
+            <a:tbl>
+              <a:tblPr/>
+              <a:tblGrid>
+                <a:gridCol w="1266444"/>
+                <a:gridCol w="3166110"/>
+                <a:gridCol w="6121146"/>
+              </a:tblGrid>
+              <a:tr h="359321">
+                <a:tc>
+                  <a:txBody>
+                    <a:bodyPr/>
+                    <a:lstStyle/>
+                    <a:p>
+                      <a:pPr indent="0" marL="0">
+                        <a:lnSpc>
+                          <a:spcPts val="1820"/>
+                        </a:lnSpc>
+                        <a:buNone/>
+                      </a:pPr>
+                      <a:r>
+                        <a:rPr lang="en-US" sz="1300" b="1" dirty="0">
+                          <a:solidFill>
+                            <a:srgbClr val="FFFFFF"/>
+                          </a:solidFill>
+                          <a:latin typeface="Arial" pitchFamily="34" charset="0"/>
+                          <a:ea typeface="Arial" pitchFamily="34" charset="-122"/>
+                          <a:cs typeface="Arial" pitchFamily="34" charset="-120"/>
+                        </a:rPr>
+                        <a:t>階段</a:t>
+                      </a:r>
+                      <a:endParaRPr lang="en-US" sz="1300" dirty="0">
+                        <a:latin typeface="Arial" charset="0"/>
+                        <a:ea typeface="Arial" charset="0"/>
+                        <a:cs typeface="Arial" charset="0"/>
+                      </a:endParaRPr>
+                    </a:p>
+                  </a:txBody>
+                  <a:tcPr marL="57785" marR="57785" marT="57785" marB="57785" anchor="t">
+                    <a:lnL w="12700" cap="flat" cmpd="sng" algn="ctr">
+                      <a:solidFill>
+                        <a:srgbClr val="CBCBCB"/>
+                      </a:solidFill>
+                      <a:prstDash val="solid"/>
+                      <a:round/>
+                      <a:headEnd type="none" w="med" len="med"/>
+                      <a:tailEnd type="none" w="med" len="med"/>
+                    </a:lnL>
+                    <a:lnR w="12700" cap="flat" cmpd="sng" algn="ctr">
+                      <a:solidFill>
+                        <a:srgbClr val="075835"/>
+                      </a:solidFill>
+                      <a:prstDash val="solid"/>
+                      <a:round/>
+                      <a:headEnd type="none" w="med" len="med"/>
+                      <a:tailEnd type="none" w="med" len="med"/>
+                    </a:lnR>
+                    <a:lnT w="12700" cap="flat" cmpd="sng" algn="ctr">
+                      <a:solidFill>
+                        <a:srgbClr val="CBCBCB"/>
+                      </a:solidFill>
+                      <a:prstDash val="solid"/>
+                      <a:round/>
+                      <a:headEnd type="none" w="med" len="med"/>
+                      <a:tailEnd type="none" w="med" len="med"/>
+                    </a:lnT>
+                    <a:lnB w="12700" cap="flat" cmpd="sng" algn="ctr">
+                      <a:solidFill>
+                        <a:srgbClr val="075835"/>
+                      </a:solidFill>
+                      <a:prstDash val="solid"/>
+                      <a:round/>
+                      <a:headEnd type="none" w="med" len="med"/>
+                      <a:tailEnd type="none" w="med" len="med"/>
+                    </a:lnB>
+                    <a:solidFill>
+                      <a:srgbClr val="036B3F"/>
+                    </a:solidFill>
+                  </a:tcPr>
+                </a:tc>
+                <a:tc>
+                  <a:txBody>
+                    <a:bodyPr/>
+                    <a:lstStyle/>
+                    <a:p>
+                      <a:pPr indent="0" marL="0">
+                        <a:lnSpc>
+                          <a:spcPts val="1820"/>
+                        </a:lnSpc>
+                        <a:buNone/>
+                      </a:pPr>
+                      <a:r>
+                        <a:rPr lang="en-US" sz="1300" b="1" dirty="0">
+                          <a:solidFill>
+                            <a:srgbClr val="FFFFFF"/>
+                          </a:solidFill>
+                          <a:latin typeface="Arial" pitchFamily="34" charset="0"/>
+                          <a:ea typeface="Arial" pitchFamily="34" charset="-122"/>
+                          <a:cs typeface="Arial" pitchFamily="34" charset="-120"/>
+                        </a:rPr>
+                        <a:t>功能</a:t>
+                      </a:r>
+                      <a:endParaRPr lang="en-US" sz="1300" dirty="0">
+                        <a:latin typeface="Arial" charset="0"/>
+                        <a:ea typeface="Arial" charset="0"/>
+                        <a:cs typeface="Arial" charset="0"/>
+                      </a:endParaRPr>
+                    </a:p>
+                  </a:txBody>
+                  <a:tcPr marL="57785" marR="57785" marT="57785" marB="57785" anchor="t">
+                    <a:lnL w="12700" cap="flat" cmpd="sng" algn="ctr">
+                      <a:solidFill>
+                        <a:srgbClr val="075835"/>
+                      </a:solidFill>
+                      <a:prstDash val="solid"/>
+                      <a:round/>
+                      <a:headEnd type="none" w="med" len="med"/>
+                      <a:tailEnd type="none" w="med" len="med"/>
+                    </a:lnL>
+                    <a:lnR w="12700" cap="flat" cmpd="sng" algn="ctr">
+                      <a:solidFill>
+                        <a:srgbClr val="075835"/>
+                      </a:solidFill>
+                      <a:prstDash val="solid"/>
+                      <a:round/>
+                      <a:headEnd type="none" w="med" len="med"/>
+                      <a:tailEnd type="none" w="med" len="med"/>
+                    </a:lnR>
+                    <a:lnT w="12700" cap="flat" cmpd="sng" algn="ctr">
+                      <a:solidFill>
+                        <a:srgbClr val="CBCBCB"/>
+                      </a:solidFill>
+                      <a:prstDash val="solid"/>
+                      <a:round/>
+                      <a:headEnd type="none" w="med" len="med"/>
+                      <a:tailEnd type="none" w="med" len="med"/>
+                    </a:lnT>
+                    <a:lnB w="12700" cap="flat" cmpd="sng" algn="ctr">
+                      <a:solidFill>
+                        <a:srgbClr val="075835"/>
+                      </a:solidFill>
+                      <a:prstDash val="solid"/>
+                      <a:round/>
+                      <a:headEnd type="none" w="med" len="med"/>
+                      <a:tailEnd type="none" w="med" len="med"/>
+                    </a:lnB>
+                    <a:solidFill>
+                      <a:srgbClr val="036B3F"/>
+                    </a:solidFill>
+                  </a:tcPr>
+                </a:tc>
+                <a:tc>
+                  <a:txBody>
+                    <a:bodyPr/>
+                    <a:lstStyle/>
+                    <a:p>
+                      <a:pPr indent="0" marL="0">
+                        <a:lnSpc>
+                          <a:spcPts val="1820"/>
+                        </a:lnSpc>
+                        <a:buNone/>
+                      </a:pPr>
+                      <a:r>
+                        <a:rPr lang="en-US" sz="1300" b="1" dirty="0">
+                          <a:solidFill>
+                            <a:srgbClr val="FFFFFF"/>
+                          </a:solidFill>
+                          <a:latin typeface="Arial" pitchFamily="34" charset="0"/>
+                          <a:ea typeface="Arial" pitchFamily="34" charset="-122"/>
+                          <a:cs typeface="Arial" pitchFamily="34" charset="-120"/>
+                        </a:rPr>
+                        <a:t>說明</a:t>
+                      </a:r>
+                      <a:endParaRPr lang="en-US" sz="1300" dirty="0">
+                        <a:latin typeface="Arial" charset="0"/>
+                        <a:ea typeface="Arial" charset="0"/>
+                        <a:cs typeface="Arial" charset="0"/>
+                      </a:endParaRPr>
+                    </a:p>
+                  </a:txBody>
+                  <a:tcPr marL="57785" marR="57785" marT="57785" marB="57785" anchor="t">
+                    <a:lnL w="12700" cap="flat" cmpd="sng" algn="ctr">
+                      <a:solidFill>
+                        <a:srgbClr val="075835"/>
+                      </a:solidFill>
+                      <a:prstDash val="solid"/>
+                      <a:round/>
+                      <a:headEnd type="none" w="med" len="med"/>
+                      <a:tailEnd type="none" w="med" len="med"/>
+                    </a:lnL>
+                    <a:lnR w="12700" cap="flat" cmpd="sng" algn="ctr">
+                      <a:solidFill>
+                        <a:srgbClr val="075835"/>
+                      </a:solidFill>
+                      <a:prstDash val="solid"/>
+                      <a:round/>
+                      <a:headEnd type="none" w="med" len="med"/>
+                      <a:tailEnd type="none" w="med" len="med"/>
+                    </a:lnR>
+                    <a:lnT w="12700" cap="flat" cmpd="sng" algn="ctr">
+                      <a:solidFill>
+                        <a:srgbClr val="CBCBCB"/>
+                      </a:solidFill>
+                      <a:prstDash val="solid"/>
+                      <a:round/>
+                      <a:headEnd type="none" w="med" len="med"/>
+                      <a:tailEnd type="none" w="med" len="med"/>
+                    </a:lnT>
+                    <a:lnB w="12700" cap="flat" cmpd="sng" algn="ctr">
+                      <a:solidFill>
+                        <a:srgbClr val="075835"/>
+                      </a:solidFill>
+                      <a:prstDash val="solid"/>
+                      <a:round/>
+                      <a:headEnd type="none" w="med" len="med"/>
+                      <a:tailEnd type="none" w="med" len="med"/>
+                    </a:lnB>
+                    <a:solidFill>
+                      <a:srgbClr val="036B3F"/>
+                    </a:solidFill>
+                  </a:tcPr>
+                </a:tc>
+              </a:tr>
+              <a:tr h="359321">
+                <a:tc>
+                  <a:txBody>
+                    <a:bodyPr/>
+                    <a:lstStyle/>
+                    <a:p>
+                      <a:pPr indent="0" marL="0">
+                        <a:lnSpc>
+                          <a:spcPts val="1820"/>
+                        </a:lnSpc>
+                        <a:buNone/>
+                      </a:pPr>
+                      <a:r>
+                        <a:rPr lang="en-US" sz="1300" dirty="0">
+                          <a:solidFill>
+                            <a:srgbClr val="000000"/>
+                          </a:solidFill>
+                          <a:latin typeface="Arial" pitchFamily="34" charset="0"/>
+                          <a:ea typeface="Arial" pitchFamily="34" charset="-122"/>
+                          <a:cs typeface="Arial" pitchFamily="34" charset="-120"/>
+                        </a:rPr>
+                        <a:t>本階段</a:t>
+                      </a:r>
+                      <a:endParaRPr lang="en-US" sz="1300" dirty="0">
+                        <a:latin typeface="Arial" charset="0"/>
+                        <a:ea typeface="Arial" charset="0"/>
+                        <a:cs typeface="Arial" charset="0"/>
+                      </a:endParaRPr>
+                    </a:p>
+                  </a:txBody>
+                  <a:tcPr marL="57785" marR="57785" marT="57785" marB="57785" anchor="t">
+                    <a:lnL w="12700" cap="flat" cmpd="sng" algn="ctr">
+                      <a:solidFill>
+                        <a:srgbClr val="CBCBCB"/>
+                      </a:solidFill>
+                      <a:prstDash val="solid"/>
+                      <a:round/>
+                      <a:headEnd type="none" w="med" len="med"/>
+                      <a:tailEnd type="none" w="med" len="med"/>
+                    </a:lnL>
+                    <a:lnR w="12700" cap="flat" cmpd="sng" algn="ctr">
+                      <a:solidFill>
+                        <a:srgbClr val="B8CBA8"/>
+                      </a:solidFill>
+                      <a:prstDash val="solid"/>
+                      <a:round/>
+                      <a:headEnd type="none" w="med" len="med"/>
+                      <a:tailEnd type="none" w="med" len="med"/>
+                    </a:lnR>
+                    <a:lnT w="12700" cap="flat" cmpd="sng" algn="ctr">
+                      <a:solidFill>
+                        <a:srgbClr val="075835"/>
+                      </a:solidFill>
+                      <a:prstDash val="solid"/>
+                      <a:round/>
+                      <a:headEnd type="none" w="med" len="med"/>
+                      <a:tailEnd type="none" w="med" len="med"/>
+                    </a:lnT>
+                    <a:lnB w="12700" cap="flat" cmpd="sng" algn="ctr">
+                      <a:solidFill>
+                        <a:srgbClr val="B8CBA8"/>
+                      </a:solidFill>
+                      <a:prstDash val="solid"/>
+                      <a:round/>
+                      <a:headEnd type="none" w="med" len="med"/>
+                      <a:tailEnd type="none" w="med" len="med"/>
+                    </a:lnB>
+                    <a:solidFill>
+                      <a:srgbClr val="E6FED2"/>
+                    </a:solidFill>
+                  </a:tcPr>
+                </a:tc>
+                <a:tc>
+                  <a:txBody>
+                    <a:bodyPr/>
+                    <a:lstStyle/>
+                    <a:p>
+                      <a:pPr indent="0" marL="0">
+                        <a:lnSpc>
+                          <a:spcPts val="1820"/>
+                        </a:lnSpc>
+                        <a:buNone/>
+                      </a:pPr>
+                      <a:r>
+                        <a:rPr lang="en-US" sz="1300" dirty="0">
+                          <a:solidFill>
+                            <a:srgbClr val="000000"/>
+                          </a:solidFill>
+                          <a:latin typeface="Arial" pitchFamily="34" charset="0"/>
+                          <a:ea typeface="Arial" pitchFamily="34" charset="-122"/>
+                          <a:cs typeface="Arial" pitchFamily="34" charset="-120"/>
+                        </a:rPr>
+                        <a:t>登入頁</a:t>
+                      </a:r>
+                      <a:endParaRPr lang="en-US" sz="1300" dirty="0">
+                        <a:latin typeface="Arial" charset="0"/>
+                        <a:ea typeface="Arial" charset="0"/>
+                        <a:cs typeface="Arial" charset="0"/>
+                      </a:endParaRPr>
+                    </a:p>
+                  </a:txBody>
+                  <a:tcPr marL="57785" marR="57785" marT="57785" marB="57785" anchor="t">
+                    <a:lnL w="12700" cap="flat" cmpd="sng" algn="ctr">
+                      <a:solidFill>
+                        <a:srgbClr val="B8CBA8"/>
+                      </a:solidFill>
+                      <a:prstDash val="solid"/>
+                      <a:round/>
+                      <a:headEnd type="none" w="med" len="med"/>
+                      <a:tailEnd type="none" w="med" len="med"/>
+                    </a:lnL>
+                    <a:lnR w="12700" cap="flat" cmpd="sng" algn="ctr">
+                      <a:solidFill>
+                        <a:srgbClr val="B8CBA8"/>
+                      </a:solidFill>
+                      <a:prstDash val="solid"/>
+                      <a:round/>
+                      <a:headEnd type="none" w="med" len="med"/>
+                      <a:tailEnd type="none" w="med" len="med"/>
+                    </a:lnR>
+                    <a:lnT w="12700" cap="flat" cmpd="sng" algn="ctr">
+                      <a:solidFill>
+                        <a:srgbClr val="075835"/>
+                      </a:solidFill>
+                      <a:prstDash val="solid"/>
+                      <a:round/>
+                      <a:headEnd type="none" w="med" len="med"/>
+                      <a:tailEnd type="none" w="med" len="med"/>
+                    </a:lnT>
+                    <a:lnB w="12700" cap="flat" cmpd="sng" algn="ctr">
+                      <a:solidFill>
+                        <a:srgbClr val="B8CBA8"/>
+                      </a:solidFill>
+                      <a:prstDash val="solid"/>
+                      <a:round/>
+                      <a:headEnd type="none" w="med" len="med"/>
+                      <a:tailEnd type="none" w="med" len="med"/>
+                    </a:lnB>
+                    <a:solidFill>
+                      <a:srgbClr val="E6FED2"/>
+                    </a:solidFill>
+                  </a:tcPr>
+                </a:tc>
+                <a:tc>
+                  <a:txBody>
+                    <a:bodyPr/>
+                    <a:lstStyle/>
+                    <a:p>
+                      <a:pPr indent="0" marL="0">
+                        <a:lnSpc>
+                          <a:spcPts val="1820"/>
+                        </a:lnSpc>
+                        <a:buNone/>
+                      </a:pPr>
+                      <a:r>
+                        <a:rPr lang="en-US" sz="1300" dirty="0">
+                          <a:solidFill>
+                            <a:srgbClr val="000000"/>
+                          </a:solidFill>
+                          <a:latin typeface="Arial" pitchFamily="34" charset="0"/>
+                          <a:ea typeface="Arial" pitchFamily="34" charset="-122"/>
+                          <a:cs typeface="Arial" pitchFamily="34" charset="-120"/>
+                        </a:rPr>
+                        <a:t>使用者只在 OAuth Server 輸入統編、帳號、密碼</a:t>
+                      </a:r>
+                      <a:endParaRPr lang="en-US" sz="1300" dirty="0">
+                        <a:latin typeface="Arial" charset="0"/>
+                        <a:ea typeface="Arial" charset="0"/>
+                        <a:cs typeface="Arial" charset="0"/>
+                      </a:endParaRPr>
+                    </a:p>
+                  </a:txBody>
+                  <a:tcPr marL="57785" marR="57785" marT="57785" marB="57785" anchor="t">
+                    <a:lnL w="12700" cap="flat" cmpd="sng" algn="ctr">
+                      <a:solidFill>
+                        <a:srgbClr val="B8CBA8"/>
+                      </a:solidFill>
+                      <a:prstDash val="solid"/>
+                      <a:round/>
+                      <a:headEnd type="none" w="med" len="med"/>
+                      <a:tailEnd type="none" w="med" len="med"/>
+                    </a:lnL>
+                    <a:lnR w="12700" cap="flat" cmpd="sng" algn="ctr">
+                      <a:solidFill>
+                        <a:srgbClr val="B8CBA8"/>
+                      </a:solidFill>
+                      <a:prstDash val="solid"/>
+                      <a:round/>
+                      <a:headEnd type="none" w="med" len="med"/>
+                      <a:tailEnd type="none" w="med" len="med"/>
+                    </a:lnR>
+                    <a:lnT w="12700" cap="flat" cmpd="sng" algn="ctr">
+                      <a:solidFill>
+                        <a:srgbClr val="075835"/>
+                      </a:solidFill>
+                      <a:prstDash val="solid"/>
+                      <a:round/>
+                      <a:headEnd type="none" w="med" len="med"/>
+                      <a:tailEnd type="none" w="med" len="med"/>
+                    </a:lnT>
+                    <a:lnB w="12700" cap="flat" cmpd="sng" algn="ctr">
+                      <a:solidFill>
+                        <a:srgbClr val="B8CBA8"/>
+                      </a:solidFill>
+                      <a:prstDash val="solid"/>
+                      <a:round/>
+                      <a:headEnd type="none" w="med" len="med"/>
+                      <a:tailEnd type="none" w="med" len="med"/>
+                    </a:lnB>
+                    <a:solidFill>
+                      <a:srgbClr val="E6FED2"/>
+                    </a:solidFill>
+                  </a:tcPr>
+                </a:tc>
+              </a:tr>
+              <a:tr h="590451">
+                <a:tc>
+                  <a:txBody>
+                    <a:bodyPr/>
+                    <a:lstStyle/>
+                    <a:p>
+                      <a:pPr indent="0" marL="0">
+                        <a:lnSpc>
+                          <a:spcPts val="1820"/>
+                        </a:lnSpc>
+                        <a:buNone/>
+                      </a:pPr>
+                      <a:r>
+                        <a:rPr lang="en-US" sz="1300" dirty="0">
+                          <a:solidFill>
+                            <a:srgbClr val="000000"/>
+                          </a:solidFill>
+                          <a:latin typeface="Arial" pitchFamily="34" charset="0"/>
+                          <a:ea typeface="Arial" pitchFamily="34" charset="-122"/>
+                          <a:cs typeface="Arial" pitchFamily="34" charset="-120"/>
+                        </a:rPr>
+                        <a:t>本階段</a:t>
+                      </a:r>
+                      <a:endParaRPr lang="en-US" sz="1300" dirty="0">
+                        <a:latin typeface="Arial" charset="0"/>
+                        <a:ea typeface="Arial" charset="0"/>
+                        <a:cs typeface="Arial" charset="0"/>
+                      </a:endParaRPr>
+                    </a:p>
+                  </a:txBody>
+                  <a:tcPr marL="57785" marR="57785" marT="57785" marB="57785" anchor="t">
+                    <a:lnL w="12700" cap="flat" cmpd="sng" algn="ctr">
+                      <a:solidFill>
+                        <a:srgbClr val="CBCBCB"/>
+                      </a:solidFill>
+                      <a:prstDash val="solid"/>
+                      <a:round/>
+                      <a:headEnd type="none" w="med" len="med"/>
+                      <a:tailEnd type="none" w="med" len="med"/>
+                    </a:lnL>
+                    <a:lnR w="12700" cap="flat" cmpd="sng" algn="ctr">
+                      <a:solidFill>
+                        <a:srgbClr val="B8CBA8"/>
+                      </a:solidFill>
+                      <a:prstDash val="solid"/>
+                      <a:round/>
+                      <a:headEnd type="none" w="med" len="med"/>
+                      <a:tailEnd type="none" w="med" len="med"/>
+                    </a:lnR>
+                    <a:lnT w="12700" cap="flat" cmpd="sng" algn="ctr">
+                      <a:solidFill>
+                        <a:srgbClr val="B8CBA8"/>
+                      </a:solidFill>
+                      <a:prstDash val="solid"/>
+                      <a:round/>
+                      <a:headEnd type="none" w="med" len="med"/>
+                      <a:tailEnd type="none" w="med" len="med"/>
+                    </a:lnT>
+                    <a:lnB w="12700" cap="flat" cmpd="sng" algn="ctr">
+                      <a:solidFill>
+                        <a:srgbClr val="B8CBA8"/>
+                      </a:solidFill>
+                      <a:prstDash val="solid"/>
+                      <a:round/>
+                      <a:headEnd type="none" w="med" len="med"/>
+                      <a:tailEnd type="none" w="med" len="med"/>
+                    </a:lnB>
+                    <a:solidFill>
+                      <a:srgbClr val="E6FED2"/>
+                    </a:solidFill>
+                  </a:tcPr>
+                </a:tc>
+                <a:tc>
+                  <a:txBody>
+                    <a:bodyPr/>
+                    <a:lstStyle/>
+                    <a:p>
+                      <a:pPr indent="0" marL="0">
+                        <a:lnSpc>
+                          <a:spcPts val="1820"/>
+                        </a:lnSpc>
+                        <a:buNone/>
+                      </a:pPr>
+                      <a:r>
+                        <a:rPr lang="en-US" sz="1300" dirty="0">
+                          <a:solidFill>
+                            <a:srgbClr val="000000"/>
+                          </a:solidFill>
+                          <a:latin typeface="Arial" pitchFamily="34" charset="0"/>
+                          <a:ea typeface="Arial" pitchFamily="34" charset="-122"/>
+                          <a:cs typeface="Arial" pitchFamily="34" charset="-120"/>
+                        </a:rPr>
+                        <a:t>標準授權流程</a:t>
+                      </a:r>
+                      <a:endParaRPr lang="en-US" sz="1300" dirty="0">
+                        <a:latin typeface="Arial" charset="0"/>
+                        <a:ea typeface="Arial" charset="0"/>
+                        <a:cs typeface="Arial" charset="0"/>
+                      </a:endParaRPr>
+                    </a:p>
+                  </a:txBody>
+                  <a:tcPr marL="57785" marR="57785" marT="57785" marB="57785" anchor="t">
+                    <a:lnL w="12700" cap="flat" cmpd="sng" algn="ctr">
+                      <a:solidFill>
+                        <a:srgbClr val="B8CBA8"/>
+                      </a:solidFill>
+                      <a:prstDash val="solid"/>
+                      <a:round/>
+                      <a:headEnd type="none" w="med" len="med"/>
+                      <a:tailEnd type="none" w="med" len="med"/>
+                    </a:lnL>
+                    <a:lnR w="12700" cap="flat" cmpd="sng" algn="ctr">
+                      <a:solidFill>
+                        <a:srgbClr val="B8CBA8"/>
+                      </a:solidFill>
+                      <a:prstDash val="solid"/>
+                      <a:round/>
+                      <a:headEnd type="none" w="med" len="med"/>
+                      <a:tailEnd type="none" w="med" len="med"/>
+                    </a:lnR>
+                    <a:lnT w="12700" cap="flat" cmpd="sng" algn="ctr">
+                      <a:solidFill>
+                        <a:srgbClr val="B8CBA8"/>
+                      </a:solidFill>
+                      <a:prstDash val="solid"/>
+                      <a:round/>
+                      <a:headEnd type="none" w="med" len="med"/>
+                      <a:tailEnd type="none" w="med" len="med"/>
+                    </a:lnT>
+                    <a:lnB w="12700" cap="flat" cmpd="sng" algn="ctr">
+                      <a:solidFill>
+                        <a:srgbClr val="B8CBA8"/>
+                      </a:solidFill>
+                      <a:prstDash val="solid"/>
+                      <a:round/>
+                      <a:headEnd type="none" w="med" len="med"/>
+                      <a:tailEnd type="none" w="med" len="med"/>
+                    </a:lnB>
+                    <a:solidFill>
+                      <a:srgbClr val="E6FED2"/>
+                    </a:solidFill>
+                  </a:tcPr>
+                </a:tc>
+                <a:tc>
+                  <a:txBody>
+                    <a:bodyPr/>
+                    <a:lstStyle/>
+                    <a:p>
+                      <a:pPr indent="0" marL="0">
+                        <a:lnSpc>
+                          <a:spcPts val="1820"/>
+                        </a:lnSpc>
+                        <a:buNone/>
+                      </a:pPr>
+                      <a:r>
+                        <a:rPr lang="en-US" sz="1300" dirty="0">
+                          <a:solidFill>
+                            <a:srgbClr val="000000"/>
+                          </a:solidFill>
+                          <a:latin typeface="Arial" pitchFamily="34" charset="0"/>
+                          <a:ea typeface="Arial" pitchFamily="34" charset="-122"/>
+                          <a:cs typeface="Arial" pitchFamily="34" charset="-120"/>
+                        </a:rPr>
+                        <a:t>採 Authorization Code Flow＋PKCE：確認身分後才發通行證，並防止被攔截冒用</a:t>
+                      </a:r>
+                      <a:endParaRPr lang="en-US" sz="1300" dirty="0">
+                        <a:latin typeface="Arial" charset="0"/>
+                        <a:ea typeface="Arial" charset="0"/>
+                        <a:cs typeface="Arial" charset="0"/>
+                      </a:endParaRPr>
+                    </a:p>
+                  </a:txBody>
+                  <a:tcPr marL="57785" marR="57785" marT="57785" marB="57785" anchor="t">
+                    <a:lnL w="12700" cap="flat" cmpd="sng" algn="ctr">
+                      <a:solidFill>
+                        <a:srgbClr val="B8CBA8"/>
+                      </a:solidFill>
+                      <a:prstDash val="solid"/>
+                      <a:round/>
+                      <a:headEnd type="none" w="med" len="med"/>
+                      <a:tailEnd type="none" w="med" len="med"/>
+                    </a:lnL>
+                    <a:lnR w="12700" cap="flat" cmpd="sng" algn="ctr">
+                      <a:solidFill>
+                        <a:srgbClr val="B8CBA8"/>
+                      </a:solidFill>
+                      <a:prstDash val="solid"/>
+                      <a:round/>
+                      <a:headEnd type="none" w="med" len="med"/>
+                      <a:tailEnd type="none" w="med" len="med"/>
+                    </a:lnR>
+                    <a:lnT w="12700" cap="flat" cmpd="sng" algn="ctr">
+                      <a:solidFill>
+                        <a:srgbClr val="B8CBA8"/>
+                      </a:solidFill>
+                      <a:prstDash val="solid"/>
+                      <a:round/>
+                      <a:headEnd type="none" w="med" len="med"/>
+                      <a:tailEnd type="none" w="med" len="med"/>
+                    </a:lnT>
+                    <a:lnB w="12700" cap="flat" cmpd="sng" algn="ctr">
+                      <a:solidFill>
+                        <a:srgbClr val="B8CBA8"/>
+                      </a:solidFill>
+                      <a:prstDash val="solid"/>
+                      <a:round/>
+                      <a:headEnd type="none" w="med" len="med"/>
+                      <a:tailEnd type="none" w="med" len="med"/>
+                    </a:lnB>
+                    <a:solidFill>
+                      <a:srgbClr val="E6FED2"/>
+                    </a:solidFill>
+                  </a:tcPr>
+                </a:tc>
+              </a:tr>
+              <a:tr h="359321">
+                <a:tc>
+                  <a:txBody>
+                    <a:bodyPr/>
+                    <a:lstStyle/>
+                    <a:p>
+                      <a:pPr indent="0" marL="0">
+                        <a:lnSpc>
+                          <a:spcPts val="1820"/>
+                        </a:lnSpc>
+                        <a:buNone/>
+                      </a:pPr>
+                      <a:r>
+                        <a:rPr lang="en-US" sz="1300" dirty="0">
+                          <a:solidFill>
+                            <a:srgbClr val="000000"/>
+                          </a:solidFill>
+                          <a:latin typeface="Arial" pitchFamily="34" charset="0"/>
+                          <a:ea typeface="Arial" pitchFamily="34" charset="-122"/>
+                          <a:cs typeface="Arial" pitchFamily="34" charset="-120"/>
+                        </a:rPr>
+                        <a:t>本階段</a:t>
+                      </a:r>
+                      <a:endParaRPr lang="en-US" sz="1300" dirty="0">
+                        <a:latin typeface="Arial" charset="0"/>
+                        <a:ea typeface="Arial" charset="0"/>
+                        <a:cs typeface="Arial" charset="0"/>
+                      </a:endParaRPr>
+                    </a:p>
+                  </a:txBody>
+                  <a:tcPr marL="57785" marR="57785" marT="57785" marB="57785" anchor="t">
+                    <a:lnL w="12700" cap="flat" cmpd="sng" algn="ctr">
+                      <a:solidFill>
+                        <a:srgbClr val="CBCBCB"/>
+                      </a:solidFill>
+                      <a:prstDash val="solid"/>
+                      <a:round/>
+                      <a:headEnd type="none" w="med" len="med"/>
+                      <a:tailEnd type="none" w="med" len="med"/>
+                    </a:lnL>
+                    <a:lnR w="12700" cap="flat" cmpd="sng" algn="ctr">
+                      <a:solidFill>
+                        <a:srgbClr val="B8CBA8"/>
+                      </a:solidFill>
+                      <a:prstDash val="solid"/>
+                      <a:round/>
+                      <a:headEnd type="none" w="med" len="med"/>
+                      <a:tailEnd type="none" w="med" len="med"/>
+                    </a:lnR>
+                    <a:lnT w="12700" cap="flat" cmpd="sng" algn="ctr">
+                      <a:solidFill>
+                        <a:srgbClr val="B8CBA8"/>
+                      </a:solidFill>
+                      <a:prstDash val="solid"/>
+                      <a:round/>
+                      <a:headEnd type="none" w="med" len="med"/>
+                      <a:tailEnd type="none" w="med" len="med"/>
+                    </a:lnT>
+                    <a:lnB w="12700" cap="flat" cmpd="sng" algn="ctr">
+                      <a:solidFill>
+                        <a:srgbClr val="B8CBA8"/>
+                      </a:solidFill>
+                      <a:prstDash val="solid"/>
+                      <a:round/>
+                      <a:headEnd type="none" w="med" len="med"/>
+                      <a:tailEnd type="none" w="med" len="med"/>
+                    </a:lnB>
+                    <a:solidFill>
+                      <a:srgbClr val="E6FED2"/>
+                    </a:solidFill>
+                  </a:tcPr>
+                </a:tc>
+                <a:tc>
+                  <a:txBody>
+                    <a:bodyPr/>
+                    <a:lstStyle/>
+                    <a:p>
+                      <a:pPr indent="0" marL="0">
+                        <a:lnSpc>
+                          <a:spcPts val="1820"/>
+                        </a:lnSpc>
+                        <a:buNone/>
+                      </a:pPr>
+                      <a:r>
+                        <a:rPr lang="en-US" sz="1300" dirty="0">
+                          <a:solidFill>
+                            <a:srgbClr val="000000"/>
+                          </a:solidFill>
+                          <a:latin typeface="Arial" pitchFamily="34" charset="0"/>
+                          <a:ea typeface="Arial" pitchFamily="34" charset="-122"/>
+                          <a:cs typeface="Arial" pitchFamily="34" charset="-120"/>
+                        </a:rPr>
+                        <a:t>Access Token（通行證）</a:t>
+                      </a:r>
+                      <a:endParaRPr lang="en-US" sz="1300" dirty="0">
+                        <a:latin typeface="Arial" charset="0"/>
+                        <a:ea typeface="Arial" charset="0"/>
+                        <a:cs typeface="Arial" charset="0"/>
+                      </a:endParaRPr>
+                    </a:p>
+                  </a:txBody>
+                  <a:tcPr marL="57785" marR="57785" marT="57785" marB="57785" anchor="t">
+                    <a:lnL w="12700" cap="flat" cmpd="sng" algn="ctr">
+                      <a:solidFill>
+                        <a:srgbClr val="B8CBA8"/>
+                      </a:solidFill>
+                      <a:prstDash val="solid"/>
+                      <a:round/>
+                      <a:headEnd type="none" w="med" len="med"/>
+                      <a:tailEnd type="none" w="med" len="med"/>
+                    </a:lnL>
+                    <a:lnR w="12700" cap="flat" cmpd="sng" algn="ctr">
+                      <a:solidFill>
+                        <a:srgbClr val="B8CBA8"/>
+                      </a:solidFill>
+                      <a:prstDash val="solid"/>
+                      <a:round/>
+                      <a:headEnd type="none" w="med" len="med"/>
+                      <a:tailEnd type="none" w="med" len="med"/>
+                    </a:lnR>
+                    <a:lnT w="12700" cap="flat" cmpd="sng" algn="ctr">
+                      <a:solidFill>
+                        <a:srgbClr val="B8CBA8"/>
+                      </a:solidFill>
+                      <a:prstDash val="solid"/>
+                      <a:round/>
+                      <a:headEnd type="none" w="med" len="med"/>
+                      <a:tailEnd type="none" w="med" len="med"/>
+                    </a:lnT>
+                    <a:lnB w="12700" cap="flat" cmpd="sng" algn="ctr">
+                      <a:solidFill>
+                        <a:srgbClr val="B8CBA8"/>
+                      </a:solidFill>
+                      <a:prstDash val="solid"/>
+                      <a:round/>
+                      <a:headEnd type="none" w="med" len="med"/>
+                      <a:tailEnd type="none" w="med" len="med"/>
+                    </a:lnB>
+                    <a:solidFill>
+                      <a:srgbClr val="E6FED2"/>
+                    </a:solidFill>
+                  </a:tcPr>
+                </a:tc>
+                <a:tc>
+                  <a:txBody>
+                    <a:bodyPr/>
+                    <a:lstStyle/>
+                    <a:p>
+                      <a:pPr indent="0" marL="0">
+                        <a:lnSpc>
+                          <a:spcPts val="1820"/>
+                        </a:lnSpc>
+                        <a:buNone/>
+                      </a:pPr>
+                      <a:r>
+                        <a:rPr lang="en-US" sz="1300" dirty="0">
+                          <a:solidFill>
+                            <a:srgbClr val="000000"/>
+                          </a:solidFill>
+                          <a:latin typeface="Arial" pitchFamily="34" charset="0"/>
+                          <a:ea typeface="Arial" pitchFamily="34" charset="-122"/>
+                          <a:cs typeface="Arial" pitchFamily="34" charset="-120"/>
+                        </a:rPr>
+                        <a:t>JWT 格式、幾分鐘就到期；MCP Server 可自行驗證真偽</a:t>
+                      </a:r>
+                      <a:endParaRPr lang="en-US" sz="1300" dirty="0">
+                        <a:latin typeface="Arial" charset="0"/>
+                        <a:ea typeface="Arial" charset="0"/>
+                        <a:cs typeface="Arial" charset="0"/>
+                      </a:endParaRPr>
+                    </a:p>
+                  </a:txBody>
+                  <a:tcPr marL="57785" marR="57785" marT="57785" marB="57785" anchor="t">
+                    <a:lnL w="12700" cap="flat" cmpd="sng" algn="ctr">
+                      <a:solidFill>
+                        <a:srgbClr val="B8CBA8"/>
+                      </a:solidFill>
+                      <a:prstDash val="solid"/>
+                      <a:round/>
+                      <a:headEnd type="none" w="med" len="med"/>
+                      <a:tailEnd type="none" w="med" len="med"/>
+                    </a:lnL>
+                    <a:lnR w="12700" cap="flat" cmpd="sng" algn="ctr">
+                      <a:solidFill>
+                        <a:srgbClr val="B8CBA8"/>
+                      </a:solidFill>
+                      <a:prstDash val="solid"/>
+                      <a:round/>
+                      <a:headEnd type="none" w="med" len="med"/>
+                      <a:tailEnd type="none" w="med" len="med"/>
+                    </a:lnR>
+                    <a:lnT w="12700" cap="flat" cmpd="sng" algn="ctr">
+                      <a:solidFill>
+                        <a:srgbClr val="B8CBA8"/>
+                      </a:solidFill>
+                      <a:prstDash val="solid"/>
+                      <a:round/>
+                      <a:headEnd type="none" w="med" len="med"/>
+                      <a:tailEnd type="none" w="med" len="med"/>
+                    </a:lnT>
+                    <a:lnB w="12700" cap="flat" cmpd="sng" algn="ctr">
+                      <a:solidFill>
+                        <a:srgbClr val="B8CBA8"/>
+                      </a:solidFill>
+                      <a:prstDash val="solid"/>
+                      <a:round/>
+                      <a:headEnd type="none" w="med" len="med"/>
+                      <a:tailEnd type="none" w="med" len="med"/>
+                    </a:lnB>
+                    <a:solidFill>
+                      <a:srgbClr val="E6FED2"/>
+                    </a:solidFill>
+                  </a:tcPr>
+                </a:tc>
+              </a:tr>
+              <a:tr h="359321">
+                <a:tc>
+                  <a:txBody>
+                    <a:bodyPr/>
+                    <a:lstStyle/>
+                    <a:p>
+                      <a:pPr indent="0" marL="0">
+                        <a:lnSpc>
+                          <a:spcPts val="1820"/>
+                        </a:lnSpc>
+                        <a:buNone/>
+                      </a:pPr>
+                      <a:r>
+                        <a:rPr lang="en-US" sz="1300" dirty="0">
+                          <a:solidFill>
+                            <a:srgbClr val="000000"/>
+                          </a:solidFill>
+                          <a:latin typeface="Arial" pitchFamily="34" charset="0"/>
+                          <a:ea typeface="Arial" pitchFamily="34" charset="-122"/>
+                          <a:cs typeface="Arial" pitchFamily="34" charset="-120"/>
+                        </a:rPr>
+                        <a:t>本階段</a:t>
+                      </a:r>
+                      <a:endParaRPr lang="en-US" sz="1300" dirty="0">
+                        <a:latin typeface="Arial" charset="0"/>
+                        <a:ea typeface="Arial" charset="0"/>
+                        <a:cs typeface="Arial" charset="0"/>
+                      </a:endParaRPr>
+                    </a:p>
+                  </a:txBody>
+                  <a:tcPr marL="57785" marR="57785" marT="57785" marB="57785" anchor="t">
+                    <a:lnL w="12700" cap="flat" cmpd="sng" algn="ctr">
+                      <a:solidFill>
+                        <a:srgbClr val="CBCBCB"/>
+                      </a:solidFill>
+                      <a:prstDash val="solid"/>
+                      <a:round/>
+                      <a:headEnd type="none" w="med" len="med"/>
+                      <a:tailEnd type="none" w="med" len="med"/>
+                    </a:lnL>
+                    <a:lnR w="12700" cap="flat" cmpd="sng" algn="ctr">
+                      <a:solidFill>
+                        <a:srgbClr val="B8CBA8"/>
+                      </a:solidFill>
+                      <a:prstDash val="solid"/>
+                      <a:round/>
+                      <a:headEnd type="none" w="med" len="med"/>
+                      <a:tailEnd type="none" w="med" len="med"/>
+                    </a:lnR>
+                    <a:lnT w="12700" cap="flat" cmpd="sng" algn="ctr">
+                      <a:solidFill>
+                        <a:srgbClr val="B8CBA8"/>
+                      </a:solidFill>
+                      <a:prstDash val="solid"/>
+                      <a:round/>
+                      <a:headEnd type="none" w="med" len="med"/>
+                      <a:tailEnd type="none" w="med" len="med"/>
+                    </a:lnT>
+                    <a:lnB w="12700" cap="flat" cmpd="sng" algn="ctr">
+                      <a:solidFill>
+                        <a:srgbClr val="B8CBA8"/>
+                      </a:solidFill>
+                      <a:prstDash val="solid"/>
+                      <a:round/>
+                      <a:headEnd type="none" w="med" len="med"/>
+                      <a:tailEnd type="none" w="med" len="med"/>
+                    </a:lnB>
+                    <a:solidFill>
+                      <a:srgbClr val="E6FED2"/>
+                    </a:solidFill>
+                  </a:tcPr>
+                </a:tc>
+                <a:tc>
+                  <a:txBody>
+                    <a:bodyPr/>
+                    <a:lstStyle/>
+                    <a:p>
+                      <a:pPr indent="0" marL="0">
+                        <a:lnSpc>
+                          <a:spcPts val="1820"/>
+                        </a:lnSpc>
+                        <a:buNone/>
+                      </a:pPr>
+                      <a:r>
+                        <a:rPr lang="en-US" sz="1300" dirty="0">
+                          <a:solidFill>
+                            <a:srgbClr val="000000"/>
+                          </a:solidFill>
+                          <a:latin typeface="Arial" pitchFamily="34" charset="0"/>
+                          <a:ea typeface="Arial" pitchFamily="34" charset="-122"/>
+                          <a:cs typeface="Arial" pitchFamily="34" charset="-120"/>
+                        </a:rPr>
+                        <a:t>Refresh Token（自動續期）</a:t>
+                      </a:r>
+                      <a:endParaRPr lang="en-US" sz="1300" dirty="0">
+                        <a:latin typeface="Arial" charset="0"/>
+                        <a:ea typeface="Arial" charset="0"/>
+                        <a:cs typeface="Arial" charset="0"/>
+                      </a:endParaRPr>
+                    </a:p>
+                  </a:txBody>
+                  <a:tcPr marL="57785" marR="57785" marT="57785" marB="57785" anchor="t">
+                    <a:lnL w="12700" cap="flat" cmpd="sng" algn="ctr">
+                      <a:solidFill>
+                        <a:srgbClr val="B8CBA8"/>
+                      </a:solidFill>
+                      <a:prstDash val="solid"/>
+                      <a:round/>
+                      <a:headEnd type="none" w="med" len="med"/>
+                      <a:tailEnd type="none" w="med" len="med"/>
+                    </a:lnL>
+                    <a:lnR w="12700" cap="flat" cmpd="sng" algn="ctr">
+                      <a:solidFill>
+                        <a:srgbClr val="B8CBA8"/>
+                      </a:solidFill>
+                      <a:prstDash val="solid"/>
+                      <a:round/>
+                      <a:headEnd type="none" w="med" len="med"/>
+                      <a:tailEnd type="none" w="med" len="med"/>
+                    </a:lnR>
+                    <a:lnT w="12700" cap="flat" cmpd="sng" algn="ctr">
+                      <a:solidFill>
+                        <a:srgbClr val="B8CBA8"/>
+                      </a:solidFill>
+                      <a:prstDash val="solid"/>
+                      <a:round/>
+                      <a:headEnd type="none" w="med" len="med"/>
+                      <a:tailEnd type="none" w="med" len="med"/>
+                    </a:lnT>
+                    <a:lnB w="12700" cap="flat" cmpd="sng" algn="ctr">
+                      <a:solidFill>
+                        <a:srgbClr val="B8CBA8"/>
+                      </a:solidFill>
+                      <a:prstDash val="solid"/>
+                      <a:round/>
+                      <a:headEnd type="none" w="med" len="med"/>
+                      <a:tailEnd type="none" w="med" len="med"/>
+                    </a:lnB>
+                    <a:solidFill>
+                      <a:srgbClr val="E6FED2"/>
+                    </a:solidFill>
+                  </a:tcPr>
+                </a:tc>
+                <a:tc>
+                  <a:txBody>
+                    <a:bodyPr/>
+                    <a:lstStyle/>
+                    <a:p>
+                      <a:pPr indent="0" marL="0">
+                        <a:lnSpc>
+                          <a:spcPts val="1820"/>
+                        </a:lnSpc>
+                        <a:buNone/>
+                      </a:pPr>
+                      <a:r>
+                        <a:rPr lang="en-US" sz="1300" dirty="0">
+                          <a:solidFill>
+                            <a:srgbClr val="000000"/>
+                          </a:solidFill>
+                          <a:latin typeface="Arial" pitchFamily="34" charset="0"/>
+                          <a:ea typeface="Arial" pitchFamily="34" charset="-122"/>
+                          <a:cs typeface="Arial" pitchFamily="34" charset="-120"/>
+                        </a:rPr>
+                        <a:t>通行證到期自動換新，不用一直重新登入</a:t>
+                      </a:r>
+                      <a:endParaRPr lang="en-US" sz="1300" dirty="0">
+                        <a:latin typeface="Arial" charset="0"/>
+                        <a:ea typeface="Arial" charset="0"/>
+                        <a:cs typeface="Arial" charset="0"/>
+                      </a:endParaRPr>
+                    </a:p>
+                  </a:txBody>
+                  <a:tcPr marL="57785" marR="57785" marT="57785" marB="57785" anchor="t">
+                    <a:lnL w="12700" cap="flat" cmpd="sng" algn="ctr">
+                      <a:solidFill>
+                        <a:srgbClr val="B8CBA8"/>
+                      </a:solidFill>
+                      <a:prstDash val="solid"/>
+                      <a:round/>
+                      <a:headEnd type="none" w="med" len="med"/>
+                      <a:tailEnd type="none" w="med" len="med"/>
+                    </a:lnL>
+                    <a:lnR w="12700" cap="flat" cmpd="sng" algn="ctr">
+                      <a:solidFill>
+                        <a:srgbClr val="B8CBA8"/>
+                      </a:solidFill>
+                      <a:prstDash val="solid"/>
+                      <a:round/>
+                      <a:headEnd type="none" w="med" len="med"/>
+                      <a:tailEnd type="none" w="med" len="med"/>
+                    </a:lnR>
+                    <a:lnT w="12700" cap="flat" cmpd="sng" algn="ctr">
+                      <a:solidFill>
+                        <a:srgbClr val="B8CBA8"/>
+                      </a:solidFill>
+                      <a:prstDash val="solid"/>
+                      <a:round/>
+                      <a:headEnd type="none" w="med" len="med"/>
+                      <a:tailEnd type="none" w="med" len="med"/>
+                    </a:lnT>
+                    <a:lnB w="12700" cap="flat" cmpd="sng" algn="ctr">
+                      <a:solidFill>
+                        <a:srgbClr val="B8CBA8"/>
+                      </a:solidFill>
+                      <a:prstDash val="solid"/>
+                      <a:round/>
+                      <a:headEnd type="none" w="med" len="med"/>
+                      <a:tailEnd type="none" w="med" len="med"/>
+                    </a:lnB>
+                    <a:solidFill>
+                      <a:srgbClr val="E6FED2"/>
+                    </a:solidFill>
+                  </a:tcPr>
+                </a:tc>
+              </a:tr>
+              <a:tr h="359321">
+                <a:tc>
+                  <a:txBody>
+                    <a:bodyPr/>
+                    <a:lstStyle/>
+                    <a:p>
+                      <a:pPr indent="0" marL="0">
+                        <a:lnSpc>
+                          <a:spcPts val="1820"/>
+                        </a:lnSpc>
+                        <a:buNone/>
+                      </a:pPr>
+                      <a:r>
+                        <a:rPr lang="en-US" sz="1300" dirty="0">
+                          <a:solidFill>
+                            <a:srgbClr val="000000"/>
+                          </a:solidFill>
+                          <a:latin typeface="Arial" pitchFamily="34" charset="0"/>
+                          <a:ea typeface="Arial" pitchFamily="34" charset="-122"/>
+                          <a:cs typeface="Arial" pitchFamily="34" charset="-120"/>
+                        </a:rPr>
+                        <a:t>本階段</a:t>
+                      </a:r>
+                      <a:endParaRPr lang="en-US" sz="1300" dirty="0">
+                        <a:latin typeface="Arial" charset="0"/>
+                        <a:ea typeface="Arial" charset="0"/>
+                        <a:cs typeface="Arial" charset="0"/>
+                      </a:endParaRPr>
+                    </a:p>
+                  </a:txBody>
+                  <a:tcPr marL="57785" marR="57785" marT="57785" marB="57785" anchor="t">
+                    <a:lnL w="12700" cap="flat" cmpd="sng" algn="ctr">
+                      <a:solidFill>
+                        <a:srgbClr val="CBCBCB"/>
+                      </a:solidFill>
+                      <a:prstDash val="solid"/>
+                      <a:round/>
+                      <a:headEnd type="none" w="med" len="med"/>
+                      <a:tailEnd type="none" w="med" len="med"/>
+                    </a:lnL>
+                    <a:lnR w="12700" cap="flat" cmpd="sng" algn="ctr">
+                      <a:solidFill>
+                        <a:srgbClr val="B8CBA8"/>
+                      </a:solidFill>
+                      <a:prstDash val="solid"/>
+                      <a:round/>
+                      <a:headEnd type="none" w="med" len="med"/>
+                      <a:tailEnd type="none" w="med" len="med"/>
+                    </a:lnR>
+                    <a:lnT w="12700" cap="flat" cmpd="sng" algn="ctr">
+                      <a:solidFill>
+                        <a:srgbClr val="B8CBA8"/>
+                      </a:solidFill>
+                      <a:prstDash val="solid"/>
+                      <a:round/>
+                      <a:headEnd type="none" w="med" len="med"/>
+                      <a:tailEnd type="none" w="med" len="med"/>
+                    </a:lnT>
+                    <a:lnB w="12700" cap="flat" cmpd="sng" algn="ctr">
+                      <a:solidFill>
+                        <a:srgbClr val="B8CBA8"/>
+                      </a:solidFill>
+                      <a:prstDash val="solid"/>
+                      <a:round/>
+                      <a:headEnd type="none" w="med" len="med"/>
+                      <a:tailEnd type="none" w="med" len="med"/>
+                    </a:lnB>
+                    <a:solidFill>
+                      <a:srgbClr val="E6FED2"/>
+                    </a:solidFill>
+                  </a:tcPr>
+                </a:tc>
+                <a:tc>
+                  <a:txBody>
+                    <a:bodyPr/>
+                    <a:lstStyle/>
+                    <a:p>
+                      <a:pPr indent="0" marL="0">
+                        <a:lnSpc>
+                          <a:spcPts val="1820"/>
+                        </a:lnSpc>
+                        <a:buNone/>
+                      </a:pPr>
+                      <a:r>
+                        <a:rPr lang="en-US" sz="1300" dirty="0">
+                          <a:solidFill>
+                            <a:srgbClr val="000000"/>
+                          </a:solidFill>
+                          <a:latin typeface="Arial" pitchFamily="34" charset="0"/>
+                          <a:ea typeface="Arial" pitchFamily="34" charset="-122"/>
+                          <a:cs typeface="Arial" pitchFamily="34" charset="-120"/>
+                        </a:rPr>
+                        <a:t>Client 註冊（CIMD＋預先註冊）</a:t>
+                      </a:r>
+                      <a:endParaRPr lang="en-US" sz="1300" dirty="0">
+                        <a:latin typeface="Arial" charset="0"/>
+                        <a:ea typeface="Arial" charset="0"/>
+                        <a:cs typeface="Arial" charset="0"/>
+                      </a:endParaRPr>
+                    </a:p>
+                  </a:txBody>
+                  <a:tcPr marL="57785" marR="57785" marT="57785" marB="57785" anchor="t">
+                    <a:lnL w="12700" cap="flat" cmpd="sng" algn="ctr">
+                      <a:solidFill>
+                        <a:srgbClr val="B8CBA8"/>
+                      </a:solidFill>
+                      <a:prstDash val="solid"/>
+                      <a:round/>
+                      <a:headEnd type="none" w="med" len="med"/>
+                      <a:tailEnd type="none" w="med" len="med"/>
+                    </a:lnL>
+                    <a:lnR w="12700" cap="flat" cmpd="sng" algn="ctr">
+                      <a:solidFill>
+                        <a:srgbClr val="B8CBA8"/>
+                      </a:solidFill>
+                      <a:prstDash val="solid"/>
+                      <a:round/>
+                      <a:headEnd type="none" w="med" len="med"/>
+                      <a:tailEnd type="none" w="med" len="med"/>
+                    </a:lnR>
+                    <a:lnT w="12700" cap="flat" cmpd="sng" algn="ctr">
+                      <a:solidFill>
+                        <a:srgbClr val="B8CBA8"/>
+                      </a:solidFill>
+                      <a:prstDash val="solid"/>
+                      <a:round/>
+                      <a:headEnd type="none" w="med" len="med"/>
+                      <a:tailEnd type="none" w="med" len="med"/>
+                    </a:lnT>
+                    <a:lnB w="12700" cap="flat" cmpd="sng" algn="ctr">
+                      <a:solidFill>
+                        <a:srgbClr val="B8CBA8"/>
+                      </a:solidFill>
+                      <a:prstDash val="solid"/>
+                      <a:round/>
+                      <a:headEnd type="none" w="med" len="med"/>
+                      <a:tailEnd type="none" w="med" len="med"/>
+                    </a:lnB>
+                    <a:solidFill>
+                      <a:srgbClr val="E6FED2"/>
+                    </a:solidFill>
+                  </a:tcPr>
+                </a:tc>
+                <a:tc>
+                  <a:txBody>
+                    <a:bodyPr/>
+                    <a:lstStyle/>
+                    <a:p>
+                      <a:pPr indent="0" marL="0">
+                        <a:lnSpc>
+                          <a:spcPts val="1820"/>
+                        </a:lnSpc>
+                        <a:buNone/>
+                      </a:pPr>
+                      <a:r>
+                        <a:rPr lang="en-US" sz="1300" dirty="0">
+                          <a:solidFill>
+                            <a:srgbClr val="000000"/>
+                          </a:solidFill>
+                          <a:latin typeface="Arial" pitchFamily="34" charset="0"/>
+                          <a:ea typeface="Arial" pitchFamily="34" charset="-122"/>
+                          <a:cs typeface="Arial" pitchFamily="34" charset="-120"/>
+                        </a:rPr>
+                        <a:t>Claude、ChatGPT 以 CIMD 自動註冊；Gemini 由管理員預先註冊</a:t>
+                      </a:r>
+                      <a:endParaRPr lang="en-US" sz="1300" dirty="0">
+                        <a:latin typeface="Arial" charset="0"/>
+                        <a:ea typeface="Arial" charset="0"/>
+                        <a:cs typeface="Arial" charset="0"/>
+                      </a:endParaRPr>
+                    </a:p>
+                  </a:txBody>
+                  <a:tcPr marL="57785" marR="57785" marT="57785" marB="57785" anchor="t">
+                    <a:lnL w="12700" cap="flat" cmpd="sng" algn="ctr">
+                      <a:solidFill>
+                        <a:srgbClr val="B8CBA8"/>
+                      </a:solidFill>
+                      <a:prstDash val="solid"/>
+                      <a:round/>
+                      <a:headEnd type="none" w="med" len="med"/>
+                      <a:tailEnd type="none" w="med" len="med"/>
+                    </a:lnL>
+                    <a:lnR w="12700" cap="flat" cmpd="sng" algn="ctr">
+                      <a:solidFill>
+                        <a:srgbClr val="B8CBA8"/>
+                      </a:solidFill>
+                      <a:prstDash val="solid"/>
+                      <a:round/>
+                      <a:headEnd type="none" w="med" len="med"/>
+                      <a:tailEnd type="none" w="med" len="med"/>
+                    </a:lnR>
+                    <a:lnT w="12700" cap="flat" cmpd="sng" algn="ctr">
+                      <a:solidFill>
+                        <a:srgbClr val="B8CBA8"/>
+                      </a:solidFill>
+                      <a:prstDash val="solid"/>
+                      <a:round/>
+                      <a:headEnd type="none" w="med" len="med"/>
+                      <a:tailEnd type="none" w="med" len="med"/>
+                    </a:lnT>
+                    <a:lnB w="12700" cap="flat" cmpd="sng" algn="ctr">
+                      <a:solidFill>
+                        <a:srgbClr val="B8CBA8"/>
+                      </a:solidFill>
+                      <a:prstDash val="solid"/>
+                      <a:round/>
+                      <a:headEnd type="none" w="med" len="med"/>
+                      <a:tailEnd type="none" w="med" len="med"/>
+                    </a:lnB>
+                    <a:solidFill>
+                      <a:srgbClr val="E6FED2"/>
+                    </a:solidFill>
+                  </a:tcPr>
+                </a:tc>
+              </a:tr>
+              <a:tr h="359321">
+                <a:tc>
+                  <a:txBody>
+                    <a:bodyPr/>
+                    <a:lstStyle/>
+                    <a:p>
+                      <a:pPr indent="0" marL="0">
+                        <a:lnSpc>
+                          <a:spcPts val="1820"/>
+                        </a:lnSpc>
+                        <a:buNone/>
+                      </a:pPr>
+                      <a:r>
+                        <a:rPr lang="en-US" sz="1300" dirty="0">
+                          <a:solidFill>
+                            <a:srgbClr val="000000"/>
+                          </a:solidFill>
+                          <a:latin typeface="Arial" pitchFamily="34" charset="0"/>
+                          <a:ea typeface="Arial" pitchFamily="34" charset="-122"/>
+                          <a:cs typeface="Arial" pitchFamily="34" charset="-120"/>
+                        </a:rPr>
+                        <a:t>本階段</a:t>
+                      </a:r>
+                      <a:endParaRPr lang="en-US" sz="1300" dirty="0">
+                        <a:latin typeface="Arial" charset="0"/>
+                        <a:ea typeface="Arial" charset="0"/>
+                        <a:cs typeface="Arial" charset="0"/>
+                      </a:endParaRPr>
+                    </a:p>
+                  </a:txBody>
+                  <a:tcPr marL="57785" marR="57785" marT="57785" marB="57785" anchor="t">
+                    <a:lnL w="12700" cap="flat" cmpd="sng" algn="ctr">
+                      <a:solidFill>
+                        <a:srgbClr val="CBCBCB"/>
+                      </a:solidFill>
+                      <a:prstDash val="solid"/>
+                      <a:round/>
+                      <a:headEnd type="none" w="med" len="med"/>
+                      <a:tailEnd type="none" w="med" len="med"/>
+                    </a:lnL>
+                    <a:lnR w="12700" cap="flat" cmpd="sng" algn="ctr">
+                      <a:solidFill>
+                        <a:srgbClr val="B8CBA8"/>
+                      </a:solidFill>
+                      <a:prstDash val="solid"/>
+                      <a:round/>
+                      <a:headEnd type="none" w="med" len="med"/>
+                      <a:tailEnd type="none" w="med" len="med"/>
+                    </a:lnR>
+                    <a:lnT w="12700" cap="flat" cmpd="sng" algn="ctr">
+                      <a:solidFill>
+                        <a:srgbClr val="B8CBA8"/>
+                      </a:solidFill>
+                      <a:prstDash val="solid"/>
+                      <a:round/>
+                      <a:headEnd type="none" w="med" len="med"/>
+                      <a:tailEnd type="none" w="med" len="med"/>
+                    </a:lnT>
+                    <a:lnB w="12700" cap="flat" cmpd="sng" algn="ctr">
+                      <a:solidFill>
+                        <a:srgbClr val="B8CBA8"/>
+                      </a:solidFill>
+                      <a:prstDash val="solid"/>
+                      <a:round/>
+                      <a:headEnd type="none" w="med" len="med"/>
+                      <a:tailEnd type="none" w="med" len="med"/>
+                    </a:lnB>
+                    <a:solidFill>
+                      <a:srgbClr val="E6FED2"/>
+                    </a:solidFill>
+                  </a:tcPr>
+                </a:tc>
+                <a:tc>
+                  <a:txBody>
+                    <a:bodyPr/>
+                    <a:lstStyle/>
+                    <a:p>
+                      <a:pPr indent="0" marL="0">
+                        <a:lnSpc>
+                          <a:spcPts val="1820"/>
+                        </a:lnSpc>
+                        <a:buNone/>
+                      </a:pPr>
+                      <a:r>
+                        <a:rPr lang="en-US" sz="1300" dirty="0">
+                          <a:solidFill>
+                            <a:srgbClr val="000000"/>
+                          </a:solidFill>
+                          <a:latin typeface="Arial" pitchFamily="34" charset="0"/>
+                          <a:ea typeface="Arial" pitchFamily="34" charset="-122"/>
+                          <a:cs typeface="Arial" pitchFamily="34" charset="-120"/>
+                        </a:rPr>
+                        <a:t>Metadata 與 JWKS 端點</a:t>
+                      </a:r>
+                      <a:endParaRPr lang="en-US" sz="1300" dirty="0">
+                        <a:latin typeface="Arial" charset="0"/>
+                        <a:ea typeface="Arial" charset="0"/>
+                        <a:cs typeface="Arial" charset="0"/>
+                      </a:endParaRPr>
+                    </a:p>
+                  </a:txBody>
+                  <a:tcPr marL="57785" marR="57785" marT="57785" marB="57785" anchor="t">
+                    <a:lnL w="12700" cap="flat" cmpd="sng" algn="ctr">
+                      <a:solidFill>
+                        <a:srgbClr val="B8CBA8"/>
+                      </a:solidFill>
+                      <a:prstDash val="solid"/>
+                      <a:round/>
+                      <a:headEnd type="none" w="med" len="med"/>
+                      <a:tailEnd type="none" w="med" len="med"/>
+                    </a:lnL>
+                    <a:lnR w="12700" cap="flat" cmpd="sng" algn="ctr">
+                      <a:solidFill>
+                        <a:srgbClr val="B8CBA8"/>
+                      </a:solidFill>
+                      <a:prstDash val="solid"/>
+                      <a:round/>
+                      <a:headEnd type="none" w="med" len="med"/>
+                      <a:tailEnd type="none" w="med" len="med"/>
+                    </a:lnR>
+                    <a:lnT w="12700" cap="flat" cmpd="sng" algn="ctr">
+                      <a:solidFill>
+                        <a:srgbClr val="B8CBA8"/>
+                      </a:solidFill>
+                      <a:prstDash val="solid"/>
+                      <a:round/>
+                      <a:headEnd type="none" w="med" len="med"/>
+                      <a:tailEnd type="none" w="med" len="med"/>
+                    </a:lnT>
+                    <a:lnB w="12700" cap="flat" cmpd="sng" algn="ctr">
+                      <a:solidFill>
+                        <a:srgbClr val="B8CBA8"/>
+                      </a:solidFill>
+                      <a:prstDash val="solid"/>
+                      <a:round/>
+                      <a:headEnd type="none" w="med" len="med"/>
+                      <a:tailEnd type="none" w="med" len="med"/>
+                    </a:lnB>
+                    <a:solidFill>
+                      <a:srgbClr val="E6FED2"/>
+                    </a:solidFill>
+                  </a:tcPr>
+                </a:tc>
+                <a:tc>
+                  <a:txBody>
+                    <a:bodyPr/>
+                    <a:lstStyle/>
+                    <a:p>
+                      <a:pPr indent="0" marL="0">
+                        <a:lnSpc>
+                          <a:spcPts val="1820"/>
+                        </a:lnSpc>
+                        <a:buNone/>
+                      </a:pPr>
+                      <a:r>
+                        <a:rPr lang="en-US" sz="1300" dirty="0">
+                          <a:solidFill>
+                            <a:srgbClr val="000000"/>
+                          </a:solidFill>
+                          <a:latin typeface="Arial" pitchFamily="34" charset="0"/>
+                          <a:ea typeface="Arial" pitchFamily="34" charset="-122"/>
+                          <a:cs typeface="Arial" pitchFamily="34" charset="-120"/>
+                        </a:rPr>
+                        <a:t>公開 OAuth Server 的設定與驗證公鑰，讓 AI 工具自動找到登入位置與驗證方式</a:t>
+                      </a:r>
+                      <a:endParaRPr lang="en-US" sz="1300" dirty="0">
+                        <a:latin typeface="Arial" charset="0"/>
+                        <a:ea typeface="Arial" charset="0"/>
+                        <a:cs typeface="Arial" charset="0"/>
+                      </a:endParaRPr>
+                    </a:p>
+                  </a:txBody>
+                  <a:tcPr marL="57785" marR="57785" marT="57785" marB="57785" anchor="t">
+                    <a:lnL w="12700" cap="flat" cmpd="sng" algn="ctr">
+                      <a:solidFill>
+                        <a:srgbClr val="B8CBA8"/>
+                      </a:solidFill>
+                      <a:prstDash val="solid"/>
+                      <a:round/>
+                      <a:headEnd type="none" w="med" len="med"/>
+                      <a:tailEnd type="none" w="med" len="med"/>
+                    </a:lnL>
+                    <a:lnR w="12700" cap="flat" cmpd="sng" algn="ctr">
+                      <a:solidFill>
+                        <a:srgbClr val="B8CBA8"/>
+                      </a:solidFill>
+                      <a:prstDash val="solid"/>
+                      <a:round/>
+                      <a:headEnd type="none" w="med" len="med"/>
+                      <a:tailEnd type="none" w="med" len="med"/>
+                    </a:lnR>
+                    <a:lnT w="12700" cap="flat" cmpd="sng" algn="ctr">
+                      <a:solidFill>
+                        <a:srgbClr val="B8CBA8"/>
+                      </a:solidFill>
+                      <a:prstDash val="solid"/>
+                      <a:round/>
+                      <a:headEnd type="none" w="med" len="med"/>
+                      <a:tailEnd type="none" w="med" len="med"/>
+                    </a:lnT>
+                    <a:lnB w="12700" cap="flat" cmpd="sng" algn="ctr">
+                      <a:solidFill>
+                        <a:srgbClr val="B8CBA8"/>
+                      </a:solidFill>
+                      <a:prstDash val="solid"/>
+                      <a:round/>
+                      <a:headEnd type="none" w="med" len="med"/>
+                      <a:tailEnd type="none" w="med" len="med"/>
+                    </a:lnB>
+                    <a:solidFill>
+                      <a:srgbClr val="E6FED2"/>
+                    </a:solidFill>
+                  </a:tcPr>
+                </a:tc>
+              </a:tr>
+              <a:tr h="359321">
+                <a:tc>
+                  <a:txBody>
+                    <a:bodyPr/>
+                    <a:lstStyle/>
+                    <a:p>
+                      <a:pPr indent="0" marL="0">
+                        <a:lnSpc>
+                          <a:spcPts val="1820"/>
+                        </a:lnSpc>
+                        <a:buNone/>
+                      </a:pPr>
+                      <a:r>
+                        <a:rPr lang="en-US" sz="1300" dirty="0">
+                          <a:solidFill>
+                            <a:srgbClr val="000000"/>
+                          </a:solidFill>
+                          <a:latin typeface="Arial" pitchFamily="34" charset="0"/>
+                          <a:ea typeface="Arial" pitchFamily="34" charset="-122"/>
+                          <a:cs typeface="Arial" pitchFamily="34" charset="-120"/>
+                        </a:rPr>
+                        <a:t>後續</a:t>
+                      </a:r>
+                      <a:endParaRPr lang="en-US" sz="1300" dirty="0">
+                        <a:latin typeface="Arial" charset="0"/>
+                        <a:ea typeface="Arial" charset="0"/>
+                        <a:cs typeface="Arial" charset="0"/>
+                      </a:endParaRPr>
+                    </a:p>
+                  </a:txBody>
+                  <a:tcPr marL="57785" marR="57785" marT="57785" marB="57785" anchor="t">
+                    <a:lnL w="12700" cap="flat" cmpd="sng" algn="ctr">
+                      <a:solidFill>
+                        <a:srgbClr val="CBCBCB"/>
+                      </a:solidFill>
+                      <a:prstDash val="solid"/>
+                      <a:round/>
+                      <a:headEnd type="none" w="med" len="med"/>
+                      <a:tailEnd type="none" w="med" len="med"/>
+                    </a:lnL>
+                    <a:lnR w="12700" cap="flat" cmpd="sng" algn="ctr">
+                      <a:solidFill>
+                        <a:srgbClr val="C2C2C2"/>
+                      </a:solidFill>
+                      <a:prstDash val="solid"/>
+                      <a:round/>
+                      <a:headEnd type="none" w="med" len="med"/>
+                      <a:tailEnd type="none" w="med" len="med"/>
+                    </a:lnR>
+                    <a:lnT w="12700" cap="flat" cmpd="sng" algn="ctr">
+                      <a:solidFill>
+                        <a:srgbClr val="B8CBA8"/>
+                      </a:solidFill>
+                      <a:prstDash val="solid"/>
+                      <a:round/>
+                      <a:headEnd type="none" w="med" len="med"/>
+                      <a:tailEnd type="none" w="med" len="med"/>
+                    </a:lnT>
+                    <a:lnB w="12700" cap="flat" cmpd="sng" algn="ctr">
+                      <a:solidFill>
+                        <a:srgbClr val="C2C2C2"/>
+                      </a:solidFill>
+                      <a:prstDash val="solid"/>
+                      <a:round/>
+                      <a:headEnd type="none" w="med" len="med"/>
+                      <a:tailEnd type="none" w="med" len="med"/>
+                    </a:lnB>
+                    <a:solidFill>
+                      <a:srgbClr val="F3F3F3"/>
+                    </a:solidFill>
+                  </a:tcPr>
+                </a:tc>
+                <a:tc>
+                  <a:txBody>
+                    <a:bodyPr/>
+                    <a:lstStyle/>
+                    <a:p>
+                      <a:pPr indent="0" marL="0">
+                        <a:lnSpc>
+                          <a:spcPts val="1820"/>
+                        </a:lnSpc>
+                        <a:buNone/>
+                      </a:pPr>
+                      <a:r>
+                        <a:rPr lang="en-US" sz="1300" dirty="0">
+                          <a:solidFill>
+                            <a:srgbClr val="000000"/>
+                          </a:solidFill>
+                          <a:latin typeface="Arial" pitchFamily="34" charset="0"/>
+                          <a:ea typeface="Arial" pitchFamily="34" charset="-122"/>
+                          <a:cs typeface="Arial" pitchFamily="34" charset="-120"/>
+                        </a:rPr>
+                        <a:t>Token 撤銷（/revoke）</a:t>
+                      </a:r>
+                      <a:endParaRPr lang="en-US" sz="1300" dirty="0">
+                        <a:latin typeface="Arial" charset="0"/>
+                        <a:ea typeface="Arial" charset="0"/>
+                        <a:cs typeface="Arial" charset="0"/>
+                      </a:endParaRPr>
+                    </a:p>
+                  </a:txBody>
+                  <a:tcPr marL="57785" marR="57785" marT="57785" marB="57785" anchor="t">
+                    <a:lnL w="12700" cap="flat" cmpd="sng" algn="ctr">
+                      <a:solidFill>
+                        <a:srgbClr val="C2C2C2"/>
+                      </a:solidFill>
+                      <a:prstDash val="solid"/>
+                      <a:round/>
+                      <a:headEnd type="none" w="med" len="med"/>
+                      <a:tailEnd type="none" w="med" len="med"/>
+                    </a:lnL>
+                    <a:lnR w="12700" cap="flat" cmpd="sng" algn="ctr">
+                      <a:solidFill>
+                        <a:srgbClr val="C2C2C2"/>
+                      </a:solidFill>
+                      <a:prstDash val="solid"/>
+                      <a:round/>
+                      <a:headEnd type="none" w="med" len="med"/>
+                      <a:tailEnd type="none" w="med" len="med"/>
+                    </a:lnR>
+                    <a:lnT w="12700" cap="flat" cmpd="sng" algn="ctr">
+                      <a:solidFill>
+                        <a:srgbClr val="B8CBA8"/>
+                      </a:solidFill>
+                      <a:prstDash val="solid"/>
+                      <a:round/>
+                      <a:headEnd type="none" w="med" len="med"/>
+                      <a:tailEnd type="none" w="med" len="med"/>
+                    </a:lnT>
+                    <a:lnB w="12700" cap="flat" cmpd="sng" algn="ctr">
+                      <a:solidFill>
+                        <a:srgbClr val="C2C2C2"/>
+                      </a:solidFill>
+                      <a:prstDash val="solid"/>
+                      <a:round/>
+                      <a:headEnd type="none" w="med" len="med"/>
+                      <a:tailEnd type="none" w="med" len="med"/>
+                    </a:lnB>
+                    <a:solidFill>
+                      <a:srgbClr val="F3F3F3"/>
+                    </a:solidFill>
+                  </a:tcPr>
+                </a:tc>
+                <a:tc>
+                  <a:txBody>
+                    <a:bodyPr/>
+                    <a:lstStyle/>
+                    <a:p>
+                      <a:pPr indent="0" marL="0">
+                        <a:lnSpc>
+                          <a:spcPts val="1820"/>
+                        </a:lnSpc>
+                        <a:buNone/>
+                      </a:pPr>
+                      <a:r>
+                        <a:rPr lang="en-US" sz="1300" dirty="0">
+                          <a:solidFill>
+                            <a:srgbClr val="000000"/>
+                          </a:solidFill>
+                          <a:latin typeface="Arial" pitchFamily="34" charset="0"/>
+                          <a:ea typeface="Arial" pitchFamily="34" charset="-122"/>
+                          <a:cs typeface="Arial" pitchFamily="34" charset="-120"/>
+                        </a:rPr>
+                        <a:t>登出、帳號停用或異常時作廢 Token，通行證到期後即無法再存取</a:t>
+                      </a:r>
+                      <a:endParaRPr lang="en-US" sz="1300" dirty="0">
+                        <a:latin typeface="Arial" charset="0"/>
+                        <a:ea typeface="Arial" charset="0"/>
+                        <a:cs typeface="Arial" charset="0"/>
+                      </a:endParaRPr>
+                    </a:p>
+                  </a:txBody>
+                  <a:tcPr marL="57785" marR="57785" marT="57785" marB="57785" anchor="t">
+                    <a:lnL w="12700" cap="flat" cmpd="sng" algn="ctr">
+                      <a:solidFill>
+                        <a:srgbClr val="C2C2C2"/>
+                      </a:solidFill>
+                      <a:prstDash val="solid"/>
+                      <a:round/>
+                      <a:headEnd type="none" w="med" len="med"/>
+                      <a:tailEnd type="none" w="med" len="med"/>
+                    </a:lnL>
+                    <a:lnR w="12700" cap="flat" cmpd="sng" algn="ctr">
+                      <a:solidFill>
+                        <a:srgbClr val="C2C2C2"/>
+                      </a:solidFill>
+                      <a:prstDash val="solid"/>
+                      <a:round/>
+                      <a:headEnd type="none" w="med" len="med"/>
+                      <a:tailEnd type="none" w="med" len="med"/>
+                    </a:lnR>
+                    <a:lnT w="12700" cap="flat" cmpd="sng" algn="ctr">
+                      <a:solidFill>
+                        <a:srgbClr val="B8CBA8"/>
+                      </a:solidFill>
+                      <a:prstDash val="solid"/>
+                      <a:round/>
+                      <a:headEnd type="none" w="med" len="med"/>
+                      <a:tailEnd type="none" w="med" len="med"/>
+                    </a:lnT>
+                    <a:lnB w="12700" cap="flat" cmpd="sng" algn="ctr">
+                      <a:solidFill>
+                        <a:srgbClr val="C2C2C2"/>
+                      </a:solidFill>
+                      <a:prstDash val="solid"/>
+                      <a:round/>
+                      <a:headEnd type="none" w="med" len="med"/>
+                      <a:tailEnd type="none" w="med" len="med"/>
+                    </a:lnB>
+                    <a:solidFill>
+                      <a:srgbClr val="F3F3F3"/>
+                    </a:solidFill>
+                  </a:tcPr>
+                </a:tc>
+              </a:tr>
+              <a:tr h="359321">
+                <a:tc>
+                  <a:txBody>
+                    <a:bodyPr/>
+                    <a:lstStyle/>
+                    <a:p>
+                      <a:pPr indent="0" marL="0">
+                        <a:lnSpc>
+                          <a:spcPts val="1820"/>
+                        </a:lnSpc>
+                        <a:buNone/>
+                      </a:pPr>
+                      <a:r>
+                        <a:rPr lang="en-US" sz="1300" dirty="0">
+                          <a:solidFill>
+                            <a:srgbClr val="000000"/>
+                          </a:solidFill>
+                          <a:latin typeface="Arial" pitchFamily="34" charset="0"/>
+                          <a:ea typeface="Arial" pitchFamily="34" charset="-122"/>
+                          <a:cs typeface="Arial" pitchFamily="34" charset="-120"/>
+                        </a:rPr>
+                        <a:t>後續</a:t>
+                      </a:r>
+                      <a:endParaRPr lang="en-US" sz="1300" dirty="0">
+                        <a:latin typeface="Arial" charset="0"/>
+                        <a:ea typeface="Arial" charset="0"/>
+                        <a:cs typeface="Arial" charset="0"/>
+                      </a:endParaRPr>
+                    </a:p>
+                  </a:txBody>
+                  <a:tcPr marL="57785" marR="57785" marT="57785" marB="57785" anchor="t">
+                    <a:lnL w="12700" cap="flat" cmpd="sng" algn="ctr">
+                      <a:solidFill>
+                        <a:srgbClr val="CBCBCB"/>
+                      </a:solidFill>
+                      <a:prstDash val="solid"/>
+                      <a:round/>
+                      <a:headEnd type="none" w="med" len="med"/>
+                      <a:tailEnd type="none" w="med" len="med"/>
+                    </a:lnL>
+                    <a:lnR w="12700" cap="flat" cmpd="sng" algn="ctr">
+                      <a:solidFill>
+                        <a:srgbClr val="C2C2C2"/>
+                      </a:solidFill>
+                      <a:prstDash val="solid"/>
+                      <a:round/>
+                      <a:headEnd type="none" w="med" len="med"/>
+                      <a:tailEnd type="none" w="med" len="med"/>
+                    </a:lnR>
+                    <a:lnT w="12700" cap="flat" cmpd="sng" algn="ctr">
+                      <a:solidFill>
+                        <a:srgbClr val="C2C2C2"/>
+                      </a:solidFill>
+                      <a:prstDash val="solid"/>
+                      <a:round/>
+                      <a:headEnd type="none" w="med" len="med"/>
+                      <a:tailEnd type="none" w="med" len="med"/>
+                    </a:lnT>
+                    <a:lnB w="12700" cap="flat" cmpd="sng" algn="ctr">
+                      <a:solidFill>
+                        <a:srgbClr val="C2C2C2"/>
+                      </a:solidFill>
+                      <a:prstDash val="solid"/>
+                      <a:round/>
+                      <a:headEnd type="none" w="med" len="med"/>
+                      <a:tailEnd type="none" w="med" len="med"/>
+                    </a:lnB>
+                    <a:solidFill>
+                      <a:srgbClr val="F3F3F3"/>
+                    </a:solidFill>
+                  </a:tcPr>
+                </a:tc>
+                <a:tc>
+                  <a:txBody>
+                    <a:bodyPr/>
+                    <a:lstStyle/>
+                    <a:p>
+                      <a:pPr indent="0" marL="0">
+                        <a:lnSpc>
+                          <a:spcPts val="1820"/>
+                        </a:lnSpc>
+                        <a:buNone/>
+                      </a:pPr>
+                      <a:r>
+                        <a:rPr lang="en-US" sz="1300" dirty="0">
+                          <a:solidFill>
+                            <a:srgbClr val="000000"/>
+                          </a:solidFill>
+                          <a:latin typeface="Arial" pitchFamily="34" charset="0"/>
+                          <a:ea typeface="Arial" pitchFamily="34" charset="-122"/>
+                          <a:cs typeface="Arial" pitchFamily="34" charset="-120"/>
+                        </a:rPr>
+                        <a:t>已授權應用管理頁</a:t>
+                      </a:r>
+                      <a:endParaRPr lang="en-US" sz="1300" dirty="0">
+                        <a:latin typeface="Arial" charset="0"/>
+                        <a:ea typeface="Arial" charset="0"/>
+                        <a:cs typeface="Arial" charset="0"/>
+                      </a:endParaRPr>
+                    </a:p>
+                  </a:txBody>
+                  <a:tcPr marL="57785" marR="57785" marT="57785" marB="57785" anchor="t">
+                    <a:lnL w="12700" cap="flat" cmpd="sng" algn="ctr">
+                      <a:solidFill>
+                        <a:srgbClr val="C2C2C2"/>
+                      </a:solidFill>
+                      <a:prstDash val="solid"/>
+                      <a:round/>
+                      <a:headEnd type="none" w="med" len="med"/>
+                      <a:tailEnd type="none" w="med" len="med"/>
+                    </a:lnL>
+                    <a:lnR w="12700" cap="flat" cmpd="sng" algn="ctr">
+                      <a:solidFill>
+                        <a:srgbClr val="C2C2C2"/>
+                      </a:solidFill>
+                      <a:prstDash val="solid"/>
+                      <a:round/>
+                      <a:headEnd type="none" w="med" len="med"/>
+                      <a:tailEnd type="none" w="med" len="med"/>
+                    </a:lnR>
+                    <a:lnT w="12700" cap="flat" cmpd="sng" algn="ctr">
+                      <a:solidFill>
+                        <a:srgbClr val="C2C2C2"/>
+                      </a:solidFill>
+                      <a:prstDash val="solid"/>
+                      <a:round/>
+                      <a:headEnd type="none" w="med" len="med"/>
+                      <a:tailEnd type="none" w="med" len="med"/>
+                    </a:lnT>
+                    <a:lnB w="12700" cap="flat" cmpd="sng" algn="ctr">
+                      <a:solidFill>
+                        <a:srgbClr val="C2C2C2"/>
+                      </a:solidFill>
+                      <a:prstDash val="solid"/>
+                      <a:round/>
+                      <a:headEnd type="none" w="med" len="med"/>
+                      <a:tailEnd type="none" w="med" len="med"/>
+                    </a:lnB>
+                    <a:solidFill>
+                      <a:srgbClr val="F3F3F3"/>
+                    </a:solidFill>
+                  </a:tcPr>
+                </a:tc>
+                <a:tc>
+                  <a:txBody>
+                    <a:bodyPr/>
+                    <a:lstStyle/>
+                    <a:p>
+                      <a:pPr indent="0" marL="0">
+                        <a:lnSpc>
+                          <a:spcPts val="1820"/>
+                        </a:lnSpc>
+                        <a:buNone/>
+                      </a:pPr>
+                      <a:r>
+                        <a:rPr lang="en-US" sz="1300" dirty="0">
+                          <a:solidFill>
+                            <a:srgbClr val="000000"/>
+                          </a:solidFill>
+                          <a:latin typeface="Arial" pitchFamily="34" charset="0"/>
+                          <a:ea typeface="Arial" pitchFamily="34" charset="-122"/>
+                          <a:cs typeface="Arial" pitchFamily="34" charset="-120"/>
+                        </a:rPr>
+                        <a:t>使用者自行查看、取消 AI 工具的存取權</a:t>
+                      </a:r>
+                      <a:endParaRPr lang="en-US" sz="1300" dirty="0">
+                        <a:latin typeface="Arial" charset="0"/>
+                        <a:ea typeface="Arial" charset="0"/>
+                        <a:cs typeface="Arial" charset="0"/>
+                      </a:endParaRPr>
+                    </a:p>
+                  </a:txBody>
+                  <a:tcPr marL="57785" marR="57785" marT="57785" marB="57785" anchor="t">
+                    <a:lnL w="12700" cap="flat" cmpd="sng" algn="ctr">
+                      <a:solidFill>
+                        <a:srgbClr val="C2C2C2"/>
+                      </a:solidFill>
+                      <a:prstDash val="solid"/>
+                      <a:round/>
+                      <a:headEnd type="none" w="med" len="med"/>
+                      <a:tailEnd type="none" w="med" len="med"/>
+                    </a:lnL>
+                    <a:lnR w="12700" cap="flat" cmpd="sng" algn="ctr">
+                      <a:solidFill>
+                        <a:srgbClr val="C2C2C2"/>
+                      </a:solidFill>
+                      <a:prstDash val="solid"/>
+                      <a:round/>
+                      <a:headEnd type="none" w="med" len="med"/>
+                      <a:tailEnd type="none" w="med" len="med"/>
+                    </a:lnR>
+                    <a:lnT w="12700" cap="flat" cmpd="sng" algn="ctr">
+                      <a:solidFill>
+                        <a:srgbClr val="C2C2C2"/>
+                      </a:solidFill>
+                      <a:prstDash val="solid"/>
+                      <a:round/>
+                      <a:headEnd type="none" w="med" len="med"/>
+                      <a:tailEnd type="none" w="med" len="med"/>
+                    </a:lnT>
+                    <a:lnB w="12700" cap="flat" cmpd="sng" algn="ctr">
+                      <a:solidFill>
+                        <a:srgbClr val="C2C2C2"/>
+                      </a:solidFill>
+                      <a:prstDash val="solid"/>
+                      <a:round/>
+                      <a:headEnd type="none" w="med" len="med"/>
+                      <a:tailEnd type="none" w="med" len="med"/>
+                    </a:lnB>
+                    <a:solidFill>
+                      <a:srgbClr val="F3F3F3"/>
+                    </a:solidFill>
+                  </a:tcPr>
+                </a:tc>
+              </a:tr>
+              <a:tr h="359321">
+                <a:tc>
+                  <a:txBody>
+                    <a:bodyPr/>
+                    <a:lstStyle/>
+                    <a:p>
+                      <a:pPr indent="0" marL="0">
+                        <a:lnSpc>
+                          <a:spcPts val="1820"/>
+                        </a:lnSpc>
+                        <a:buNone/>
+                      </a:pPr>
+                      <a:r>
+                        <a:rPr lang="en-US" sz="1300" dirty="0">
+                          <a:solidFill>
+                            <a:srgbClr val="000000"/>
+                          </a:solidFill>
+                          <a:latin typeface="Arial" pitchFamily="34" charset="0"/>
+                          <a:ea typeface="Arial" pitchFamily="34" charset="-122"/>
+                          <a:cs typeface="Arial" pitchFamily="34" charset="-120"/>
+                        </a:rPr>
+                        <a:t>後續</a:t>
+                      </a:r>
+                      <a:endParaRPr lang="en-US" sz="1300" dirty="0">
+                        <a:latin typeface="Arial" charset="0"/>
+                        <a:ea typeface="Arial" charset="0"/>
+                        <a:cs typeface="Arial" charset="0"/>
+                      </a:endParaRPr>
+                    </a:p>
+                  </a:txBody>
+                  <a:tcPr marL="57785" marR="57785" marT="57785" marB="57785" anchor="t">
+                    <a:lnL w="12700" cap="flat" cmpd="sng" algn="ctr">
+                      <a:solidFill>
+                        <a:srgbClr val="CBCBCB"/>
+                      </a:solidFill>
+                      <a:prstDash val="solid"/>
+                      <a:round/>
+                      <a:headEnd type="none" w="med" len="med"/>
+                      <a:tailEnd type="none" w="med" len="med"/>
+                    </a:lnL>
+                    <a:lnR w="12700" cap="flat" cmpd="sng" algn="ctr">
+                      <a:solidFill>
+                        <a:srgbClr val="C2C2C2"/>
+                      </a:solidFill>
+                      <a:prstDash val="solid"/>
+                      <a:round/>
+                      <a:headEnd type="none" w="med" len="med"/>
+                      <a:tailEnd type="none" w="med" len="med"/>
+                    </a:lnR>
+                    <a:lnT w="12700" cap="flat" cmpd="sng" algn="ctr">
+                      <a:solidFill>
+                        <a:srgbClr val="C2C2C2"/>
+                      </a:solidFill>
+                      <a:prstDash val="solid"/>
+                      <a:round/>
+                      <a:headEnd type="none" w="med" len="med"/>
+                      <a:tailEnd type="none" w="med" len="med"/>
+                    </a:lnT>
+                    <a:lnB w="12700" cap="flat" cmpd="sng" algn="ctr">
+                      <a:solidFill>
+                        <a:srgbClr val="C2C2C2"/>
+                      </a:solidFill>
+                      <a:prstDash val="solid"/>
+                      <a:round/>
+                      <a:headEnd type="none" w="med" len="med"/>
+                      <a:tailEnd type="none" w="med" len="med"/>
+                    </a:lnB>
+                    <a:solidFill>
+                      <a:srgbClr val="F3F3F3"/>
+                    </a:solidFill>
+                  </a:tcPr>
+                </a:tc>
+                <a:tc>
+                  <a:txBody>
+                    <a:bodyPr/>
+                    <a:lstStyle/>
+                    <a:p>
+                      <a:pPr indent="0" marL="0">
+                        <a:lnSpc>
+                          <a:spcPts val="1820"/>
+                        </a:lnSpc>
+                        <a:buNone/>
+                      </a:pPr>
+                      <a:r>
+                        <a:rPr lang="en-US" sz="1300" dirty="0">
+                          <a:solidFill>
+                            <a:srgbClr val="000000"/>
+                          </a:solidFill>
+                          <a:latin typeface="Arial" pitchFamily="34" charset="0"/>
+                          <a:ea typeface="Arial" pitchFamily="34" charset="-122"/>
+                          <a:cs typeface="Arial" pitchFamily="34" charset="-120"/>
+                        </a:rPr>
+                        <a:t>多因子驗證（MFA）</a:t>
+                      </a:r>
+                      <a:endParaRPr lang="en-US" sz="1300" dirty="0">
+                        <a:latin typeface="Arial" charset="0"/>
+                        <a:ea typeface="Arial" charset="0"/>
+                        <a:cs typeface="Arial" charset="0"/>
+                      </a:endParaRPr>
+                    </a:p>
+                  </a:txBody>
+                  <a:tcPr marL="57785" marR="57785" marT="57785" marB="57785" anchor="t">
+                    <a:lnL w="12700" cap="flat" cmpd="sng" algn="ctr">
+                      <a:solidFill>
+                        <a:srgbClr val="C2C2C2"/>
+                      </a:solidFill>
+                      <a:prstDash val="solid"/>
+                      <a:round/>
+                      <a:headEnd type="none" w="med" len="med"/>
+                      <a:tailEnd type="none" w="med" len="med"/>
+                    </a:lnL>
+                    <a:lnR w="12700" cap="flat" cmpd="sng" algn="ctr">
+                      <a:solidFill>
+                        <a:srgbClr val="C2C2C2"/>
+                      </a:solidFill>
+                      <a:prstDash val="solid"/>
+                      <a:round/>
+                      <a:headEnd type="none" w="med" len="med"/>
+                      <a:tailEnd type="none" w="med" len="med"/>
+                    </a:lnR>
+                    <a:lnT w="12700" cap="flat" cmpd="sng" algn="ctr">
+                      <a:solidFill>
+                        <a:srgbClr val="C2C2C2"/>
+                      </a:solidFill>
+                      <a:prstDash val="solid"/>
+                      <a:round/>
+                      <a:headEnd type="none" w="med" len="med"/>
+                      <a:tailEnd type="none" w="med" len="med"/>
+                    </a:lnT>
+                    <a:lnB w="12700" cap="flat" cmpd="sng" algn="ctr">
+                      <a:solidFill>
+                        <a:srgbClr val="C2C2C2"/>
+                      </a:solidFill>
+                      <a:prstDash val="solid"/>
+                      <a:round/>
+                      <a:headEnd type="none" w="med" len="med"/>
+                      <a:tailEnd type="none" w="med" len="med"/>
+                    </a:lnB>
+                    <a:solidFill>
+                      <a:srgbClr val="F3F3F3"/>
+                    </a:solidFill>
+                  </a:tcPr>
+                </a:tc>
+                <a:tc>
+                  <a:txBody>
+                    <a:bodyPr/>
+                    <a:lstStyle/>
+                    <a:p>
+                      <a:pPr indent="0" marL="0">
+                        <a:lnSpc>
+                          <a:spcPts val="1820"/>
+                        </a:lnSpc>
+                        <a:buNone/>
+                      </a:pPr>
+                      <a:r>
+                        <a:rPr lang="en-US" sz="1300" dirty="0">
+                          <a:solidFill>
+                            <a:srgbClr val="000000"/>
+                          </a:solidFill>
+                          <a:latin typeface="Arial" pitchFamily="34" charset="0"/>
+                          <a:ea typeface="Arial" pitchFamily="34" charset="-122"/>
+                          <a:cs typeface="Arial" pitchFamily="34" charset="-120"/>
+                        </a:rPr>
+                        <a:t>登入時多一道驗證，安全性更高</a:t>
+                      </a:r>
+                      <a:endParaRPr lang="en-US" sz="1300" dirty="0">
+                        <a:latin typeface="Arial" charset="0"/>
+                        <a:ea typeface="Arial" charset="0"/>
+                        <a:cs typeface="Arial" charset="0"/>
+                      </a:endParaRPr>
+                    </a:p>
+                  </a:txBody>
+                  <a:tcPr marL="57785" marR="57785" marT="57785" marB="57785" anchor="t">
+                    <a:lnL w="12700" cap="flat" cmpd="sng" algn="ctr">
+                      <a:solidFill>
+                        <a:srgbClr val="C2C2C2"/>
+                      </a:solidFill>
+                      <a:prstDash val="solid"/>
+                      <a:round/>
+                      <a:headEnd type="none" w="med" len="med"/>
+                      <a:tailEnd type="none" w="med" len="med"/>
+                    </a:lnL>
+                    <a:lnR w="12700" cap="flat" cmpd="sng" algn="ctr">
+                      <a:solidFill>
+                        <a:srgbClr val="C2C2C2"/>
+                      </a:solidFill>
+                      <a:prstDash val="solid"/>
+                      <a:round/>
+                      <a:headEnd type="none" w="med" len="med"/>
+                      <a:tailEnd type="none" w="med" len="med"/>
+                    </a:lnR>
+                    <a:lnT w="12700" cap="flat" cmpd="sng" algn="ctr">
+                      <a:solidFill>
+                        <a:srgbClr val="C2C2C2"/>
+                      </a:solidFill>
+                      <a:prstDash val="solid"/>
+                      <a:round/>
+                      <a:headEnd type="none" w="med" len="med"/>
+                      <a:tailEnd type="none" w="med" len="med"/>
+                    </a:lnT>
+                    <a:lnB w="12700" cap="flat" cmpd="sng" algn="ctr">
+                      <a:solidFill>
+                        <a:srgbClr val="C2C2C2"/>
+                      </a:solidFill>
+                      <a:prstDash val="solid"/>
+                      <a:round/>
+                      <a:headEnd type="none" w="med" len="med"/>
+                      <a:tailEnd type="none" w="med" len="med"/>
+                    </a:lnB>
+                    <a:solidFill>
+                      <a:srgbClr val="F3F3F3"/>
+                    </a:solidFill>
+                  </a:tcPr>
+                </a:tc>
+              </a:tr>
+            </a:tbl>
+          </a:graphicData>
+        </a:graphic>
+      </p:graphicFrame>
+      <p:sp>
+        <p:nvSpPr>
+          <p:cNvPr id="4" name="Text 1"/>
           <p:cNvSpPr/>
           <p:nvPr/>
         </p:nvSpPr>
         <p:spPr>
           <a:xfrm>
-            <a:off x="812800" y="3715990"/>
-            <a:ext cx="7112000" cy="1823690"/>
-          </a:xfrm>
-          <a:prstGeom prst="rect">
-            <a:avLst/>
-          </a:prstGeom>
-          <a:solidFill>
-            <a:srgbClr val="E6FED2"/>
-          </a:solidFill>
-          <a:ln/>
-        </p:spPr>
-      </p:sp>
-      <p:sp>
-        <p:nvSpPr>
-          <p:cNvPr id="5" name="Text 2"/>
-          <p:cNvSpPr/>
-          <p:nvPr/>
-        </p:nvSpPr>
-        <p:spPr>
-          <a:xfrm>
-            <a:off x="1016000" y="3919190"/>
-            <a:ext cx="6906768" cy="299690"/>
+            <a:off x="10058400" y="6441480"/>
+            <a:ext cx="1320800" cy="238720"/>
           </a:xfrm>
           <a:prstGeom prst="rect">
             <a:avLst/>
@@ -3624,208 +6248,14 @@
           </a:bodyPr>
           <a:lstStyle/>
           <a:p>
-            <a:pPr algn="l" indent="0" marL="0">
+            <a:pPr algn="r" indent="0" marL="0">
               <a:lnSpc>
-                <a:spcPts val="2160"/>
+                <a:spcPts val="1680"/>
               </a:lnSpc>
               <a:buNone/>
             </a:pPr>
             <a:r>
-              <a:rPr lang="en-US" sz="1800" b="1" dirty="0">
-                <a:solidFill>
-                  <a:srgbClr val="036B3F"/>
-                </a:solidFill>
-                <a:latin typeface="Arial" pitchFamily="34" charset="0"/>
-                <a:ea typeface="Arial" pitchFamily="34" charset="-122"/>
-                <a:cs typeface="Arial" pitchFamily="34" charset="-120"/>
-              </a:rPr>
-              <a:t>第一階段 MVP 實作（不使用第三方框架）</a:t>
-            </a:r>
-            <a:endParaRPr lang="en-US" sz="1800" dirty="0"/>
-          </a:p>
-        </p:txBody>
-      </p:sp>
-      <p:sp>
-        <p:nvSpPr>
-          <p:cNvPr id="6" name="Text 3"/>
-          <p:cNvSpPr/>
-          <p:nvPr/>
-        </p:nvSpPr>
-        <p:spPr>
-          <a:xfrm>
-            <a:off x="1113282" y="4269680"/>
-            <a:ext cx="6801866" cy="1092200"/>
-          </a:xfrm>
-          <a:prstGeom prst="rect">
-            <a:avLst/>
-          </a:prstGeom>
-          <a:noFill/>
-          <a:ln/>
-        </p:spPr>
-        <p:txBody>
-          <a:bodyPr wrap="square" lIns="0" tIns="0" rIns="0" bIns="0" rtlCol="0" anchor="t">
-            <a:normAutofit/>
-          </a:bodyPr>
-          <a:lstStyle/>
-          <a:p>
-            <a:pPr algn="l" marL="156718" indent="-156718">
-              <a:lnSpc>
-                <a:spcPts val="2100"/>
-              </a:lnSpc>
-              <a:buSzPct val="100000"/>
-              <a:buChar char="•"/>
-            </a:pPr>
-            <a:r>
-              <a:rPr lang="en-US" sz="1400" dirty="0">
-                <a:solidFill>
-                  <a:srgbClr val="000000"/>
-                </a:solidFill>
-                <a:latin typeface="Arial" pitchFamily="34" charset="0"/>
-                <a:ea typeface="Arial" pitchFamily="34" charset="-122"/>
-                <a:cs typeface="Arial" pitchFamily="34" charset="-120"/>
-              </a:rPr>
-              <a:t>Authorization Code＋PKCE（S256），回應帶 iss</a:t>
-            </a:r>
-            <a:endParaRPr lang="en-US" sz="1400" dirty="0"/>
-          </a:p>
-          <a:p>
-            <a:pPr algn="l" marL="156718" indent="-156718">
-              <a:lnSpc>
-                <a:spcPts val="2100"/>
-              </a:lnSpc>
-              <a:buSzPct val="100000"/>
-              <a:buChar char="•"/>
-            </a:pPr>
-            <a:r>
-              <a:rPr lang="en-US" sz="1400" dirty="0">
-                <a:solidFill>
-                  <a:srgbClr val="000000"/>
-                </a:solidFill>
-                <a:latin typeface="Arial" pitchFamily="34" charset="0"/>
-                <a:ea typeface="Arial" pitchFamily="34" charset="-122"/>
-                <a:cs typeface="Arial" pitchFamily="34" charset="-120"/>
-              </a:rPr>
-              <a:t>標準端點：中繼資料、/authorize、/token、JWKS、撤銷</a:t>
-            </a:r>
-            <a:endParaRPr lang="en-US" sz="1400" dirty="0"/>
-          </a:p>
-          <a:p>
-            <a:pPr algn="l" marL="156718" indent="-156718">
-              <a:lnSpc>
-                <a:spcPts val="2100"/>
-              </a:lnSpc>
-              <a:buSzPct val="100000"/>
-              <a:buChar char="•"/>
-            </a:pPr>
-            <a:r>
-              <a:rPr lang="en-US" sz="1400" dirty="0">
-                <a:solidFill>
-                  <a:srgbClr val="000000"/>
-                </a:solidFill>
-                <a:latin typeface="Arial" pitchFamily="34" charset="0"/>
-                <a:ea typeface="Arial" pitchFamily="34" charset="-122"/>
-                <a:cs typeface="Arial" pitchFamily="34" charset="-120"/>
-              </a:rPr>
-              <a:t>JWT Access Token（短效）＋ Refresh Token 輪替</a:t>
-            </a:r>
-            <a:endParaRPr lang="en-US" sz="1400" dirty="0"/>
-          </a:p>
-          <a:p>
-            <a:pPr algn="l" marL="156718" indent="-156718">
-              <a:lnSpc>
-                <a:spcPts val="2100"/>
-              </a:lnSpc>
-              <a:buSzPct val="100000"/>
-              <a:buChar char="•"/>
-            </a:pPr>
-            <a:r>
-              <a:rPr lang="en-US" sz="1400" dirty="0">
-                <a:solidFill>
-                  <a:srgbClr val="000000"/>
-                </a:solidFill>
-                <a:latin typeface="Arial" pitchFamily="34" charset="0"/>
-                <a:ea typeface="Arial" pitchFamily="34" charset="-122"/>
-                <a:cs typeface="Arial" pitchFamily="34" charset="-120"/>
-              </a:rPr>
-              <a:t>Client 註冊：</a:t>
-            </a:r>
-            <a:r>
-              <a:rPr lang="en-US" sz="1400" b="1" dirty="0">
-                <a:solidFill>
-                  <a:srgbClr val="000000"/>
-                </a:solidFill>
-                <a:latin typeface="Arial" pitchFamily="34" charset="0"/>
-                <a:ea typeface="Arial" pitchFamily="34" charset="-122"/>
-                <a:cs typeface="Arial" pitchFamily="34" charset="-120"/>
-              </a:rPr>
-              <a:t>CIMD 為主</a:t>
-            </a:r>
-            <a:r>
-              <a:rPr lang="en-US" sz="1400" dirty="0">
-                <a:solidFill>
-                  <a:srgbClr val="000000"/>
-                </a:solidFill>
-                <a:latin typeface="Arial" pitchFamily="34" charset="0"/>
-                <a:ea typeface="Arial" pitchFamily="34" charset="-122"/>
-                <a:cs typeface="Arial" pitchFamily="34" charset="-120"/>
-              </a:rPr>
-              <a:t>、預先註冊為輔</a:t>
-            </a:r>
-            <a:endParaRPr lang="en-US" sz="1400" dirty="0"/>
-          </a:p>
-        </p:txBody>
-      </p:sp>
-      <p:sp>
-        <p:nvSpPr>
-          <p:cNvPr id="7" name="Shape 4"/>
-          <p:cNvSpPr/>
-          <p:nvPr/>
-        </p:nvSpPr>
-        <p:spPr>
-          <a:xfrm>
-            <a:off x="8077200" y="3715990"/>
-            <a:ext cx="3302000" cy="1823690"/>
-          </a:xfrm>
-          <a:prstGeom prst="rect">
-            <a:avLst/>
-          </a:prstGeom>
-          <a:solidFill>
-            <a:srgbClr val="F3F3F3"/>
-          </a:solidFill>
-          <a:ln/>
-        </p:spPr>
-      </p:sp>
-      <p:sp>
-        <p:nvSpPr>
-          <p:cNvPr id="8" name="Text 5"/>
-          <p:cNvSpPr/>
-          <p:nvPr/>
-        </p:nvSpPr>
-        <p:spPr>
-          <a:xfrm>
-            <a:off x="8280400" y="3919190"/>
-            <a:ext cx="2982468" cy="299690"/>
-          </a:xfrm>
-          <a:prstGeom prst="rect">
-            <a:avLst/>
-          </a:prstGeom>
-          <a:noFill/>
-          <a:ln/>
-        </p:spPr>
-        <p:txBody>
-          <a:bodyPr wrap="square" lIns="0" tIns="0" rIns="0" bIns="0" rtlCol="0" anchor="t">
-            <a:normAutofit/>
-          </a:bodyPr>
-          <a:lstStyle/>
-          <a:p>
-            <a:pPr algn="l" indent="0" marL="0">
-              <a:lnSpc>
-                <a:spcPts val="2160"/>
-              </a:lnSpc>
-              <a:buNone/>
-            </a:pPr>
-            <a:r>
-              <a:rPr lang="en-US" sz="1800" b="1" dirty="0">
+              <a:rPr lang="en-US" sz="1200" dirty="0">
                 <a:solidFill>
                   <a:srgbClr val="7F7F7F"/>
                 </a:solidFill>
@@ -3833,138 +6263,7 @@
                 <a:ea typeface="Arial" pitchFamily="34" charset="-122"/>
                 <a:cs typeface="Arial" pitchFamily="34" charset="-120"/>
               </a:rPr>
-              <a:t>後續階段</a:t>
-            </a:r>
-            <a:endParaRPr lang="en-US" sz="1800" dirty="0"/>
-          </a:p>
-        </p:txBody>
-      </p:sp>
-      <p:sp>
-        <p:nvSpPr>
-          <p:cNvPr id="9" name="Text 6"/>
-          <p:cNvSpPr/>
-          <p:nvPr/>
-        </p:nvSpPr>
-        <p:spPr>
-          <a:xfrm>
-            <a:off x="8377682" y="4269680"/>
-            <a:ext cx="2877566" cy="825500"/>
-          </a:xfrm>
-          <a:prstGeom prst="rect">
-            <a:avLst/>
-          </a:prstGeom>
-          <a:noFill/>
-          <a:ln/>
-        </p:spPr>
-        <p:txBody>
-          <a:bodyPr wrap="square" lIns="0" tIns="0" rIns="0" bIns="0" rtlCol="0" anchor="t">
-            <a:normAutofit/>
-          </a:bodyPr>
-          <a:lstStyle/>
-          <a:p>
-            <a:pPr algn="l" marL="156718" indent="-156718">
-              <a:lnSpc>
-                <a:spcPts val="2100"/>
-              </a:lnSpc>
-              <a:buSzPct val="100000"/>
-              <a:buChar char="•"/>
-            </a:pPr>
-            <a:r>
-              <a:rPr lang="en-US" sz="1400" dirty="0">
-                <a:solidFill>
-                  <a:srgbClr val="000000"/>
-                </a:solidFill>
-                <a:latin typeface="Arial" pitchFamily="34" charset="0"/>
-                <a:ea typeface="Arial" pitchFamily="34" charset="-122"/>
-                <a:cs typeface="Arial" pitchFamily="34" charset="-120"/>
-              </a:rPr>
-              <a:t>DCR（新規範已棄用）</a:t>
-            </a:r>
-            <a:endParaRPr lang="en-US" sz="1400" dirty="0"/>
-          </a:p>
-          <a:p>
-            <a:pPr algn="l" marL="156718" indent="-156718">
-              <a:lnSpc>
-                <a:spcPts val="2100"/>
-              </a:lnSpc>
-              <a:buSzPct val="100000"/>
-              <a:buChar char="•"/>
-            </a:pPr>
-            <a:r>
-              <a:rPr lang="en-US" sz="1400" dirty="0">
-                <a:solidFill>
-                  <a:srgbClr val="000000"/>
-                </a:solidFill>
-                <a:latin typeface="Arial" pitchFamily="34" charset="0"/>
-                <a:ea typeface="Arial" pitchFamily="34" charset="-122"/>
-                <a:cs typeface="Arial" pitchFamily="34" charset="-120"/>
-              </a:rPr>
-              <a:t>多因子驗證（MFA）</a:t>
-            </a:r>
-            <a:endParaRPr lang="en-US" sz="1400" dirty="0"/>
-          </a:p>
-          <a:p>
-            <a:pPr algn="l" marL="156718" indent="-156718">
-              <a:lnSpc>
-                <a:spcPts val="2100"/>
-              </a:lnSpc>
-              <a:buSzPct val="100000"/>
-              <a:buChar char="•"/>
-            </a:pPr>
-            <a:r>
-              <a:rPr lang="en-US" sz="1400" dirty="0">
-                <a:solidFill>
-                  <a:srgbClr val="000000"/>
-                </a:solidFill>
-                <a:latin typeface="Arial" pitchFamily="34" charset="0"/>
-                <a:ea typeface="Arial" pitchFamily="34" charset="-122"/>
-                <a:cs typeface="Arial" pitchFamily="34" charset="-120"/>
-              </a:rPr>
-              <a:t>SSO、管理後台</a:t>
-            </a:r>
-            <a:endParaRPr lang="en-US" sz="1400" dirty="0"/>
-          </a:p>
-        </p:txBody>
-      </p:sp>
-      <p:sp>
-        <p:nvSpPr>
-          <p:cNvPr id="10" name="Text 7"/>
-          <p:cNvSpPr/>
-          <p:nvPr/>
-        </p:nvSpPr>
-        <p:spPr>
-          <a:xfrm>
-            <a:off x="8763000" y="6238280"/>
-            <a:ext cx="2616200" cy="238720"/>
-          </a:xfrm>
-          <a:prstGeom prst="rect">
-            <a:avLst/>
-          </a:prstGeom>
-          <a:noFill/>
-          <a:ln/>
-        </p:spPr>
-        <p:txBody>
-          <a:bodyPr wrap="square" lIns="0" tIns="0" rIns="0" bIns="0" rtlCol="0" anchor="t">
-            <a:normAutofit/>
-          </a:bodyPr>
-          <a:lstStyle/>
-          <a:p>
-            <a:pPr algn="r" indent="0" marL="0">
-              <a:lnSpc>
-                <a:spcPts val="1680"/>
-              </a:lnSpc>
-              <a:buNone/>
-            </a:pPr>
-            <a:r>
-              <a:rPr lang="en-US" sz="1200" b="1" dirty="0">
-                <a:solidFill>
-                  <a:srgbClr val="036B3F"/>
-                </a:solidFill>
-                <a:latin typeface="Arial" pitchFamily="34" charset="0"/>
-                <a:ea typeface="Arial" pitchFamily="34" charset="-122"/>
-                <a:cs typeface="Arial" pitchFamily="34" charset="-120"/>
-              </a:rPr>
-              <a:t>DataEco</a:t>
+              <a:t>4 / 4</a:t>
             </a:r>
             <a:endParaRPr lang="en-US" sz="1200" dirty="0"/>
           </a:p>
@@ -3995,10 +6294,10 @@
         <a:srgbClr val="E6F0EC"/>
       </a:lt2>
       <a:accent1>
-        <a:srgbClr val="E6FED2"/>
+        <a:srgbClr val="01A964"/>
       </a:accent1>
       <a:accent2>
-        <a:srgbClr val="F3FC77"/>
+        <a:srgbClr val="E6FED2"/>
       </a:accent2>
       <a:accent3>
         <a:srgbClr val="7F7F7F"/>

--- a/MCP 身分驗證標準化：導入 OAuth 2.1.pptx
+++ b/MCP 身分驗證標準化：導入 OAuth 2.1.pptx
@@ -9,9 +9,10 @@
     <p:sldId id="257" r:id="rId3"/>
     <p:sldId id="258" r:id="rId4"/>
     <p:sldId id="259" r:id="rId5"/>
+    <p:sldId id="260" r:id="rId6"/>
   </p:sldIdLst>
   <p:notesMasterIdLst>
-    <p:notesMasterId r:id="rId6"/>
+    <p:notesMasterId r:id="rId7"/>
   </p:notesMasterIdLst>
   <p:sldSz cx="12192000" cy="6858000"/>
   <p:notesSz cx="6858000" cy="12192000"/>
@@ -593,7 +594,7 @@
           <a:p>
             <a:r>
               <a:rPr lang="en-US" dirty="0"/>
-              <a:t>用一句話說：OAuth Server 像大樓的櫃台，負責核對身分、發通行證；MCP Server 像各樓層的門禁，只認通行證、不碰密碼。流程：① 員工先在 AI 工具裡新增 MCP 連線（只需設定一次）。② AI 工具把員工帶到 OAuth Server 的登入頁，員工在這裡輸入統編、帳號、密碼；OAuth Server 會到資訊雲的 GMB 資料庫比對。這是唯一需要輸入密碼的地方。③ 確認身分後，OAuth Server 發一張通行證給 AI 工具，設定完成。④ 之後員工請 AI 查資料時，AI 工具就帶著通行證去找 MCP Server；通行證到期會自動續期，不必每次重新登入。⑤ MCP Server 先檢查通行證是不是 OAuth Server 發的、有沒有過期。確認沒問題後，MCP Server 才會讀取自己的業務資料庫，或呼叫資訊雲的上游服務 API（GMB、中台、API Bank）取得資料。架構上，MCP Server 和 OAuth Server 都在公有雲執行，方便 AI 工具連線；上游服務與資料庫則留在資訊雲，屬於混合雲架構，資料本身不搬上公有雲。</a:t>
+              <a:t>方案 A：Apigee X Platform 部署在公有雲，是對外唯一的入口，類似大樓的大門；API 服務在資訊雲；OAuth Server、GMB 資料庫與 API Bank 資料庫都在地端（On-Premises），不上雲。流程：① 員工先在 AI 工具裡新增 MCP 連線，只需設定一次。② 登入請求經過 Apigee 轉送到地端的 OAuth Server，員工在登入頁輸入統編、帳號、密碼，OAuth Server 到 GMB 資料庫比對，並記錄 Token 資訊。③ 確認身分後，OAuth Server 經由 Apigee 發通行證給 AI 工具。④ 之後員工請 AI 查資料時，AI 工具帶著通行證找 Apigee。⑤ Apigee 先驗證通行證，通過後才呼叫資訊雲的 API Bank API，再由 API 服務讀取地端的 API Bank 資料庫。優點：帳號密碼與 Token 相關資料完全留在地端，OAuth Server 與 GMB 資料庫同在一處，登入比對不需跨網路；公有雲只負責對外入口。需要注意：登入流程要經 Apigee 往返地端，需規劃公有雲到地端的安全連線與穩定性。</a:t>
             </a:r>
             <a:endParaRPr lang="en-US" dirty="0"/>
           </a:p>
@@ -681,7 +682,7 @@
           <a:p>
             <a:r>
               <a:rPr lang="en-US" dirty="0"/>
-              <a:t>這是 OAuth 最經典的 Authorization Code Flow，加上 PKCE，也是本階段唯一實作的授權流程。① Client 先產生隨機的 code_verifier，並算出它的雜湊 code_challenge。②③ 把使用者的瀏覽器導向 OAuth Server 的 /authorize，帶上 code_challenge、防偽用的 state，以及目標 MCP Server 網址 resource。④ 重點：統編、帳號、密碼只在 OAuth Server 的登入頁輸入，Client 與 MCP Server 都看不到。⑤⑥ OAuth Server 驗證成功後，以一次性的授權碼導回 Client 的 redirect_uri，並附上 iss 讓 Client 確認是哪個 OAuth Server 發的。⑦ Client 用授權碼加原始的 code_verifier 換 Token；OAuth Server 比對雜湊，確保換 Token 的跟發起登入的是同一個 Client，授權碼被攔截也無法使用。⑧ OAuth Server 回傳短效的 JWT Access Token 與 Refresh Token。⑨⑩ Client 帶 Token 呼叫 MCP Server，MCP Server 以 OAuth Server 公布的 JWKS 公鑰驗證簽章、受眾 aud 與到期時間，不需每次回呼 OAuth Server。</a:t>
+              <a:t>方案 B：Apigee X Platform 與 OAuth Server 都部署在公有雲，對外一律經過 Apigee；API 服務在資訊雲，GMB 資料庫與 API Bank 資料庫都在地端（On-Premises）。流程：① 員工先在 AI 工具裡新增 MCP 連線，只需設定一次。② 登入請求經過 Apigee 轉送到公有雲的 OAuth Server，員工在登入頁輸入統編、帳號、密碼，OAuth Server 再連回地端的 GMB 資料庫比對，並記錄 Token 資訊。③ 確認身分後，OAuth Server 經由 Apigee 發通行證給 AI 工具。④ 之後員工請 AI 查資料時，AI 工具帶著通行證找 Apigee。⑤ Apigee 先驗證通行證，通過後才呼叫資訊雲的 API Bank API，再由 API 服務讀取地端的 API Bank 資料庫。優點：OAuth Server 與 Apigee 同在公有雲，登入與發證反應快，擴充彈性高。需要注意：OAuth Server 每次登入都要跨網路連回地端的 GMB 資料庫比對帳密，這條連線的安全與穩定性需特別規劃；密碼比對的運算發生在公有雲。</a:t>
             </a:r>
             <a:endParaRPr lang="en-US" dirty="0"/>
           </a:p>
@@ -769,7 +770,7 @@
           <a:p>
             <a:r>
               <a:rPr lang="en-US" dirty="0"/>
-              <a:t>本階段全部自行實作，不使用第三方框架或服務，方便日後接手維護。本階段六項：登入頁；標準授權流程，採 Authorization Code Flow 加 PKCE，並在回應帶 iss 參數；短效的 JWT Access Token；Refresh Token 自動續期，每次換新都輪替；Client 註冊；Metadata 與 JWKS 端點，也就是 OAuth Server 的 Authorization Server Metadata（RFC 8414）與驗證用公鑰。Client 註冊依 MCP 規範 2026-07-28 版：Claude 與 ChatGPT 使用 Client ID Metadata Documents（CIMD），用自己的網址當身分，不需事先登記；Gemini 目前保守起見採預先註冊，由管理員發給 Client ID。動態註冊（DCR）在新規範已標為棄用，不實作。Token 撤銷放在後續階段：包含 /revoke 端點（自家 Web、APP 登出時呼叫），以及帳號停用或異常時由 OAuth Server 作廢該使用者所有 Refresh Token。本階段先以短效的 Access Token 控制風險。</a:t>
+              <a:t>這是 OAuth 最經典的 Authorization Code Flow，加上 PKCE，也是本階段唯一實作的授權流程。① Client 先產生隨機的 code_verifier，並算出它的雜湊 code_challenge。②③ 把使用者的瀏覽器導向 OAuth Server 的 /authorize，帶上 code_challenge、防偽用的 state，以及目標 MCP Server 網址 resource。④ 重點：統編、帳號、密碼只在 OAuth Server 的登入頁輸入，Client 與 MCP Server 都看不到。⑤⑥ OAuth Server 驗證成功後，以一次性的授權碼導回 Client 的 redirect_uri，並附上 iss 讓 Client 確認是哪個 OAuth Server 發的。⑦ Client 用授權碼加原始的 code_verifier 換 Token；OAuth Server 比對雜湊，確保換 Token 的跟發起登入的是同一個 Client，授權碼被攔截也無法使用。⑧ OAuth Server 回傳短效的 JWT Access Token 與 Refresh Token。⑨⑩ Client 帶 Token 呼叫 MCP Server，MCP Server 以 OAuth Server 公布的 JWKS 公鑰驗證簽章、受眾 aud 與到期時間，不需每次回呼 OAuth Server。</a:t>
             </a:r>
             <a:endParaRPr lang="en-US" dirty="0"/>
           </a:p>
@@ -793,6 +794,94 @@
             <a:fld id="{F7021451-1387-4CA6-816F-3879F97B5CBC}" type="slidenum">
               <a:rPr lang="en-US"/>
               <a:t>4</a:t>
+            </a:fld>
+            <a:endParaRPr lang="en-US"/>
+          </a:p>
+        </p:txBody>
+      </p:sp>
+    </p:spTree>
+    <p:extLst>
+      <p:ext uri="{BB962C8B-B14F-4D97-AF65-F5344CB8AC3E}">
+        <p14:creationId xmlns:p14="http://schemas.microsoft.com/office/powerpoint/2010/main" val="1024086991"/>
+      </p:ext>
+    </p:extLst>
+  </p:cSld>
+  <p:clrMapOvr>
+    <a:masterClrMapping/>
+  </p:clrMapOvr>
+</p:notes>
+</file>
+
+<file path=ppt/notesSlides/notesSlide5.xml><?xml version="1.0" encoding="utf-8"?>
+<p:notes xmlns:a="http://schemas.openxmlformats.org/drawingml/2006/main" xmlns:r="http://schemas.openxmlformats.org/officeDocument/2006/relationships" xmlns:p="http://schemas.openxmlformats.org/presentationml/2006/main">
+  <p:cSld>
+    <p:spTree>
+      <p:nvGrpSpPr>
+        <p:cNvPr id="1" name=""/>
+        <p:cNvGrpSpPr/>
+        <p:nvPr/>
+      </p:nvGrpSpPr>
+      <p:grpSpPr>
+        <a:xfrm>
+          <a:off x="0" y="0"/>
+          <a:ext cx="0" cy="0"/>
+          <a:chOff x="0" y="0"/>
+          <a:chExt cx="0" cy="0"/>
+        </a:xfrm>
+      </p:grpSpPr>
+      <p:sp>
+        <p:nvSpPr>
+          <p:cNvPr id="2" name="Slide Image Placeholder 1"/>
+          <p:cNvSpPr>
+            <a:spLocks noGrp="1" noRot="1" noChangeAspect="1"/>
+          </p:cNvSpPr>
+          <p:nvPr>
+            <p:ph type="sldImg"/>
+          </p:nvPr>
+        </p:nvSpPr>
+        <p:spPr/>
+      </p:sp>
+      <p:sp>
+        <p:nvSpPr>
+          <p:cNvPr id="3" name="Notes Placeholder 2"/>
+          <p:cNvSpPr>
+            <a:spLocks noGrp="1"/>
+          </p:cNvSpPr>
+          <p:nvPr>
+            <p:ph type="body" idx="1"/>
+          </p:nvPr>
+        </p:nvSpPr>
+        <p:spPr/>
+        <p:txBody>
+          <a:bodyPr/>
+          <a:lstStyle/>
+          <a:p>
+            <a:r>
+              <a:rPr lang="en-US" dirty="0"/>
+              <a:t>本階段全部自行實作，不使用第三方框架或服務，方便日後接手維護。本階段六項：登入頁；標準授權流程，採 Authorization Code Flow 加 PKCE，並在回應帶 iss 參數；短效的 JWT Access Token；Refresh Token 自動續期，每次換新都輪替；Client 註冊；Metadata 與 JWKS 端點，也就是 OAuth Server 的 Authorization Server Metadata（RFC 8414）與驗證用公鑰。Client 註冊依 MCP 規範 2026-07-28 版：Claude 與 ChatGPT 使用 Client ID Metadata Documents（CIMD），用自己的網址當身分，不需事先登記；Gemini 目前保守起見採預先註冊，由管理員發給 Client ID。動態註冊（DCR）在新規範已標為棄用，不實作。Token 撤銷放在後續階段：包含 /revoke 端點（自家 Web、APP 登出時呼叫），以及帳號停用或異常時由 OAuth Server 作廢該使用者所有 Refresh Token。本階段先以短效的 Access Token 控制風險。</a:t>
+            </a:r>
+            <a:endParaRPr lang="en-US" dirty="0"/>
+          </a:p>
+        </p:txBody>
+      </p:sp>
+      <p:sp>
+        <p:nvSpPr>
+          <p:cNvPr id="4" name="Slide Number Placeholder 3"/>
+          <p:cNvSpPr>
+            <a:spLocks noGrp="1"/>
+          </p:cNvSpPr>
+          <p:nvPr>
+            <p:ph type="sldNum" sz="quarter" idx="10"/>
+          </p:nvPr>
+        </p:nvSpPr>
+        <p:spPr/>
+        <p:txBody>
+          <a:bodyPr/>
+          <a:lstStyle/>
+          <a:p>
+            <a:fld id="{F7021451-1387-4CA6-816F-3879F97B5CBC}" type="slidenum">
+              <a:rPr lang="en-US"/>
+              <a:t>5</a:t>
             </a:fld>
             <a:endParaRPr lang="en-US"/>
           </a:p>
@@ -1958,7 +2047,7 @@
                 <a:ea typeface="Arial" pitchFamily="34" charset="-122"/>
                 <a:cs typeface="Arial" pitchFamily="34" charset="-120"/>
               </a:rPr>
-              <a:t>1 / 4</a:t>
+              <a:t>1 / 5</a:t>
             </a:r>
             <a:endParaRPr lang="en-US" sz="1200" dirty="0"/>
           </a:p>
@@ -2034,7 +2123,7 @@
                 <a:ea typeface="Arial" pitchFamily="34" charset="-122"/>
                 <a:cs typeface="Arial" pitchFamily="34" charset="-120"/>
               </a:rPr>
-              <a:t>2 / 4</a:t>
+              <a:t>2 / 5</a:t>
             </a:r>
             <a:endParaRPr lang="en-US" sz="1200" dirty="0"/>
           </a:p>
@@ -2080,7 +2169,7 @@
                 <a:ea typeface="Arial" pitchFamily="34" charset="-122"/>
                 <a:cs typeface="Arial" pitchFamily="34" charset="-120"/>
               </a:rPr>
-              <a:t>AI 工具如何安全地取得企業資料</a:t>
+              <a:t>方案 A：OAuth Server 不上雲</a:t>
             </a:r>
             <a:endParaRPr lang="en-US" sz="3476" dirty="0"/>
           </a:p>
@@ -2124,7 +2213,7 @@
                 <a:ea typeface="Arial" pitchFamily="34" charset="-122"/>
                 <a:cs typeface="Arial" pitchFamily="34" charset="-120"/>
               </a:rPr>
-              <a:t>混合雲架構：MCP Server 與 OAuth Server 在公有雲執行，上游服務與資料庫留在資訊雲</a:t>
+              <a:t>對外一律經過公有雲的 Apigee X；API 服務在資訊雲，OAuth Server 與資料庫都在地端</a:t>
             </a:r>
             <a:endParaRPr lang="en-US" sz="1339" dirty="0"/>
           </a:p>
@@ -2138,8 +2227,8 @@
         </p:nvSpPr>
         <p:spPr>
           <a:xfrm>
-            <a:off x="4749800" y="1397000"/>
-            <a:ext cx="3429000" cy="4445000"/>
+            <a:off x="3860800" y="1397000"/>
+            <a:ext cx="2413000" cy="4445000"/>
           </a:xfrm>
           <a:prstGeom prst="rect">
             <a:avLst/>
@@ -2158,8 +2247,28 @@
         </p:nvSpPr>
         <p:spPr>
           <a:xfrm>
-            <a:off x="8559800" y="1397000"/>
-            <a:ext cx="2819400" cy="4445000"/>
+            <a:off x="6400800" y="1397000"/>
+            <a:ext cx="4978400" cy="1460500"/>
+          </a:xfrm>
+          <a:prstGeom prst="rect">
+            <a:avLst/>
+          </a:prstGeom>
+          <a:solidFill>
+            <a:srgbClr val="E8F0F7"/>
+          </a:solidFill>
+          <a:ln/>
+        </p:spPr>
+      </p:sp>
+      <p:sp>
+        <p:nvSpPr>
+          <p:cNvPr id="7" name="Shape 5"/>
+          <p:cNvSpPr/>
+          <p:nvPr/>
+        </p:nvSpPr>
+        <p:spPr>
+          <a:xfrm>
+            <a:off x="6400800" y="2921000"/>
+            <a:ext cx="4978400" cy="2921000"/>
           </a:xfrm>
           <a:prstGeom prst="rect">
             <a:avLst/>
@@ -2172,14 +2281,14 @@
       </p:sp>
       <p:sp>
         <p:nvSpPr>
-          <p:cNvPr id="7" name="Shape 5"/>
-          <p:cNvSpPr/>
-          <p:nvPr/>
-        </p:nvSpPr>
-        <p:spPr>
-          <a:xfrm>
-            <a:off x="819150" y="1657350"/>
-            <a:ext cx="2146300" cy="1066800"/>
+          <p:cNvPr id="8" name="Shape 6"/>
+          <p:cNvSpPr/>
+          <p:nvPr/>
+        </p:nvSpPr>
+        <p:spPr>
+          <a:xfrm>
+            <a:off x="819150" y="1530350"/>
+            <a:ext cx="1892300" cy="1257300"/>
           </a:xfrm>
           <a:prstGeom prst="rect">
             <a:avLst/>
@@ -2197,7 +2306,7 @@
       </p:sp>
       <p:pic>
         <p:nvPicPr>
-          <p:cNvPr id="8" name="Image 0" descr="Chat">    </p:cNvPr>
+          <p:cNvPr id="9" name="Image 0" descr="Chat">    </p:cNvPr>
           <p:cNvPicPr>
             <a:picLocks noChangeAspect="1"/>
           </p:cNvPicPr>
@@ -2210,7 +2319,7 @@
         </p:blipFill>
         <p:spPr>
           <a:xfrm>
-            <a:off x="1752600" y="1781820"/>
+            <a:off x="1625600" y="1643410"/>
             <a:ext cx="279400" cy="279400"/>
           </a:xfrm>
           <a:prstGeom prst="rect">
@@ -2220,13 +2329,13 @@
       </p:pic>
       <p:sp>
         <p:nvSpPr>
-          <p:cNvPr id="9" name="Text 6"/>
-          <p:cNvSpPr/>
-          <p:nvPr/>
-        </p:nvSpPr>
-        <p:spPr>
-          <a:xfrm>
-            <a:off x="1539820" y="2099320"/>
+          <p:cNvPr id="10" name="Text 7"/>
+          <p:cNvSpPr/>
+          <p:nvPr/>
+        </p:nvSpPr>
+        <p:spPr>
+          <a:xfrm>
+            <a:off x="1412820" y="1960910"/>
             <a:ext cx="704910" cy="274290"/>
           </a:xfrm>
           <a:prstGeom prst="rect">
@@ -2264,14 +2373,14 @@
       </p:sp>
       <p:sp>
         <p:nvSpPr>
-          <p:cNvPr id="10" name="Text 7"/>
-          <p:cNvSpPr/>
-          <p:nvPr/>
-        </p:nvSpPr>
-        <p:spPr>
-          <a:xfrm>
-            <a:off x="876300" y="2386310"/>
-            <a:ext cx="2032000" cy="238720"/>
+          <p:cNvPr id="11" name="Text 8"/>
+          <p:cNvSpPr/>
+          <p:nvPr/>
+        </p:nvSpPr>
+        <p:spPr>
+          <a:xfrm>
+            <a:off x="875792" y="2247900"/>
+            <a:ext cx="1779016" cy="452041"/>
           </a:xfrm>
           <a:prstGeom prst="rect">
             <a:avLst/>
@@ -2308,14 +2417,14 @@
       </p:sp>
       <p:sp>
         <p:nvSpPr>
-          <p:cNvPr id="11" name="Shape 8"/>
-          <p:cNvSpPr/>
-          <p:nvPr/>
-        </p:nvSpPr>
-        <p:spPr>
-          <a:xfrm>
-            <a:off x="819150" y="4451350"/>
-            <a:ext cx="2146300" cy="1066800"/>
+          <p:cNvPr id="12" name="Shape 9"/>
+          <p:cNvSpPr/>
+          <p:nvPr/>
+        </p:nvSpPr>
+        <p:spPr>
+          <a:xfrm>
+            <a:off x="819150" y="4387850"/>
+            <a:ext cx="1892300" cy="1130300"/>
           </a:xfrm>
           <a:prstGeom prst="rect">
             <a:avLst/>
@@ -2333,7 +2442,7 @@
       </p:sp>
       <p:pic>
         <p:nvPicPr>
-          <p:cNvPr id="12" name="Image 1" descr="Users">    </p:cNvPr>
+          <p:cNvPr id="13" name="Image 1" descr="Users">    </p:cNvPr>
           <p:cNvPicPr>
             <a:picLocks noChangeAspect="1"/>
           </p:cNvPicPr>
@@ -2346,7 +2455,7 @@
         </p:blipFill>
         <p:spPr>
           <a:xfrm>
-            <a:off x="1752600" y="4575820"/>
+            <a:off x="1625600" y="4544070"/>
             <a:ext cx="279400" cy="279400"/>
           </a:xfrm>
           <a:prstGeom prst="rect">
@@ -2356,13 +2465,13 @@
       </p:pic>
       <p:sp>
         <p:nvSpPr>
-          <p:cNvPr id="13" name="Text 9"/>
-          <p:cNvSpPr/>
-          <p:nvPr/>
-        </p:nvSpPr>
-        <p:spPr>
-          <a:xfrm>
-            <a:off x="1459989" y="4893320"/>
+          <p:cNvPr id="14" name="Text 10"/>
+          <p:cNvSpPr/>
+          <p:nvPr/>
+        </p:nvSpPr>
+        <p:spPr>
+          <a:xfrm>
+            <a:off x="1332989" y="4861570"/>
             <a:ext cx="864572" cy="274290"/>
           </a:xfrm>
           <a:prstGeom prst="rect">
@@ -2400,13 +2509,13 @@
       </p:sp>
       <p:sp>
         <p:nvSpPr>
-          <p:cNvPr id="14" name="Text 10"/>
-          <p:cNvSpPr/>
-          <p:nvPr/>
-        </p:nvSpPr>
-        <p:spPr>
-          <a:xfrm>
-            <a:off x="1106666" y="5180310"/>
+          <p:cNvPr id="15" name="Text 11"/>
+          <p:cNvSpPr/>
+          <p:nvPr/>
+        </p:nvSpPr>
+        <p:spPr>
+          <a:xfrm>
+            <a:off x="979666" y="5148560"/>
             <a:ext cx="1571268" cy="238720"/>
           </a:xfrm>
           <a:prstGeom prst="rect">
@@ -2444,14 +2553,14 @@
       </p:sp>
       <p:sp>
         <p:nvSpPr>
-          <p:cNvPr id="15" name="Shape 11"/>
-          <p:cNvSpPr/>
-          <p:nvPr/>
-        </p:nvSpPr>
-        <p:spPr>
-          <a:xfrm>
-            <a:off x="5010150" y="1689100"/>
-            <a:ext cx="2908300" cy="1003300"/>
+          <p:cNvPr id="16" name="Shape 12"/>
+          <p:cNvSpPr/>
+          <p:nvPr/>
+        </p:nvSpPr>
+        <p:spPr>
+          <a:xfrm>
+            <a:off x="4124325" y="1660525"/>
+            <a:ext cx="1885950" cy="3854450"/>
           </a:xfrm>
           <a:prstGeom prst="rect">
             <a:avLst/>
@@ -2459,9 +2568,9 @@
           <a:solidFill>
             <a:srgbClr val="FFFFFF"/>
           </a:solidFill>
-          <a:ln w="12700">
+          <a:ln w="19050">
             <a:solidFill>
-              <a:srgbClr val="99E891"/>
+              <a:srgbClr val="01A964"/>
             </a:solidFill>
             <a:prstDash val="solid"/>
           </a:ln>
@@ -2469,7 +2578,7 @@
       </p:sp>
       <p:pic>
         <p:nvPicPr>
-          <p:cNvPr id="16" name="Image 2" descr="Tool">    </p:cNvPr>
+          <p:cNvPr id="17" name="Image 2" descr="Globe">    </p:cNvPr>
           <p:cNvPicPr>
             <a:picLocks noChangeAspect="1"/>
           </p:cNvPicPr>
@@ -2482,8 +2591,8 @@
         </p:blipFill>
         <p:spPr>
           <a:xfrm>
-            <a:off x="6324600" y="1781820"/>
-            <a:ext cx="279400" cy="279400"/>
+            <a:off x="4889500" y="2752080"/>
+            <a:ext cx="355600" cy="355600"/>
           </a:xfrm>
           <a:prstGeom prst="rect">
             <a:avLst/>
@@ -2492,14 +2601,14 @@
       </p:pic>
       <p:sp>
         <p:nvSpPr>
-          <p:cNvPr id="17" name="Text 12"/>
-          <p:cNvSpPr/>
-          <p:nvPr/>
-        </p:nvSpPr>
-        <p:spPr>
-          <a:xfrm>
-            <a:off x="5867326" y="2099320"/>
-            <a:ext cx="1193899" cy="274290"/>
+          <p:cNvPr id="18" name="Text 13"/>
+          <p:cNvSpPr/>
+          <p:nvPr/>
+        </p:nvSpPr>
+        <p:spPr>
+          <a:xfrm>
+            <a:off x="4148440" y="3183880"/>
+            <a:ext cx="1837670" cy="274290"/>
           </a:xfrm>
           <a:prstGeom prst="rect">
             <a:avLst/>
@@ -2528,7 +2637,7 @@
                 <a:ea typeface="Arial" pitchFamily="34" charset="-122"/>
                 <a:cs typeface="Arial" pitchFamily="34" charset="-120"/>
               </a:rPr>
-              <a:t>MCP Server</a:t>
+              <a:t>Apigee X Platform</a:t>
             </a:r>
             <a:endParaRPr lang="en-US" sz="1400" dirty="0"/>
           </a:p>
@@ -2536,14 +2645,14 @@
       </p:sp>
       <p:sp>
         <p:nvSpPr>
-          <p:cNvPr id="18" name="Text 13"/>
-          <p:cNvSpPr/>
-          <p:nvPr/>
-        </p:nvSpPr>
-        <p:spPr>
-          <a:xfrm>
-            <a:off x="5493410" y="2386310"/>
-            <a:ext cx="1941731" cy="238720"/>
+          <p:cNvPr id="19" name="Text 14"/>
+          <p:cNvSpPr/>
+          <p:nvPr/>
+        </p:nvSpPr>
+        <p:spPr>
+          <a:xfrm>
+            <a:off x="4411216" y="3508970"/>
+            <a:ext cx="1312118" cy="939800"/>
           </a:xfrm>
           <a:prstGeom prst="rect">
             <a:avLst/>
@@ -2559,7 +2668,7 @@
           <a:p>
             <a:pPr algn="ctr" indent="0" marL="0">
               <a:lnSpc>
-                <a:spcPts val="1680"/>
+                <a:spcPts val="1800"/>
               </a:lnSpc>
               <a:buNone/>
             </a:pPr>
@@ -2572,22 +2681,82 @@
                 <a:ea typeface="Arial" pitchFamily="34" charset="-122"/>
                 <a:cs typeface="Arial" pitchFamily="34" charset="-120"/>
               </a:rPr>
-              <a:t>提供 AI 可用的查詢服務</a:t>
+              <a:t>Gateway 對外入口</a:t>
             </a:r>
             <a:endParaRPr lang="en-US" sz="1200" dirty="0"/>
           </a:p>
-        </p:txBody>
-      </p:sp>
-      <p:sp>
-        <p:nvSpPr>
-          <p:cNvPr id="19" name="Shape 14"/>
-          <p:cNvSpPr/>
-          <p:nvPr/>
-        </p:nvSpPr>
-        <p:spPr>
-          <a:xfrm>
-            <a:off x="5003800" y="4476750"/>
-            <a:ext cx="2921000" cy="1016000"/>
+          <a:p>
+            <a:pPr algn="ctr" indent="0" marL="0">
+              <a:lnSpc>
+                <a:spcPts val="1800"/>
+              </a:lnSpc>
+              <a:buNone/>
+            </a:pPr>
+            <a:r>
+              <a:rPr lang="en-US" sz="1200" dirty="0">
+                <a:solidFill>
+                  <a:srgbClr val="000000"/>
+                </a:solidFill>
+                <a:latin typeface="Arial" pitchFamily="34" charset="0"/>
+                <a:ea typeface="Arial" pitchFamily="34" charset="-122"/>
+                <a:cs typeface="Arial" pitchFamily="34" charset="-120"/>
+              </a:rPr>
+              <a:t>提供 MCP</a:t>
+            </a:r>
+            <a:endParaRPr lang="en-US" sz="1200" dirty="0"/>
+          </a:p>
+          <a:p>
+            <a:pPr algn="ctr" indent="0" marL="0">
+              <a:lnSpc>
+                <a:spcPts val="1800"/>
+              </a:lnSpc>
+              <a:buNone/>
+            </a:pPr>
+            <a:r>
+              <a:rPr lang="en-US" sz="1200" dirty="0">
+                <a:solidFill>
+                  <a:srgbClr val="000000"/>
+                </a:solidFill>
+                <a:latin typeface="Arial" pitchFamily="34" charset="0"/>
+                <a:ea typeface="Arial" pitchFamily="34" charset="-122"/>
+                <a:cs typeface="Arial" pitchFamily="34" charset="-120"/>
+              </a:rPr>
+              <a:t>驗證 Token</a:t>
+            </a:r>
+            <a:endParaRPr lang="en-US" sz="1200" dirty="0"/>
+          </a:p>
+          <a:p>
+            <a:pPr algn="ctr" indent="0" marL="0">
+              <a:lnSpc>
+                <a:spcPts val="1800"/>
+              </a:lnSpc>
+              <a:buNone/>
+            </a:pPr>
+            <a:r>
+              <a:rPr lang="en-US" sz="1200" dirty="0">
+                <a:solidFill>
+                  <a:srgbClr val="000000"/>
+                </a:solidFill>
+                <a:latin typeface="Arial" pitchFamily="34" charset="0"/>
+                <a:ea typeface="Arial" pitchFamily="34" charset="-122"/>
+                <a:cs typeface="Arial" pitchFamily="34" charset="-120"/>
+              </a:rPr>
+              <a:t>轉送請求</a:t>
+            </a:r>
+            <a:endParaRPr lang="en-US" sz="1200" dirty="0"/>
+          </a:p>
+        </p:txBody>
+      </p:sp>
+      <p:sp>
+        <p:nvSpPr>
+          <p:cNvPr id="20" name="Shape 15"/>
+          <p:cNvSpPr/>
+          <p:nvPr/>
+        </p:nvSpPr>
+        <p:spPr>
+          <a:xfrm>
+            <a:off x="6781800" y="4476750"/>
+            <a:ext cx="1778000" cy="1016000"/>
           </a:xfrm>
           <a:prstGeom prst="rect">
             <a:avLst/>
@@ -2600,7 +2769,7 @@
       </p:sp>
       <p:pic>
         <p:nvPicPr>
-          <p:cNvPr id="20" name="Image 3" descr="Lock">    </p:cNvPr>
+          <p:cNvPr id="21" name="Image 3" descr="Lock">    </p:cNvPr>
           <p:cNvPicPr>
             <a:picLocks noChangeAspect="1"/>
           </p:cNvPicPr>
@@ -2613,7 +2782,7 @@
         </p:blipFill>
         <p:spPr>
           <a:xfrm>
-            <a:off x="6324600" y="4575820"/>
+            <a:off x="7531100" y="4575820"/>
             <a:ext cx="279400" cy="279400"/>
           </a:xfrm>
           <a:prstGeom prst="rect">
@@ -2623,13 +2792,13 @@
       </p:pic>
       <p:sp>
         <p:nvSpPr>
-          <p:cNvPr id="21" name="Text 15"/>
-          <p:cNvSpPr/>
-          <p:nvPr/>
-        </p:nvSpPr>
-        <p:spPr>
-          <a:xfrm>
-            <a:off x="5776595" y="4893320"/>
+          <p:cNvPr id="22" name="Text 16"/>
+          <p:cNvSpPr/>
+          <p:nvPr/>
+        </p:nvSpPr>
+        <p:spPr>
+          <a:xfrm>
+            <a:off x="6983095" y="4893320"/>
             <a:ext cx="1375410" cy="274290"/>
           </a:xfrm>
           <a:prstGeom prst="rect">
@@ -2667,13 +2836,13 @@
       </p:sp>
       <p:sp>
         <p:nvSpPr>
-          <p:cNvPr id="22" name="Text 16"/>
-          <p:cNvSpPr/>
-          <p:nvPr/>
-        </p:nvSpPr>
-        <p:spPr>
-          <a:xfrm>
-            <a:off x="5630624" y="5180310"/>
+          <p:cNvPr id="23" name="Text 17"/>
+          <p:cNvSpPr/>
+          <p:nvPr/>
+        </p:nvSpPr>
+        <p:spPr>
+          <a:xfrm>
+            <a:off x="6837124" y="5180310"/>
             <a:ext cx="1667351" cy="238720"/>
           </a:xfrm>
           <a:prstGeom prst="rect">
@@ -2711,14 +2880,14 @@
       </p:sp>
       <p:sp>
         <p:nvSpPr>
-          <p:cNvPr id="23" name="Shape 17"/>
-          <p:cNvSpPr/>
-          <p:nvPr/>
-        </p:nvSpPr>
-        <p:spPr>
-          <a:xfrm>
-            <a:off x="8782050" y="1689100"/>
-            <a:ext cx="2374900" cy="1003300"/>
+          <p:cNvPr id="24" name="Shape 18"/>
+          <p:cNvSpPr/>
+          <p:nvPr/>
+        </p:nvSpPr>
+        <p:spPr>
+          <a:xfrm>
+            <a:off x="9201150" y="1689100"/>
+            <a:ext cx="2019300" cy="1003300"/>
           </a:xfrm>
           <a:prstGeom prst="rect">
             <a:avLst/>
@@ -2736,7 +2905,7 @@
       </p:sp>
       <p:pic>
         <p:nvPicPr>
-          <p:cNvPr id="24" name="Image 4" descr="Link">    </p:cNvPr>
+          <p:cNvPr id="25" name="Image 4" descr="Link">    </p:cNvPr>
           <p:cNvPicPr>
             <a:picLocks noChangeAspect="1"/>
           </p:cNvPicPr>
@@ -2749,7 +2918,7 @@
         </p:blipFill>
         <p:spPr>
           <a:xfrm>
-            <a:off x="9829800" y="1781820"/>
+            <a:off x="10071100" y="1781820"/>
             <a:ext cx="279400" cy="279400"/>
           </a:xfrm>
           <a:prstGeom prst="rect">
@@ -2759,14 +2928,14 @@
       </p:pic>
       <p:sp>
         <p:nvSpPr>
-          <p:cNvPr id="25" name="Text 18"/>
-          <p:cNvSpPr/>
-          <p:nvPr/>
-        </p:nvSpPr>
-        <p:spPr>
-          <a:xfrm>
-            <a:off x="9537189" y="2099320"/>
-            <a:ext cx="864572" cy="274290"/>
+          <p:cNvPr id="26" name="Text 19"/>
+          <p:cNvSpPr/>
+          <p:nvPr/>
+        </p:nvSpPr>
+        <p:spPr>
+          <a:xfrm>
+            <a:off x="9787176" y="2099320"/>
+            <a:ext cx="847249" cy="274290"/>
           </a:xfrm>
           <a:prstGeom prst="rect">
             <a:avLst/>
@@ -2795,7 +2964,7 @@
                 <a:ea typeface="Arial" pitchFamily="34" charset="-122"/>
                 <a:cs typeface="Arial" pitchFamily="34" charset="-120"/>
               </a:rPr>
-              <a:t>上游服務</a:t>
+              <a:t>API 服務</a:t>
             </a:r>
             <a:endParaRPr lang="en-US" sz="1400" dirty="0"/>
           </a:p>
@@ -2803,14 +2972,14 @@
       </p:sp>
       <p:sp>
         <p:nvSpPr>
-          <p:cNvPr id="26" name="Text 19"/>
-          <p:cNvSpPr/>
-          <p:nvPr/>
-        </p:nvSpPr>
-        <p:spPr>
-          <a:xfrm>
-            <a:off x="9009444" y="2386310"/>
-            <a:ext cx="1920061" cy="238720"/>
+          <p:cNvPr id="27" name="Text 20"/>
+          <p:cNvSpPr/>
+          <p:nvPr/>
+        </p:nvSpPr>
+        <p:spPr>
+          <a:xfrm>
+            <a:off x="9661808" y="2386310"/>
+            <a:ext cx="1097935" cy="238720"/>
           </a:xfrm>
           <a:prstGeom prst="rect">
             <a:avLst/>
@@ -2839,7 +3008,7 @@
                 <a:ea typeface="Arial" pitchFamily="34" charset="-122"/>
                 <a:cs typeface="Arial" pitchFamily="34" charset="-120"/>
               </a:rPr>
-              <a:t>GMB、中台、API Bank</a:t>
+              <a:t>API Bank API</a:t>
             </a:r>
             <a:endParaRPr lang="en-US" sz="1200" dirty="0"/>
           </a:p>
@@ -2847,14 +3016,14 @@
       </p:sp>
       <p:sp>
         <p:nvSpPr>
-          <p:cNvPr id="27" name="Shape 20"/>
-          <p:cNvSpPr/>
-          <p:nvPr/>
-        </p:nvSpPr>
-        <p:spPr>
-          <a:xfrm>
-            <a:off x="8782050" y="3054350"/>
-            <a:ext cx="2374900" cy="1003300"/>
+          <p:cNvPr id="28" name="Shape 21"/>
+          <p:cNvSpPr/>
+          <p:nvPr/>
+        </p:nvSpPr>
+        <p:spPr>
+          <a:xfrm>
+            <a:off x="9201150" y="3054350"/>
+            <a:ext cx="2019300" cy="1003300"/>
           </a:xfrm>
           <a:prstGeom prst="rect">
             <a:avLst/>
@@ -2872,7 +3041,7 @@
       </p:sp>
       <p:pic>
         <p:nvPicPr>
-          <p:cNvPr id="28" name="Image 5" descr="Database">    </p:cNvPr>
+          <p:cNvPr id="29" name="Image 5" descr="Database">    </p:cNvPr>
           <p:cNvPicPr>
             <a:picLocks noChangeAspect="1"/>
           </p:cNvPicPr>
@@ -2885,7 +3054,7 @@
         </p:blipFill>
         <p:spPr>
           <a:xfrm>
-            <a:off x="9829800" y="3147070"/>
+            <a:off x="10071100" y="3147070"/>
             <a:ext cx="279400" cy="279400"/>
           </a:xfrm>
           <a:prstGeom prst="rect">
@@ -2895,14 +3064,14 @@
       </p:pic>
       <p:sp>
         <p:nvSpPr>
-          <p:cNvPr id="29" name="Text 21"/>
-          <p:cNvSpPr/>
-          <p:nvPr/>
-        </p:nvSpPr>
-        <p:spPr>
-          <a:xfrm>
-            <a:off x="9429140" y="3464570"/>
-            <a:ext cx="1080671" cy="274290"/>
+          <p:cNvPr id="30" name="Text 22"/>
+          <p:cNvSpPr/>
+          <p:nvPr/>
+        </p:nvSpPr>
+        <p:spPr>
+          <a:xfrm>
+            <a:off x="9388614" y="3464570"/>
+            <a:ext cx="1644372" cy="274290"/>
           </a:xfrm>
           <a:prstGeom prst="rect">
             <a:avLst/>
@@ -2931,7 +3100,7 @@
                 <a:ea typeface="Arial" pitchFamily="34" charset="-122"/>
                 <a:cs typeface="Arial" pitchFamily="34" charset="-120"/>
               </a:rPr>
-              <a:t>業務資料庫</a:t>
+              <a:t>API Bank 資料庫</a:t>
             </a:r>
             <a:endParaRPr lang="en-US" sz="1400" dirty="0"/>
           </a:p>
@@ -2939,14 +3108,14 @@
       </p:sp>
       <p:sp>
         <p:nvSpPr>
-          <p:cNvPr id="30" name="Text 22"/>
-          <p:cNvSpPr/>
-          <p:nvPr/>
-        </p:nvSpPr>
-        <p:spPr>
-          <a:xfrm>
-            <a:off x="9321086" y="3751560"/>
-            <a:ext cx="1296829" cy="238720"/>
+          <p:cNvPr id="31" name="Text 23"/>
+          <p:cNvSpPr/>
+          <p:nvPr/>
+        </p:nvSpPr>
+        <p:spPr>
+          <a:xfrm>
+            <a:off x="9667463" y="3751560"/>
+            <a:ext cx="1086624" cy="238720"/>
           </a:xfrm>
           <a:prstGeom prst="rect">
             <a:avLst/>
@@ -2975,7 +3144,7 @@
                 <a:ea typeface="Arial" pitchFamily="34" charset="-122"/>
                 <a:cs typeface="Arial" pitchFamily="34" charset="-120"/>
               </a:rPr>
-              <a:t>企業的服務資料</a:t>
+              <a:t>API 相關資料</a:t>
             </a:r>
             <a:endParaRPr lang="en-US" sz="1200" dirty="0"/>
           </a:p>
@@ -2983,14 +3152,14 @@
       </p:sp>
       <p:sp>
         <p:nvSpPr>
-          <p:cNvPr id="31" name="Shape 23"/>
-          <p:cNvSpPr/>
-          <p:nvPr/>
-        </p:nvSpPr>
-        <p:spPr>
-          <a:xfrm>
-            <a:off x="8782050" y="4483100"/>
-            <a:ext cx="2374900" cy="1003300"/>
+          <p:cNvPr id="32" name="Shape 24"/>
+          <p:cNvSpPr/>
+          <p:nvPr/>
+        </p:nvSpPr>
+        <p:spPr>
+          <a:xfrm>
+            <a:off x="9201150" y="4292600"/>
+            <a:ext cx="2019300" cy="1225550"/>
           </a:xfrm>
           <a:prstGeom prst="rect">
             <a:avLst/>
@@ -3008,7 +3177,7 @@
       </p:sp>
       <p:pic>
         <p:nvPicPr>
-          <p:cNvPr id="32" name="Image 6" descr="Database">    </p:cNvPr>
+          <p:cNvPr id="33" name="Image 6" descr="Database">    </p:cNvPr>
           <p:cNvPicPr>
             <a:picLocks noChangeAspect="1"/>
           </p:cNvPicPr>
@@ -3021,7 +3190,7 @@
         </p:blipFill>
         <p:spPr>
           <a:xfrm>
-            <a:off x="9829800" y="4575820"/>
+            <a:off x="10071100" y="4389785"/>
             <a:ext cx="279400" cy="279400"/>
           </a:xfrm>
           <a:prstGeom prst="rect">
@@ -3031,13 +3200,13 @@
       </p:pic>
       <p:sp>
         <p:nvSpPr>
-          <p:cNvPr id="33" name="Text 24"/>
-          <p:cNvSpPr/>
-          <p:nvPr/>
-        </p:nvSpPr>
-        <p:spPr>
-          <a:xfrm>
-            <a:off x="9366746" y="4893320"/>
+          <p:cNvPr id="34" name="Text 25"/>
+          <p:cNvSpPr/>
+          <p:nvPr/>
+        </p:nvSpPr>
+        <p:spPr>
+          <a:xfrm>
+            <a:off x="9608046" y="4707285"/>
             <a:ext cx="1205508" cy="274290"/>
           </a:xfrm>
           <a:prstGeom prst="rect">
@@ -3075,14 +3244,14 @@
       </p:sp>
       <p:sp>
         <p:nvSpPr>
-          <p:cNvPr id="34" name="Text 25"/>
-          <p:cNvSpPr/>
-          <p:nvPr/>
-        </p:nvSpPr>
-        <p:spPr>
-          <a:xfrm>
-            <a:off x="9228455" y="5180310"/>
-            <a:ext cx="1482090" cy="238720"/>
+          <p:cNvPr id="35" name="Text 26"/>
+          <p:cNvSpPr/>
+          <p:nvPr/>
+        </p:nvSpPr>
+        <p:spPr>
+          <a:xfrm>
+            <a:off x="9567863" y="4994275"/>
+            <a:ext cx="1285875" cy="452041"/>
           </a:xfrm>
           <a:prstGeom prst="rect">
             <a:avLst/>
@@ -3115,11 +3284,31 @@
             </a:r>
             <a:endParaRPr lang="en-US" sz="1200" dirty="0"/>
           </a:p>
+          <a:p>
+            <a:pPr algn="ctr" indent="0" marL="0">
+              <a:lnSpc>
+                <a:spcPts val="1680"/>
+              </a:lnSpc>
+              <a:buNone/>
+            </a:pPr>
+            <a:r>
+              <a:rPr lang="en-US" sz="1200" dirty="0">
+                <a:solidFill>
+                  <a:srgbClr val="000000"/>
+                </a:solidFill>
+                <a:latin typeface="Arial" pitchFamily="34" charset="0"/>
+                <a:ea typeface="Arial" pitchFamily="34" charset="-122"/>
+                <a:cs typeface="Arial" pitchFamily="34" charset="-120"/>
+              </a:rPr>
+              <a:t>Token 資訊</a:t>
+            </a:r>
+            <a:endParaRPr lang="en-US" sz="1200" dirty="0"/>
+          </a:p>
         </p:txBody>
       </p:sp>
       <p:pic>
         <p:nvPicPr>
-          <p:cNvPr id="35" name="Image 7" descr="connector">    </p:cNvPr>
+          <p:cNvPr id="36" name="Image 7" descr="connector">    </p:cNvPr>
           <p:cNvPicPr>
             <a:picLocks noChangeAspect="1"/>
           </p:cNvPicPr>
@@ -3132,8 +3321,8 @@
         </p:blipFill>
         <p:spPr>
           <a:xfrm>
-            <a:off x="1828800" y="2667000"/>
-            <a:ext cx="127000" cy="1841500"/>
+            <a:off x="1701800" y="2730500"/>
+            <a:ext cx="127000" cy="1714500"/>
           </a:xfrm>
           <a:prstGeom prst="rect">
             <a:avLst/>
@@ -3142,7 +3331,7 @@
       </p:pic>
       <p:pic>
         <p:nvPicPr>
-          <p:cNvPr id="36" name="Image 8" descr="connector">    </p:cNvPr>
+          <p:cNvPr id="37" name="Image 8" descr="connector">    </p:cNvPr>
           <p:cNvPicPr>
             <a:picLocks noChangeAspect="1"/>
           </p:cNvPicPr>
@@ -3155,8 +3344,8 @@
         </p:blipFill>
         <p:spPr>
           <a:xfrm>
-            <a:off x="2908300" y="4921250"/>
-            <a:ext cx="2159000" cy="127000"/>
+            <a:off x="2654300" y="4921250"/>
+            <a:ext cx="1524000" cy="127000"/>
           </a:xfrm>
           <a:prstGeom prst="rect">
             <a:avLst/>
@@ -3165,7 +3354,7 @@
       </p:pic>
       <p:pic>
         <p:nvPicPr>
-          <p:cNvPr id="37" name="Image 9" descr="connector">    </p:cNvPr>
+          <p:cNvPr id="38" name="Image 9" descr="connector">    </p:cNvPr>
           <p:cNvPicPr>
             <a:picLocks noChangeAspect="1"/>
           </p:cNvPicPr>
@@ -3178,8 +3367,8 @@
         </p:blipFill>
         <p:spPr>
           <a:xfrm>
-            <a:off x="2908300" y="2476500"/>
-            <a:ext cx="2159000" cy="2159000"/>
+            <a:off x="2654300" y="2413000"/>
+            <a:ext cx="1524000" cy="127000"/>
           </a:xfrm>
           <a:prstGeom prst="rect">
             <a:avLst/>
@@ -3188,7 +3377,7 @@
       </p:pic>
       <p:pic>
         <p:nvPicPr>
-          <p:cNvPr id="38" name="Image 10" descr="connector">    </p:cNvPr>
+          <p:cNvPr id="39" name="Image 10" descr="connector">    </p:cNvPr>
           <p:cNvPicPr>
             <a:picLocks noChangeAspect="1"/>
           </p:cNvPicPr>
@@ -3201,8 +3390,8 @@
         </p:blipFill>
         <p:spPr>
           <a:xfrm>
-            <a:off x="2908300" y="2127250"/>
-            <a:ext cx="2159000" cy="127000"/>
+            <a:off x="2654300" y="1905000"/>
+            <a:ext cx="1524000" cy="127000"/>
           </a:xfrm>
           <a:prstGeom prst="rect">
             <a:avLst/>
@@ -3211,7 +3400,7 @@
       </p:pic>
       <p:pic>
         <p:nvPicPr>
-          <p:cNvPr id="39" name="Image 11" descr="connector">    </p:cNvPr>
+          <p:cNvPr id="40" name="Image 11" descr="connector">    </p:cNvPr>
           <p:cNvPicPr>
             <a:picLocks noChangeAspect="1"/>
           </p:cNvPicPr>
@@ -3224,8 +3413,8 @@
         </p:blipFill>
         <p:spPr>
           <a:xfrm>
-            <a:off x="6400800" y="2635250"/>
-            <a:ext cx="127000" cy="1905000"/>
+            <a:off x="5956300" y="4921250"/>
+            <a:ext cx="889000" cy="127000"/>
           </a:xfrm>
           <a:prstGeom prst="rect">
             <a:avLst/>
@@ -3234,7 +3423,7 @@
       </p:pic>
       <p:pic>
         <p:nvPicPr>
-          <p:cNvPr id="40" name="Image 12" descr="connector">    </p:cNvPr>
+          <p:cNvPr id="41" name="Image 12" descr="connector">    </p:cNvPr>
           <p:cNvPicPr>
             <a:picLocks noChangeAspect="1"/>
           </p:cNvPicPr>
@@ -3247,8 +3436,8 @@
         </p:blipFill>
         <p:spPr>
           <a:xfrm>
-            <a:off x="7861300" y="2127250"/>
-            <a:ext cx="977900" cy="127000"/>
+            <a:off x="8496300" y="4921250"/>
+            <a:ext cx="762000" cy="127000"/>
           </a:xfrm>
           <a:prstGeom prst="rect">
             <a:avLst/>
@@ -3257,7 +3446,7 @@
       </p:pic>
       <p:pic>
         <p:nvPicPr>
-          <p:cNvPr id="41" name="Image 13" descr="connector">    </p:cNvPr>
+          <p:cNvPr id="42" name="Image 13" descr="connector">    </p:cNvPr>
           <p:cNvPicPr>
             <a:picLocks noChangeAspect="1"/>
           </p:cNvPicPr>
@@ -3270,8 +3459,8 @@
         </p:blipFill>
         <p:spPr>
           <a:xfrm>
-            <a:off x="7607300" y="2635250"/>
-            <a:ext cx="1231900" cy="984250"/>
+            <a:off x="5956300" y="2127250"/>
+            <a:ext cx="3302000" cy="127000"/>
           </a:xfrm>
           <a:prstGeom prst="rect">
             <a:avLst/>
@@ -3280,7 +3469,7 @@
       </p:pic>
       <p:pic>
         <p:nvPicPr>
-          <p:cNvPr id="42" name="Image 14" descr="connector">    </p:cNvPr>
+          <p:cNvPr id="43" name="Image 14" descr="connector">    </p:cNvPr>
           <p:cNvPicPr>
             <a:picLocks noChangeAspect="1"/>
           </p:cNvPicPr>
@@ -3293,8 +3482,8 @@
         </p:blipFill>
         <p:spPr>
           <a:xfrm>
-            <a:off x="7861300" y="4921250"/>
-            <a:ext cx="977900" cy="127000"/>
+            <a:off x="10147300" y="2635250"/>
+            <a:ext cx="127000" cy="476250"/>
           </a:xfrm>
           <a:prstGeom prst="rect">
             <a:avLst/>
@@ -3303,14 +3492,14 @@
       </p:pic>
       <p:sp>
         <p:nvSpPr>
-          <p:cNvPr id="43" name="Text 26"/>
-          <p:cNvSpPr/>
-          <p:nvPr/>
-        </p:nvSpPr>
-        <p:spPr>
-          <a:xfrm>
-            <a:off x="1993900" y="3302000"/>
-            <a:ext cx="1003300" cy="665361"/>
+          <p:cNvPr id="44" name="Text 27"/>
+          <p:cNvSpPr/>
+          <p:nvPr/>
+        </p:nvSpPr>
+        <p:spPr>
+          <a:xfrm>
+            <a:off x="1866900" y="3238500"/>
+            <a:ext cx="876300" cy="452041"/>
           </a:xfrm>
           <a:prstGeom prst="rect">
             <a:avLst/>
@@ -3339,7 +3528,7 @@
                 <a:ea typeface="Arial" pitchFamily="34" charset="-122"/>
                 <a:cs typeface="Arial" pitchFamily="34" charset="-120"/>
               </a:rPr>
-              <a:t>① 在 AI 工具設定 MCP 連線</a:t>
+              <a:t>① 設定 MCP</a:t>
             </a:r>
             <a:endParaRPr lang="en-US" sz="1200" dirty="0"/>
           </a:p>
@@ -3347,14 +3536,14 @@
       </p:sp>
       <p:sp>
         <p:nvSpPr>
-          <p:cNvPr id="44" name="Text 27"/>
-          <p:cNvSpPr/>
-          <p:nvPr/>
-        </p:nvSpPr>
-        <p:spPr>
-          <a:xfrm>
-            <a:off x="3073400" y="4483100"/>
-            <a:ext cx="1896745" cy="452041"/>
+          <p:cNvPr id="45" name="Text 28"/>
+          <p:cNvSpPr/>
+          <p:nvPr/>
+        </p:nvSpPr>
+        <p:spPr>
+          <a:xfrm>
+            <a:off x="2794000" y="4686300"/>
+            <a:ext cx="1320800" cy="238720"/>
           </a:xfrm>
           <a:prstGeom prst="rect">
             <a:avLst/>
@@ -3383,42 +3572,22 @@
                 <a:ea typeface="Arial" pitchFamily="34" charset="-122"/>
                 <a:cs typeface="Arial" pitchFamily="34" charset="-120"/>
               </a:rPr>
-              <a:t>② 到 OAuth Server 登入</a:t>
+              <a:t>② 登入驗證</a:t>
             </a:r>
             <a:endParaRPr lang="en-US" sz="1200" dirty="0"/>
           </a:p>
-          <a:p>
-            <a:pPr algn="l" indent="0" marL="0">
-              <a:lnSpc>
-                <a:spcPts val="1680"/>
-              </a:lnSpc>
-              <a:buNone/>
-            </a:pPr>
-            <a:r>
-              <a:rPr lang="en-US" sz="1200" b="1" dirty="0">
-                <a:solidFill>
-                  <a:srgbClr val="036B3F"/>
-                </a:solidFill>
-                <a:latin typeface="Arial" pitchFamily="34" charset="0"/>
-                <a:ea typeface="Arial" pitchFamily="34" charset="-122"/>
-                <a:cs typeface="Arial" pitchFamily="34" charset="-120"/>
-              </a:rPr>
-              <a:t>輸入統編、帳號、密碼</a:t>
-            </a:r>
-            <a:endParaRPr lang="en-US" sz="1200" dirty="0"/>
-          </a:p>
-        </p:txBody>
-      </p:sp>
-      <p:sp>
-        <p:nvSpPr>
-          <p:cNvPr id="45" name="Text 28"/>
-          <p:cNvSpPr/>
-          <p:nvPr/>
-        </p:nvSpPr>
-        <p:spPr>
-          <a:xfrm>
-            <a:off x="3073400" y="1841500"/>
-            <a:ext cx="1896745" cy="238720"/>
+        </p:txBody>
+      </p:sp>
+      <p:sp>
+        <p:nvSpPr>
+          <p:cNvPr id="46" name="Text 29"/>
+          <p:cNvSpPr/>
+          <p:nvPr/>
+        </p:nvSpPr>
+        <p:spPr>
+          <a:xfrm>
+            <a:off x="2794000" y="2552700"/>
+            <a:ext cx="1320800" cy="452041"/>
           </a:xfrm>
           <a:prstGeom prst="rect">
             <a:avLst/>
@@ -3447,22 +3616,42 @@
                 <a:ea typeface="Arial" pitchFamily="34" charset="-122"/>
                 <a:cs typeface="Arial" pitchFamily="34" charset="-120"/>
               </a:rPr>
-              <a:t>④ 帶通行證去查資料</a:t>
+              <a:t>③ 發放 Token</a:t>
             </a:r>
             <a:endParaRPr lang="en-US" sz="1200" dirty="0"/>
           </a:p>
-        </p:txBody>
-      </p:sp>
-      <p:sp>
-        <p:nvSpPr>
-          <p:cNvPr id="46" name="Text 29"/>
-          <p:cNvSpPr/>
-          <p:nvPr/>
-        </p:nvSpPr>
-        <p:spPr>
-          <a:xfrm>
-            <a:off x="6565900" y="3302000"/>
-            <a:ext cx="1066800" cy="452041"/>
+          <a:p>
+            <a:pPr algn="l" indent="0" marL="0">
+              <a:lnSpc>
+                <a:spcPts val="1680"/>
+              </a:lnSpc>
+              <a:buNone/>
+            </a:pPr>
+            <a:r>
+              <a:rPr lang="en-US" sz="1200" b="1" dirty="0">
+                <a:solidFill>
+                  <a:srgbClr val="036B3F"/>
+                </a:solidFill>
+                <a:latin typeface="Arial" pitchFamily="34" charset="0"/>
+                <a:ea typeface="Arial" pitchFamily="34" charset="-122"/>
+                <a:cs typeface="Arial" pitchFamily="34" charset="-120"/>
+              </a:rPr>
+              <a:t>給 AI 工具</a:t>
+            </a:r>
+            <a:endParaRPr lang="en-US" sz="1200" dirty="0"/>
+          </a:p>
+        </p:txBody>
+      </p:sp>
+      <p:sp>
+        <p:nvSpPr>
+          <p:cNvPr id="47" name="Text 30"/>
+          <p:cNvSpPr/>
+          <p:nvPr/>
+        </p:nvSpPr>
+        <p:spPr>
+          <a:xfrm>
+            <a:off x="2794000" y="1397000"/>
+            <a:ext cx="1320800" cy="452041"/>
           </a:xfrm>
           <a:prstGeom prst="rect">
             <a:avLst/>
@@ -3491,7 +3680,7 @@
                 <a:ea typeface="Arial" pitchFamily="34" charset="-122"/>
                 <a:cs typeface="Arial" pitchFamily="34" charset="-120"/>
               </a:rPr>
-              <a:t>⑤ 檢查通行證</a:t>
+              <a:t>④ 帶 Token 呼叫</a:t>
             </a:r>
             <a:endParaRPr lang="en-US" sz="1200" dirty="0"/>
           </a:p>
@@ -3511,7 +3700,7 @@
                 <a:ea typeface="Arial" pitchFamily="34" charset="-122"/>
                 <a:cs typeface="Arial" pitchFamily="34" charset="-120"/>
               </a:rPr>
-              <a:t>是不是真的</a:t>
+              <a:t>MCP 工具</a:t>
             </a:r>
             <a:endParaRPr lang="en-US" sz="1200" dirty="0"/>
           </a:p>
@@ -3519,14 +3708,14 @@
       </p:sp>
       <p:sp>
         <p:nvSpPr>
-          <p:cNvPr id="47" name="Text 30"/>
-          <p:cNvSpPr/>
-          <p:nvPr/>
-        </p:nvSpPr>
-        <p:spPr>
-          <a:xfrm>
-            <a:off x="7962900" y="2260600"/>
-            <a:ext cx="838200" cy="238720"/>
+          <p:cNvPr id="48" name="Text 31"/>
+          <p:cNvSpPr/>
+          <p:nvPr/>
+        </p:nvSpPr>
+        <p:spPr>
+          <a:xfrm>
+            <a:off x="6070600" y="4521200"/>
+            <a:ext cx="749300" cy="452041"/>
           </a:xfrm>
           <a:prstGeom prst="rect">
             <a:avLst/>
@@ -3549,28 +3738,48 @@
             <a:r>
               <a:rPr lang="en-US" sz="1200" b="1" dirty="0">
                 <a:solidFill>
-                  <a:srgbClr val="7F7F7F"/>
+                  <a:srgbClr val="036B3F"/>
                 </a:solidFill>
                 <a:latin typeface="Arial" pitchFamily="34" charset="0"/>
                 <a:ea typeface="Arial" pitchFamily="34" charset="-122"/>
                 <a:cs typeface="Arial" pitchFamily="34" charset="-120"/>
               </a:rPr>
-              <a:t>呼叫 API</a:t>
+              <a:t>轉送</a:t>
             </a:r>
             <a:endParaRPr lang="en-US" sz="1200" dirty="0"/>
           </a:p>
-        </p:txBody>
-      </p:sp>
-      <p:sp>
-        <p:nvSpPr>
-          <p:cNvPr id="48" name="Text 31"/>
-          <p:cNvSpPr/>
-          <p:nvPr/>
-        </p:nvSpPr>
-        <p:spPr>
-          <a:xfrm>
-            <a:off x="7747000" y="3238500"/>
-            <a:ext cx="812800" cy="238720"/>
+          <a:p>
+            <a:pPr algn="l" indent="0" marL="0">
+              <a:lnSpc>
+                <a:spcPts val="1680"/>
+              </a:lnSpc>
+              <a:buNone/>
+            </a:pPr>
+            <a:r>
+              <a:rPr lang="en-US" sz="1200" b="1" dirty="0">
+                <a:solidFill>
+                  <a:srgbClr val="036B3F"/>
+                </a:solidFill>
+                <a:latin typeface="Arial" pitchFamily="34" charset="0"/>
+                <a:ea typeface="Arial" pitchFamily="34" charset="-122"/>
+                <a:cs typeface="Arial" pitchFamily="34" charset="-120"/>
+              </a:rPr>
+              <a:t>Auth 請求</a:t>
+            </a:r>
+            <a:endParaRPr lang="en-US" sz="1200" dirty="0"/>
+          </a:p>
+        </p:txBody>
+      </p:sp>
+      <p:sp>
+        <p:nvSpPr>
+          <p:cNvPr id="49" name="Text 32"/>
+          <p:cNvSpPr/>
+          <p:nvPr/>
+        </p:nvSpPr>
+        <p:spPr>
+          <a:xfrm>
+            <a:off x="8585200" y="5054600"/>
+            <a:ext cx="660400" cy="452041"/>
           </a:xfrm>
           <a:prstGeom prst="rect">
             <a:avLst/>
@@ -3599,7 +3808,7 @@
                 <a:ea typeface="Arial" pitchFamily="34" charset="-122"/>
                 <a:cs typeface="Arial" pitchFamily="34" charset="-120"/>
               </a:rPr>
-              <a:t>讀取資料</a:t>
+              <a:t>比對帳密</a:t>
             </a:r>
             <a:endParaRPr lang="en-US" sz="1200" dirty="0"/>
           </a:p>
@@ -3607,14 +3816,14 @@
       </p:sp>
       <p:sp>
         <p:nvSpPr>
-          <p:cNvPr id="49" name="Text 32"/>
-          <p:cNvSpPr/>
-          <p:nvPr/>
-        </p:nvSpPr>
-        <p:spPr>
-          <a:xfrm>
-            <a:off x="7962900" y="5054600"/>
-            <a:ext cx="838200" cy="452041"/>
+          <p:cNvPr id="50" name="Text 33"/>
+          <p:cNvSpPr/>
+          <p:nvPr/>
+        </p:nvSpPr>
+        <p:spPr>
+          <a:xfrm>
+            <a:off x="10312400" y="2768600"/>
+            <a:ext cx="939800" cy="238720"/>
           </a:xfrm>
           <a:prstGeom prst="rect">
             <a:avLst/>
@@ -3643,42 +3852,22 @@
                 <a:ea typeface="Arial" pitchFamily="34" charset="-122"/>
                 <a:cs typeface="Arial" pitchFamily="34" charset="-120"/>
               </a:rPr>
-              <a:t>比對</a:t>
+              <a:t>讀取資料</a:t>
             </a:r>
             <a:endParaRPr lang="en-US" sz="1200" dirty="0"/>
           </a:p>
-          <a:p>
-            <a:pPr algn="l" indent="0" marL="0">
-              <a:lnSpc>
-                <a:spcPts val="1680"/>
-              </a:lnSpc>
-              <a:buNone/>
-            </a:pPr>
-            <a:r>
-              <a:rPr lang="en-US" sz="1200" b="1" dirty="0">
-                <a:solidFill>
-                  <a:srgbClr val="7F7F7F"/>
-                </a:solidFill>
-                <a:latin typeface="Arial" pitchFamily="34" charset="0"/>
-                <a:ea typeface="Arial" pitchFamily="34" charset="-122"/>
-                <a:cs typeface="Arial" pitchFamily="34" charset="-120"/>
-              </a:rPr>
-              <a:t>帳號密碼</a:t>
-            </a:r>
-            <a:endParaRPr lang="en-US" sz="1200" dirty="0"/>
-          </a:p>
-        </p:txBody>
-      </p:sp>
-      <p:sp>
-        <p:nvSpPr>
-          <p:cNvPr id="50" name="Text 33"/>
-          <p:cNvSpPr/>
-          <p:nvPr/>
-        </p:nvSpPr>
-        <p:spPr>
-          <a:xfrm>
-            <a:off x="4876800" y="5562600"/>
-            <a:ext cx="3270250" cy="238720"/>
+        </p:txBody>
+      </p:sp>
+      <p:sp>
+        <p:nvSpPr>
+          <p:cNvPr id="51" name="Text 34"/>
+          <p:cNvSpPr/>
+          <p:nvPr/>
+        </p:nvSpPr>
+        <p:spPr>
+          <a:xfrm>
+            <a:off x="6908800" y="1879600"/>
+            <a:ext cx="2223770" cy="238720"/>
           </a:xfrm>
           <a:prstGeom prst="rect">
             <a:avLst/>
@@ -3707,7 +3896,7 @@
                 <a:ea typeface="Arial" pitchFamily="34" charset="-122"/>
                 <a:cs typeface="Arial" pitchFamily="34" charset="-120"/>
               </a:rPr>
-              <a:t>公有雲</a:t>
+              <a:t>⑤ 驗證 Token 後呼叫 API</a:t>
             </a:r>
             <a:endParaRPr lang="en-US" sz="1200" dirty="0"/>
           </a:p>
@@ -3715,14 +3904,14 @@
       </p:sp>
       <p:sp>
         <p:nvSpPr>
-          <p:cNvPr id="51" name="Text 34"/>
-          <p:cNvSpPr/>
-          <p:nvPr/>
-        </p:nvSpPr>
-        <p:spPr>
-          <a:xfrm>
-            <a:off x="8686800" y="5562600"/>
-            <a:ext cx="2642362" cy="238720"/>
+          <p:cNvPr id="52" name="Text 35"/>
+          <p:cNvSpPr/>
+          <p:nvPr/>
+        </p:nvSpPr>
+        <p:spPr>
+          <a:xfrm>
+            <a:off x="3987800" y="5613400"/>
+            <a:ext cx="1962150" cy="238720"/>
           </a:xfrm>
           <a:prstGeom prst="rect">
             <a:avLst/>
@@ -3745,13 +3934,13 @@
             <a:r>
               <a:rPr lang="en-US" sz="1200" b="1" dirty="0">
                 <a:solidFill>
-                  <a:srgbClr val="7F7F7F"/>
+                  <a:srgbClr val="036B3F"/>
                 </a:solidFill>
                 <a:latin typeface="Arial" pitchFamily="34" charset="0"/>
                 <a:ea typeface="Arial" pitchFamily="34" charset="-122"/>
                 <a:cs typeface="Arial" pitchFamily="34" charset="-120"/>
               </a:rPr>
-              <a:t>資訊雲</a:t>
+              <a:t>公有雲</a:t>
             </a:r>
             <a:endParaRPr lang="en-US" sz="1200" dirty="0"/>
           </a:p>
@@ -3759,14 +3948,14 @@
       </p:sp>
       <p:sp>
         <p:nvSpPr>
-          <p:cNvPr id="52" name="Text 35"/>
-          <p:cNvSpPr/>
-          <p:nvPr/>
-        </p:nvSpPr>
-        <p:spPr>
-          <a:xfrm>
-            <a:off x="4064149" y="3115518"/>
-            <a:ext cx="1384300" cy="452041"/>
+          <p:cNvPr id="53" name="Text 36"/>
+          <p:cNvSpPr/>
+          <p:nvPr/>
+        </p:nvSpPr>
+        <p:spPr>
+          <a:xfrm>
+            <a:off x="6527800" y="1435100"/>
+            <a:ext cx="1701800" cy="238720"/>
           </a:xfrm>
           <a:prstGeom prst="rect">
             <a:avLst/>
@@ -3789,16 +3978,40 @@
             <a:r>
               <a:rPr lang="en-US" sz="1200" b="1" dirty="0">
                 <a:solidFill>
-                  <a:srgbClr val="036B3F"/>
+                  <a:srgbClr val="3B6E99"/>
                 </a:solidFill>
                 <a:latin typeface="Arial" pitchFamily="34" charset="0"/>
                 <a:ea typeface="Arial" pitchFamily="34" charset="-122"/>
                 <a:cs typeface="Arial" pitchFamily="34" charset="-120"/>
               </a:rPr>
-              <a:t>③ 確認身分，</a:t>
+              <a:t>資訊雲</a:t>
             </a:r>
             <a:endParaRPr lang="en-US" sz="1200" dirty="0"/>
           </a:p>
+        </p:txBody>
+      </p:sp>
+      <p:sp>
+        <p:nvSpPr>
+          <p:cNvPr id="54" name="Text 37"/>
+          <p:cNvSpPr/>
+          <p:nvPr/>
+        </p:nvSpPr>
+        <p:spPr>
+          <a:xfrm>
+            <a:off x="6527800" y="5613400"/>
+            <a:ext cx="3924300" cy="238720"/>
+          </a:xfrm>
+          <a:prstGeom prst="rect">
+            <a:avLst/>
+          </a:prstGeom>
+          <a:noFill/>
+          <a:ln/>
+        </p:spPr>
+        <p:txBody>
+          <a:bodyPr wrap="square" lIns="0" tIns="0" rIns="0" bIns="0" rtlCol="0" anchor="t">
+            <a:normAutofit/>
+          </a:bodyPr>
+          <a:lstStyle/>
           <a:p>
             <a:pPr algn="l" indent="0" marL="0">
               <a:lnSpc>
@@ -3809,13 +4022,13 @@
             <a:r>
               <a:rPr lang="en-US" sz="1200" b="1" dirty="0">
                 <a:solidFill>
-                  <a:srgbClr val="036B3F"/>
+                  <a:srgbClr val="7F7F7F"/>
                 </a:solidFill>
                 <a:latin typeface="Arial" pitchFamily="34" charset="0"/>
                 <a:ea typeface="Arial" pitchFamily="34" charset="-122"/>
                 <a:cs typeface="Arial" pitchFamily="34" charset="-120"/>
               </a:rPr>
-              <a:t>發通行證給 AI 工具</a:t>
+              <a:t>地端（On-Premises）</a:t>
             </a:r>
             <a:endParaRPr lang="en-US" sz="1200" dirty="0"/>
           </a:p>
@@ -3857,14 +4070,12 @@
         <p:nvSpPr>
           <p:cNvPr id="2" name="Text 0"/>
           <p:cNvSpPr/>
-          <p:nvPr>
-            <p:ph type="title"/>
-          </p:nvPr>
-        </p:nvSpPr>
-        <p:spPr>
-          <a:xfrm>
-            <a:off x="812800" y="457200"/>
-            <a:ext cx="10883392" cy="528290"/>
+          <p:nvPr/>
+        </p:nvSpPr>
+        <p:spPr>
+          <a:xfrm>
+            <a:off x="10058400" y="6441480"/>
+            <a:ext cx="1320800" cy="238720"/>
           </a:xfrm>
           <a:prstGeom prst="rect">
             <a:avLst/>
@@ -3878,60 +4089,39 @@
           </a:bodyPr>
           <a:lstStyle/>
           <a:p>
-            <a:pPr algn="l" indent="0" marL="0">
-              <a:lnSpc>
-                <a:spcPts val="3960"/>
-              </a:lnSpc>
-              <a:buNone/>
-            </a:pPr>
-            <a:r>
-              <a:rPr lang="en-US" sz="3600" b="1" i="0" dirty="0">
-                <a:solidFill>
-                  <a:srgbClr val="036B3F"/>
+            <a:pPr algn="r" indent="0" marL="0">
+              <a:lnSpc>
+                <a:spcPts val="1680"/>
+              </a:lnSpc>
+              <a:buNone/>
+            </a:pPr>
+            <a:r>
+              <a:rPr lang="en-US" sz="1200" dirty="0">
+                <a:solidFill>
+                  <a:srgbClr val="7F7F7F"/>
                 </a:solidFill>
                 <a:latin typeface="Arial" pitchFamily="34" charset="0"/>
                 <a:ea typeface="Arial" pitchFamily="34" charset="-122"/>
                 <a:cs typeface="Arial" pitchFamily="34" charset="-120"/>
               </a:rPr>
-              <a:t>一步步看：AI 工具怎麼拿到通行證</a:t>
-            </a:r>
-            <a:endParaRPr lang="en-US" sz="3600" dirty="0"/>
-          </a:p>
-        </p:txBody>
-      </p:sp>
-      <p:pic>
-        <p:nvPicPr>
-          <p:cNvPr id="3" name="Image 0" descr="OAuth 授權碼加 PKCE 流程時序圖：Client 產生 PKCE 參數並將使用者導向 OAuth Server，使用者在 OAuth Server輸入統編、帳號、密碼， OAuth Server以授權碼導回，Client 以授權碼加 code_verifier 換取 Access Token 與 Refresh Token，再帶 Token 呼叫 MCP Server，MCP Server 以 JWKS 驗證">    </p:cNvPr>
-          <p:cNvPicPr>
-            <a:picLocks noChangeAspect="1"/>
-          </p:cNvPicPr>
-          <p:nvPr/>
-        </p:nvPicPr>
-        <p:blipFill>
-          <a:blip r:embed="rId1"/>
-          <a:srcRect l="-18" r="-18" t="0" b="0"/>
-          <a:stretch/>
-        </p:blipFill>
-        <p:spPr>
-          <a:xfrm>
-            <a:off x="812800" y="1112490"/>
-            <a:ext cx="10566400" cy="4476750"/>
-          </a:xfrm>
-          <a:prstGeom prst="rect">
-            <a:avLst/>
-          </a:prstGeom>
-        </p:spPr>
-      </p:pic>
-      <p:sp>
-        <p:nvSpPr>
-          <p:cNvPr id="4" name="Text 1"/>
-          <p:cNvSpPr/>
-          <p:nvPr/>
-        </p:nvSpPr>
-        <p:spPr>
-          <a:xfrm>
-            <a:off x="10058400" y="6441480"/>
-            <a:ext cx="1320800" cy="238720"/>
+              <a:t>3 / 5</a:t>
+            </a:r>
+            <a:endParaRPr lang="en-US" sz="1200" dirty="0"/>
+          </a:p>
+        </p:txBody>
+      </p:sp>
+      <p:sp>
+        <p:nvSpPr>
+          <p:cNvPr id="3" name="Text 1"/>
+          <p:cNvSpPr/>
+          <p:nvPr>
+            <p:ph type="title"/>
+          </p:nvPr>
+        </p:nvSpPr>
+        <p:spPr>
+          <a:xfrm>
+            <a:off x="812800" y="457200"/>
+            <a:ext cx="10883392" cy="505420"/>
           </a:xfrm>
           <a:prstGeom prst="rect">
             <a:avLst/>
@@ -3945,7 +4135,247 @@
           </a:bodyPr>
           <a:lstStyle/>
           <a:p>
-            <a:pPr algn="r" indent="0" marL="0">
+            <a:pPr algn="l" indent="0" marL="0">
+              <a:lnSpc>
+                <a:spcPts val="3824"/>
+              </a:lnSpc>
+              <a:buNone/>
+            </a:pPr>
+            <a:r>
+              <a:rPr lang="en-US" sz="3476" b="1" i="0" dirty="0">
+                <a:solidFill>
+                  <a:srgbClr val="036B3F"/>
+                </a:solidFill>
+                <a:latin typeface="Arial" pitchFamily="34" charset="0"/>
+                <a:ea typeface="Arial" pitchFamily="34" charset="-122"/>
+                <a:cs typeface="Arial" pitchFamily="34" charset="-120"/>
+              </a:rPr>
+              <a:t>方案 B：OAuth Server 上公有雲</a:t>
+            </a:r>
+            <a:endParaRPr lang="en-US" sz="3476" dirty="0"/>
+          </a:p>
+        </p:txBody>
+      </p:sp>
+      <p:sp>
+        <p:nvSpPr>
+          <p:cNvPr id="4" name="Text 2"/>
+          <p:cNvSpPr/>
+          <p:nvPr/>
+        </p:nvSpPr>
+        <p:spPr>
+          <a:xfrm>
+            <a:off x="812800" y="988020"/>
+            <a:ext cx="10883392" cy="262930"/>
+          </a:xfrm>
+          <a:prstGeom prst="rect">
+            <a:avLst/>
+          </a:prstGeom>
+          <a:noFill/>
+          <a:ln/>
+        </p:spPr>
+        <p:txBody>
+          <a:bodyPr wrap="square" lIns="0" tIns="0" rIns="0" bIns="0" rtlCol="0" anchor="t">
+            <a:normAutofit/>
+          </a:bodyPr>
+          <a:lstStyle/>
+          <a:p>
+            <a:pPr algn="l" indent="0" marL="0">
+              <a:lnSpc>
+                <a:spcPts val="1874"/>
+              </a:lnSpc>
+              <a:buNone/>
+            </a:pPr>
+            <a:r>
+              <a:rPr lang="en-US" sz="1339" dirty="0">
+                <a:solidFill>
+                  <a:srgbClr val="7F7F7F"/>
+                </a:solidFill>
+                <a:latin typeface="Arial" pitchFamily="34" charset="0"/>
+                <a:ea typeface="Arial" pitchFamily="34" charset="-122"/>
+                <a:cs typeface="Arial" pitchFamily="34" charset="-120"/>
+              </a:rPr>
+              <a:t>Apigee X 與 OAuth Server 在公有雲，對外一律經過 Apigee；API 服務在資訊雲，資料庫在地端</a:t>
+            </a:r>
+            <a:endParaRPr lang="en-US" sz="1339" dirty="0"/>
+          </a:p>
+        </p:txBody>
+      </p:sp>
+      <p:sp>
+        <p:nvSpPr>
+          <p:cNvPr id="5" name="Shape 3"/>
+          <p:cNvSpPr/>
+          <p:nvPr/>
+        </p:nvSpPr>
+        <p:spPr>
+          <a:xfrm>
+            <a:off x="3860800" y="1397000"/>
+            <a:ext cx="4889500" cy="4445000"/>
+          </a:xfrm>
+          <a:prstGeom prst="rect">
+            <a:avLst/>
+          </a:prstGeom>
+          <a:solidFill>
+            <a:srgbClr val="EAF7EF"/>
+          </a:solidFill>
+          <a:ln/>
+        </p:spPr>
+      </p:sp>
+      <p:sp>
+        <p:nvSpPr>
+          <p:cNvPr id="6" name="Shape 4"/>
+          <p:cNvSpPr/>
+          <p:nvPr/>
+        </p:nvSpPr>
+        <p:spPr>
+          <a:xfrm>
+            <a:off x="8877300" y="1397000"/>
+            <a:ext cx="2501900" cy="1460500"/>
+          </a:xfrm>
+          <a:prstGeom prst="rect">
+            <a:avLst/>
+          </a:prstGeom>
+          <a:solidFill>
+            <a:srgbClr val="E8F0F7"/>
+          </a:solidFill>
+          <a:ln/>
+        </p:spPr>
+      </p:sp>
+      <p:sp>
+        <p:nvSpPr>
+          <p:cNvPr id="7" name="Shape 5"/>
+          <p:cNvSpPr/>
+          <p:nvPr/>
+        </p:nvSpPr>
+        <p:spPr>
+          <a:xfrm>
+            <a:off x="8877300" y="2921000"/>
+            <a:ext cx="2501900" cy="2921000"/>
+          </a:xfrm>
+          <a:prstGeom prst="rect">
+            <a:avLst/>
+          </a:prstGeom>
+          <a:solidFill>
+            <a:srgbClr val="F3F3F3"/>
+          </a:solidFill>
+          <a:ln/>
+        </p:spPr>
+      </p:sp>
+      <p:sp>
+        <p:nvSpPr>
+          <p:cNvPr id="8" name="Shape 6"/>
+          <p:cNvSpPr/>
+          <p:nvPr/>
+        </p:nvSpPr>
+        <p:spPr>
+          <a:xfrm>
+            <a:off x="819150" y="1530350"/>
+            <a:ext cx="1892300" cy="1257300"/>
+          </a:xfrm>
+          <a:prstGeom prst="rect">
+            <a:avLst/>
+          </a:prstGeom>
+          <a:solidFill>
+            <a:srgbClr val="FFFFFF"/>
+          </a:solidFill>
+          <a:ln w="12700">
+            <a:solidFill>
+              <a:srgbClr val="D9DAD9"/>
+            </a:solidFill>
+            <a:prstDash val="solid"/>
+          </a:ln>
+        </p:spPr>
+      </p:sp>
+      <p:pic>
+        <p:nvPicPr>
+          <p:cNvPr id="9" name="Image 0" descr="Chat">    </p:cNvPr>
+          <p:cNvPicPr>
+            <a:picLocks noChangeAspect="1"/>
+          </p:cNvPicPr>
+          <p:nvPr/>
+        </p:nvPicPr>
+        <p:blipFill>
+          <a:blip r:embed="rId1"/>
+          <a:srcRect l="0" r="0" t="0" b="0"/>
+          <a:stretch/>
+        </p:blipFill>
+        <p:spPr>
+          <a:xfrm>
+            <a:off x="1625600" y="1643410"/>
+            <a:ext cx="279400" cy="279400"/>
+          </a:xfrm>
+          <a:prstGeom prst="rect">
+            <a:avLst/>
+          </a:prstGeom>
+        </p:spPr>
+      </p:pic>
+      <p:sp>
+        <p:nvSpPr>
+          <p:cNvPr id="10" name="Text 7"/>
+          <p:cNvSpPr/>
+          <p:nvPr/>
+        </p:nvSpPr>
+        <p:spPr>
+          <a:xfrm>
+            <a:off x="1412820" y="1960910"/>
+            <a:ext cx="704910" cy="274290"/>
+          </a:xfrm>
+          <a:prstGeom prst="rect">
+            <a:avLst/>
+          </a:prstGeom>
+          <a:noFill/>
+          <a:ln/>
+        </p:spPr>
+        <p:txBody>
+          <a:bodyPr wrap="square" lIns="0" tIns="0" rIns="0" bIns="0" rtlCol="0" anchor="t">
+            <a:normAutofit/>
+          </a:bodyPr>
+          <a:lstStyle/>
+          <a:p>
+            <a:pPr algn="ctr" indent="0" marL="0">
+              <a:lnSpc>
+                <a:spcPts val="1960"/>
+              </a:lnSpc>
+              <a:buNone/>
+            </a:pPr>
+            <a:r>
+              <a:rPr lang="en-US" sz="1400" b="1" dirty="0">
+                <a:solidFill>
+                  <a:srgbClr val="000000"/>
+                </a:solidFill>
+                <a:latin typeface="Arial" pitchFamily="34" charset="0"/>
+                <a:ea typeface="Arial" pitchFamily="34" charset="-122"/>
+                <a:cs typeface="Arial" pitchFamily="34" charset="-120"/>
+              </a:rPr>
+              <a:t>AI 工具</a:t>
+            </a:r>
+            <a:endParaRPr lang="en-US" sz="1400" dirty="0"/>
+          </a:p>
+        </p:txBody>
+      </p:sp>
+      <p:sp>
+        <p:nvSpPr>
+          <p:cNvPr id="11" name="Text 8"/>
+          <p:cNvSpPr/>
+          <p:nvPr/>
+        </p:nvSpPr>
+        <p:spPr>
+          <a:xfrm>
+            <a:off x="875792" y="2247900"/>
+            <a:ext cx="1779016" cy="452041"/>
+          </a:xfrm>
+          <a:prstGeom prst="rect">
+            <a:avLst/>
+          </a:prstGeom>
+          <a:noFill/>
+          <a:ln/>
+        </p:spPr>
+        <p:txBody>
+          <a:bodyPr wrap="square" lIns="0" tIns="0" rIns="0" bIns="0" rtlCol="0" anchor="t">
+            <a:normAutofit/>
+          </a:bodyPr>
+          <a:lstStyle/>
+          <a:p>
+            <a:pPr algn="ctr" indent="0" marL="0">
               <a:lnSpc>
                 <a:spcPts val="1680"/>
               </a:lnSpc>
@@ -3954,13 +4384,1632 @@
             <a:r>
               <a:rPr lang="en-US" sz="1200" dirty="0">
                 <a:solidFill>
+                  <a:srgbClr val="000000"/>
+                </a:solidFill>
+                <a:latin typeface="Arial" pitchFamily="34" charset="0"/>
+                <a:ea typeface="Arial" pitchFamily="34" charset="-122"/>
+                <a:cs typeface="Arial" pitchFamily="34" charset="-120"/>
+              </a:rPr>
+              <a:t>Claude、ChatGPT、Gemini</a:t>
+            </a:r>
+            <a:endParaRPr lang="en-US" sz="1200" dirty="0"/>
+          </a:p>
+        </p:txBody>
+      </p:sp>
+      <p:sp>
+        <p:nvSpPr>
+          <p:cNvPr id="12" name="Shape 9"/>
+          <p:cNvSpPr/>
+          <p:nvPr/>
+        </p:nvSpPr>
+        <p:spPr>
+          <a:xfrm>
+            <a:off x="819150" y="4387850"/>
+            <a:ext cx="1892300" cy="1130300"/>
+          </a:xfrm>
+          <a:prstGeom prst="rect">
+            <a:avLst/>
+          </a:prstGeom>
+          <a:solidFill>
+            <a:srgbClr val="FFFFFF"/>
+          </a:solidFill>
+          <a:ln w="12700">
+            <a:solidFill>
+              <a:srgbClr val="D9DAD9"/>
+            </a:solidFill>
+            <a:prstDash val="solid"/>
+          </a:ln>
+        </p:spPr>
+      </p:sp>
+      <p:pic>
+        <p:nvPicPr>
+          <p:cNvPr id="13" name="Image 1" descr="Users">    </p:cNvPr>
+          <p:cNvPicPr>
+            <a:picLocks noChangeAspect="1"/>
+          </p:cNvPicPr>
+          <p:nvPr/>
+        </p:nvPicPr>
+        <p:blipFill>
+          <a:blip r:embed="rId2"/>
+          <a:srcRect l="0" r="0" t="0" b="0"/>
+          <a:stretch/>
+        </p:blipFill>
+        <p:spPr>
+          <a:xfrm>
+            <a:off x="1625600" y="4544070"/>
+            <a:ext cx="279400" cy="279400"/>
+          </a:xfrm>
+          <a:prstGeom prst="rect">
+            <a:avLst/>
+          </a:prstGeom>
+        </p:spPr>
+      </p:pic>
+      <p:sp>
+        <p:nvSpPr>
+          <p:cNvPr id="14" name="Text 10"/>
+          <p:cNvSpPr/>
+          <p:nvPr/>
+        </p:nvSpPr>
+        <p:spPr>
+          <a:xfrm>
+            <a:off x="1332989" y="4861570"/>
+            <a:ext cx="864572" cy="274290"/>
+          </a:xfrm>
+          <a:prstGeom prst="rect">
+            <a:avLst/>
+          </a:prstGeom>
+          <a:noFill/>
+          <a:ln/>
+        </p:spPr>
+        <p:txBody>
+          <a:bodyPr wrap="square" lIns="0" tIns="0" rIns="0" bIns="0" rtlCol="0" anchor="t">
+            <a:normAutofit/>
+          </a:bodyPr>
+          <a:lstStyle/>
+          <a:p>
+            <a:pPr algn="ctr" indent="0" marL="0">
+              <a:lnSpc>
+                <a:spcPts val="1960"/>
+              </a:lnSpc>
+              <a:buNone/>
+            </a:pPr>
+            <a:r>
+              <a:rPr lang="en-US" sz="1400" b="1" dirty="0">
+                <a:solidFill>
+                  <a:srgbClr val="000000"/>
+                </a:solidFill>
+                <a:latin typeface="Arial" pitchFamily="34" charset="0"/>
+                <a:ea typeface="Arial" pitchFamily="34" charset="-122"/>
+                <a:cs typeface="Arial" pitchFamily="34" charset="-120"/>
+              </a:rPr>
+              <a:t>企業用戶</a:t>
+            </a:r>
+            <a:endParaRPr lang="en-US" sz="1400" dirty="0"/>
+          </a:p>
+        </p:txBody>
+      </p:sp>
+      <p:sp>
+        <p:nvSpPr>
+          <p:cNvPr id="15" name="Text 11"/>
+          <p:cNvSpPr/>
+          <p:nvPr/>
+        </p:nvSpPr>
+        <p:spPr>
+          <a:xfrm>
+            <a:off x="979666" y="5148560"/>
+            <a:ext cx="1571268" cy="238720"/>
+          </a:xfrm>
+          <a:prstGeom prst="rect">
+            <a:avLst/>
+          </a:prstGeom>
+          <a:noFill/>
+          <a:ln/>
+        </p:spPr>
+        <p:txBody>
+          <a:bodyPr wrap="square" lIns="0" tIns="0" rIns="0" bIns="0" rtlCol="0" anchor="t">
+            <a:normAutofit/>
+          </a:bodyPr>
+          <a:lstStyle/>
+          <a:p>
+            <a:pPr algn="ctr" indent="0" marL="0">
+              <a:lnSpc>
+                <a:spcPts val="1680"/>
+              </a:lnSpc>
+              <a:buNone/>
+            </a:pPr>
+            <a:r>
+              <a:rPr lang="en-US" sz="1200" dirty="0">
+                <a:solidFill>
+                  <a:srgbClr val="000000"/>
+                </a:solidFill>
+                <a:latin typeface="Arial" pitchFamily="34" charset="0"/>
+                <a:ea typeface="Arial" pitchFamily="34" charset="-122"/>
+                <a:cs typeface="Arial" pitchFamily="34" charset="-120"/>
+              </a:rPr>
+              <a:t>使用 AI 工具的員工</a:t>
+            </a:r>
+            <a:endParaRPr lang="en-US" sz="1200" dirty="0"/>
+          </a:p>
+        </p:txBody>
+      </p:sp>
+      <p:sp>
+        <p:nvSpPr>
+          <p:cNvPr id="16" name="Shape 12"/>
+          <p:cNvSpPr/>
+          <p:nvPr/>
+        </p:nvSpPr>
+        <p:spPr>
+          <a:xfrm>
+            <a:off x="4124325" y="1660525"/>
+            <a:ext cx="1885950" cy="3854450"/>
+          </a:xfrm>
+          <a:prstGeom prst="rect">
+            <a:avLst/>
+          </a:prstGeom>
+          <a:solidFill>
+            <a:srgbClr val="FFFFFF"/>
+          </a:solidFill>
+          <a:ln w="19050">
+            <a:solidFill>
+              <a:srgbClr val="01A964"/>
+            </a:solidFill>
+            <a:prstDash val="solid"/>
+          </a:ln>
+        </p:spPr>
+      </p:sp>
+      <p:pic>
+        <p:nvPicPr>
+          <p:cNvPr id="17" name="Image 2" descr="Globe">    </p:cNvPr>
+          <p:cNvPicPr>
+            <a:picLocks noChangeAspect="1"/>
+          </p:cNvPicPr>
+          <p:nvPr/>
+        </p:nvPicPr>
+        <p:blipFill>
+          <a:blip r:embed="rId3"/>
+          <a:srcRect l="0" r="0" t="0" b="0"/>
+          <a:stretch/>
+        </p:blipFill>
+        <p:spPr>
+          <a:xfrm>
+            <a:off x="4889500" y="2752080"/>
+            <a:ext cx="355600" cy="355600"/>
+          </a:xfrm>
+          <a:prstGeom prst="rect">
+            <a:avLst/>
+          </a:prstGeom>
+        </p:spPr>
+      </p:pic>
+      <p:sp>
+        <p:nvSpPr>
+          <p:cNvPr id="18" name="Text 13"/>
+          <p:cNvSpPr/>
+          <p:nvPr/>
+        </p:nvSpPr>
+        <p:spPr>
+          <a:xfrm>
+            <a:off x="4148440" y="3183880"/>
+            <a:ext cx="1837670" cy="274290"/>
+          </a:xfrm>
+          <a:prstGeom prst="rect">
+            <a:avLst/>
+          </a:prstGeom>
+          <a:noFill/>
+          <a:ln/>
+        </p:spPr>
+        <p:txBody>
+          <a:bodyPr wrap="square" lIns="0" tIns="0" rIns="0" bIns="0" rtlCol="0" anchor="t">
+            <a:normAutofit/>
+          </a:bodyPr>
+          <a:lstStyle/>
+          <a:p>
+            <a:pPr algn="ctr" indent="0" marL="0">
+              <a:lnSpc>
+                <a:spcPts val="1960"/>
+              </a:lnSpc>
+              <a:buNone/>
+            </a:pPr>
+            <a:r>
+              <a:rPr lang="en-US" sz="1400" b="1" dirty="0">
+                <a:solidFill>
+                  <a:srgbClr val="036B3F"/>
+                </a:solidFill>
+                <a:latin typeface="Arial" pitchFamily="34" charset="0"/>
+                <a:ea typeface="Arial" pitchFamily="34" charset="-122"/>
+                <a:cs typeface="Arial" pitchFamily="34" charset="-120"/>
+              </a:rPr>
+              <a:t>Apigee X Platform</a:t>
+            </a:r>
+            <a:endParaRPr lang="en-US" sz="1400" dirty="0"/>
+          </a:p>
+        </p:txBody>
+      </p:sp>
+      <p:sp>
+        <p:nvSpPr>
+          <p:cNvPr id="19" name="Text 14"/>
+          <p:cNvSpPr/>
+          <p:nvPr/>
+        </p:nvSpPr>
+        <p:spPr>
+          <a:xfrm>
+            <a:off x="4411216" y="3508970"/>
+            <a:ext cx="1312118" cy="939800"/>
+          </a:xfrm>
+          <a:prstGeom prst="rect">
+            <a:avLst/>
+          </a:prstGeom>
+          <a:noFill/>
+          <a:ln/>
+        </p:spPr>
+        <p:txBody>
+          <a:bodyPr wrap="square" lIns="0" tIns="0" rIns="0" bIns="0" rtlCol="0" anchor="t">
+            <a:normAutofit/>
+          </a:bodyPr>
+          <a:lstStyle/>
+          <a:p>
+            <a:pPr algn="ctr" indent="0" marL="0">
+              <a:lnSpc>
+                <a:spcPts val="1800"/>
+              </a:lnSpc>
+              <a:buNone/>
+            </a:pPr>
+            <a:r>
+              <a:rPr lang="en-US" sz="1200" dirty="0">
+                <a:solidFill>
+                  <a:srgbClr val="000000"/>
+                </a:solidFill>
+                <a:latin typeface="Arial" pitchFamily="34" charset="0"/>
+                <a:ea typeface="Arial" pitchFamily="34" charset="-122"/>
+                <a:cs typeface="Arial" pitchFamily="34" charset="-120"/>
+              </a:rPr>
+              <a:t>Gateway 對外入口</a:t>
+            </a:r>
+            <a:endParaRPr lang="en-US" sz="1200" dirty="0"/>
+          </a:p>
+          <a:p>
+            <a:pPr algn="ctr" indent="0" marL="0">
+              <a:lnSpc>
+                <a:spcPts val="1800"/>
+              </a:lnSpc>
+              <a:buNone/>
+            </a:pPr>
+            <a:r>
+              <a:rPr lang="en-US" sz="1200" dirty="0">
+                <a:solidFill>
+                  <a:srgbClr val="000000"/>
+                </a:solidFill>
+                <a:latin typeface="Arial" pitchFamily="34" charset="0"/>
+                <a:ea typeface="Arial" pitchFamily="34" charset="-122"/>
+                <a:cs typeface="Arial" pitchFamily="34" charset="-120"/>
+              </a:rPr>
+              <a:t>提供 MCP</a:t>
+            </a:r>
+            <a:endParaRPr lang="en-US" sz="1200" dirty="0"/>
+          </a:p>
+          <a:p>
+            <a:pPr algn="ctr" indent="0" marL="0">
+              <a:lnSpc>
+                <a:spcPts val="1800"/>
+              </a:lnSpc>
+              <a:buNone/>
+            </a:pPr>
+            <a:r>
+              <a:rPr lang="en-US" sz="1200" dirty="0">
+                <a:solidFill>
+                  <a:srgbClr val="000000"/>
+                </a:solidFill>
+                <a:latin typeface="Arial" pitchFamily="34" charset="0"/>
+                <a:ea typeface="Arial" pitchFamily="34" charset="-122"/>
+                <a:cs typeface="Arial" pitchFamily="34" charset="-120"/>
+              </a:rPr>
+              <a:t>驗證 Token</a:t>
+            </a:r>
+            <a:endParaRPr lang="en-US" sz="1200" dirty="0"/>
+          </a:p>
+          <a:p>
+            <a:pPr algn="ctr" indent="0" marL="0">
+              <a:lnSpc>
+                <a:spcPts val="1800"/>
+              </a:lnSpc>
+              <a:buNone/>
+            </a:pPr>
+            <a:r>
+              <a:rPr lang="en-US" sz="1200" dirty="0">
+                <a:solidFill>
+                  <a:srgbClr val="000000"/>
+                </a:solidFill>
+                <a:latin typeface="Arial" pitchFamily="34" charset="0"/>
+                <a:ea typeface="Arial" pitchFamily="34" charset="-122"/>
+                <a:cs typeface="Arial" pitchFamily="34" charset="-120"/>
+              </a:rPr>
+              <a:t>轉送請求</a:t>
+            </a:r>
+            <a:endParaRPr lang="en-US" sz="1200" dirty="0"/>
+          </a:p>
+        </p:txBody>
+      </p:sp>
+      <p:sp>
+        <p:nvSpPr>
+          <p:cNvPr id="20" name="Shape 15"/>
+          <p:cNvSpPr/>
+          <p:nvPr/>
+        </p:nvSpPr>
+        <p:spPr>
+          <a:xfrm>
+            <a:off x="6781800" y="4476750"/>
+            <a:ext cx="1778000" cy="1016000"/>
+          </a:xfrm>
+          <a:prstGeom prst="rect">
+            <a:avLst/>
+          </a:prstGeom>
+          <a:solidFill>
+            <a:srgbClr val="036B3F"/>
+          </a:solidFill>
+          <a:ln/>
+        </p:spPr>
+      </p:sp>
+      <p:pic>
+        <p:nvPicPr>
+          <p:cNvPr id="21" name="Image 3" descr="Lock">    </p:cNvPr>
+          <p:cNvPicPr>
+            <a:picLocks noChangeAspect="1"/>
+          </p:cNvPicPr>
+          <p:nvPr/>
+        </p:nvPicPr>
+        <p:blipFill>
+          <a:blip r:embed="rId4"/>
+          <a:srcRect l="0" r="0" t="0" b="0"/>
+          <a:stretch/>
+        </p:blipFill>
+        <p:spPr>
+          <a:xfrm>
+            <a:off x="7531100" y="4575820"/>
+            <a:ext cx="279400" cy="279400"/>
+          </a:xfrm>
+          <a:prstGeom prst="rect">
+            <a:avLst/>
+          </a:prstGeom>
+        </p:spPr>
+      </p:pic>
+      <p:sp>
+        <p:nvSpPr>
+          <p:cNvPr id="22" name="Text 16"/>
+          <p:cNvSpPr/>
+          <p:nvPr/>
+        </p:nvSpPr>
+        <p:spPr>
+          <a:xfrm>
+            <a:off x="6983095" y="4893320"/>
+            <a:ext cx="1375410" cy="274290"/>
+          </a:xfrm>
+          <a:prstGeom prst="rect">
+            <a:avLst/>
+          </a:prstGeom>
+          <a:noFill/>
+          <a:ln/>
+        </p:spPr>
+        <p:txBody>
+          <a:bodyPr wrap="square" lIns="0" tIns="0" rIns="0" bIns="0" rtlCol="0" anchor="t">
+            <a:normAutofit/>
+          </a:bodyPr>
+          <a:lstStyle/>
+          <a:p>
+            <a:pPr algn="ctr" indent="0" marL="0">
+              <a:lnSpc>
+                <a:spcPts val="1960"/>
+              </a:lnSpc>
+              <a:buNone/>
+            </a:pPr>
+            <a:r>
+              <a:rPr lang="en-US" sz="1400" b="1" dirty="0">
+                <a:solidFill>
+                  <a:srgbClr val="FFFFFF"/>
+                </a:solidFill>
+                <a:latin typeface="Arial" pitchFamily="34" charset="0"/>
+                <a:ea typeface="Arial" pitchFamily="34" charset="-122"/>
+                <a:cs typeface="Arial" pitchFamily="34" charset="-120"/>
+              </a:rPr>
+              <a:t>OAuth Server</a:t>
+            </a:r>
+            <a:endParaRPr lang="en-US" sz="1400" dirty="0"/>
+          </a:p>
+        </p:txBody>
+      </p:sp>
+      <p:sp>
+        <p:nvSpPr>
+          <p:cNvPr id="23" name="Text 17"/>
+          <p:cNvSpPr/>
+          <p:nvPr/>
+        </p:nvSpPr>
+        <p:spPr>
+          <a:xfrm>
+            <a:off x="6837124" y="5180310"/>
+            <a:ext cx="1667351" cy="238720"/>
+          </a:xfrm>
+          <a:prstGeom prst="rect">
+            <a:avLst/>
+          </a:prstGeom>
+          <a:noFill/>
+          <a:ln/>
+        </p:spPr>
+        <p:txBody>
+          <a:bodyPr wrap="square" lIns="0" tIns="0" rIns="0" bIns="0" rtlCol="0" anchor="t">
+            <a:normAutofit/>
+          </a:bodyPr>
+          <a:lstStyle/>
+          <a:p>
+            <a:pPr algn="ctr" indent="0" marL="0">
+              <a:lnSpc>
+                <a:spcPts val="1680"/>
+              </a:lnSpc>
+              <a:buNone/>
+            </a:pPr>
+            <a:r>
+              <a:rPr lang="en-US" sz="1200" dirty="0">
+                <a:solidFill>
+                  <a:srgbClr val="FFFFFF"/>
+                </a:solidFill>
+                <a:latin typeface="Arial" pitchFamily="34" charset="0"/>
+                <a:ea typeface="Arial" pitchFamily="34" charset="-122"/>
+                <a:cs typeface="Arial" pitchFamily="34" charset="-120"/>
+              </a:rPr>
+              <a:t>負責登入、發通行證</a:t>
+            </a:r>
+            <a:endParaRPr lang="en-US" sz="1200" dirty="0"/>
+          </a:p>
+        </p:txBody>
+      </p:sp>
+      <p:sp>
+        <p:nvSpPr>
+          <p:cNvPr id="24" name="Shape 18"/>
+          <p:cNvSpPr/>
+          <p:nvPr/>
+        </p:nvSpPr>
+        <p:spPr>
+          <a:xfrm>
+            <a:off x="9201150" y="1689100"/>
+            <a:ext cx="2019300" cy="1003300"/>
+          </a:xfrm>
+          <a:prstGeom prst="rect">
+            <a:avLst/>
+          </a:prstGeom>
+          <a:solidFill>
+            <a:srgbClr val="FFFFFF"/>
+          </a:solidFill>
+          <a:ln w="12700">
+            <a:solidFill>
+              <a:srgbClr val="D9DAD9"/>
+            </a:solidFill>
+            <a:prstDash val="solid"/>
+          </a:ln>
+        </p:spPr>
+      </p:sp>
+      <p:pic>
+        <p:nvPicPr>
+          <p:cNvPr id="25" name="Image 4" descr="Link">    </p:cNvPr>
+          <p:cNvPicPr>
+            <a:picLocks noChangeAspect="1"/>
+          </p:cNvPicPr>
+          <p:nvPr/>
+        </p:nvPicPr>
+        <p:blipFill>
+          <a:blip r:embed="rId5"/>
+          <a:srcRect l="0" r="0" t="0" b="0"/>
+          <a:stretch/>
+        </p:blipFill>
+        <p:spPr>
+          <a:xfrm>
+            <a:off x="10071100" y="1781820"/>
+            <a:ext cx="279400" cy="279400"/>
+          </a:xfrm>
+          <a:prstGeom prst="rect">
+            <a:avLst/>
+          </a:prstGeom>
+        </p:spPr>
+      </p:pic>
+      <p:sp>
+        <p:nvSpPr>
+          <p:cNvPr id="26" name="Text 19"/>
+          <p:cNvSpPr/>
+          <p:nvPr/>
+        </p:nvSpPr>
+        <p:spPr>
+          <a:xfrm>
+            <a:off x="9787176" y="2099320"/>
+            <a:ext cx="847249" cy="274290"/>
+          </a:xfrm>
+          <a:prstGeom prst="rect">
+            <a:avLst/>
+          </a:prstGeom>
+          <a:noFill/>
+          <a:ln/>
+        </p:spPr>
+        <p:txBody>
+          <a:bodyPr wrap="square" lIns="0" tIns="0" rIns="0" bIns="0" rtlCol="0" anchor="t">
+            <a:normAutofit/>
+          </a:bodyPr>
+          <a:lstStyle/>
+          <a:p>
+            <a:pPr algn="ctr" indent="0" marL="0">
+              <a:lnSpc>
+                <a:spcPts val="1960"/>
+              </a:lnSpc>
+              <a:buNone/>
+            </a:pPr>
+            <a:r>
+              <a:rPr lang="en-US" sz="1400" b="1" dirty="0">
+                <a:solidFill>
+                  <a:srgbClr val="000000"/>
+                </a:solidFill>
+                <a:latin typeface="Arial" pitchFamily="34" charset="0"/>
+                <a:ea typeface="Arial" pitchFamily="34" charset="-122"/>
+                <a:cs typeface="Arial" pitchFamily="34" charset="-120"/>
+              </a:rPr>
+              <a:t>API 服務</a:t>
+            </a:r>
+            <a:endParaRPr lang="en-US" sz="1400" dirty="0"/>
+          </a:p>
+        </p:txBody>
+      </p:sp>
+      <p:sp>
+        <p:nvSpPr>
+          <p:cNvPr id="27" name="Text 20"/>
+          <p:cNvSpPr/>
+          <p:nvPr/>
+        </p:nvSpPr>
+        <p:spPr>
+          <a:xfrm>
+            <a:off x="9661808" y="2386310"/>
+            <a:ext cx="1097935" cy="238720"/>
+          </a:xfrm>
+          <a:prstGeom prst="rect">
+            <a:avLst/>
+          </a:prstGeom>
+          <a:noFill/>
+          <a:ln/>
+        </p:spPr>
+        <p:txBody>
+          <a:bodyPr wrap="square" lIns="0" tIns="0" rIns="0" bIns="0" rtlCol="0" anchor="t">
+            <a:normAutofit/>
+          </a:bodyPr>
+          <a:lstStyle/>
+          <a:p>
+            <a:pPr algn="ctr" indent="0" marL="0">
+              <a:lnSpc>
+                <a:spcPts val="1680"/>
+              </a:lnSpc>
+              <a:buNone/>
+            </a:pPr>
+            <a:r>
+              <a:rPr lang="en-US" sz="1200" dirty="0">
+                <a:solidFill>
+                  <a:srgbClr val="000000"/>
+                </a:solidFill>
+                <a:latin typeface="Arial" pitchFamily="34" charset="0"/>
+                <a:ea typeface="Arial" pitchFamily="34" charset="-122"/>
+                <a:cs typeface="Arial" pitchFamily="34" charset="-120"/>
+              </a:rPr>
+              <a:t>API Bank API</a:t>
+            </a:r>
+            <a:endParaRPr lang="en-US" sz="1200" dirty="0"/>
+          </a:p>
+        </p:txBody>
+      </p:sp>
+      <p:sp>
+        <p:nvSpPr>
+          <p:cNvPr id="28" name="Shape 21"/>
+          <p:cNvSpPr/>
+          <p:nvPr/>
+        </p:nvSpPr>
+        <p:spPr>
+          <a:xfrm>
+            <a:off x="9201150" y="3054350"/>
+            <a:ext cx="2019300" cy="1003300"/>
+          </a:xfrm>
+          <a:prstGeom prst="rect">
+            <a:avLst/>
+          </a:prstGeom>
+          <a:solidFill>
+            <a:srgbClr val="FFFFFF"/>
+          </a:solidFill>
+          <a:ln w="12700">
+            <a:solidFill>
+              <a:srgbClr val="D9DAD9"/>
+            </a:solidFill>
+            <a:prstDash val="solid"/>
+          </a:ln>
+        </p:spPr>
+      </p:sp>
+      <p:pic>
+        <p:nvPicPr>
+          <p:cNvPr id="29" name="Image 5" descr="Database">    </p:cNvPr>
+          <p:cNvPicPr>
+            <a:picLocks noChangeAspect="1"/>
+          </p:cNvPicPr>
+          <p:nvPr/>
+        </p:nvPicPr>
+        <p:blipFill>
+          <a:blip r:embed="rId6"/>
+          <a:srcRect l="0" r="0" t="0" b="0"/>
+          <a:stretch/>
+        </p:blipFill>
+        <p:spPr>
+          <a:xfrm>
+            <a:off x="10071100" y="3147070"/>
+            <a:ext cx="279400" cy="279400"/>
+          </a:xfrm>
+          <a:prstGeom prst="rect">
+            <a:avLst/>
+          </a:prstGeom>
+        </p:spPr>
+      </p:pic>
+      <p:sp>
+        <p:nvSpPr>
+          <p:cNvPr id="30" name="Text 22"/>
+          <p:cNvSpPr/>
+          <p:nvPr/>
+        </p:nvSpPr>
+        <p:spPr>
+          <a:xfrm>
+            <a:off x="9388614" y="3464570"/>
+            <a:ext cx="1644372" cy="274290"/>
+          </a:xfrm>
+          <a:prstGeom prst="rect">
+            <a:avLst/>
+          </a:prstGeom>
+          <a:noFill/>
+          <a:ln/>
+        </p:spPr>
+        <p:txBody>
+          <a:bodyPr wrap="square" lIns="0" tIns="0" rIns="0" bIns="0" rtlCol="0" anchor="t">
+            <a:normAutofit/>
+          </a:bodyPr>
+          <a:lstStyle/>
+          <a:p>
+            <a:pPr algn="ctr" indent="0" marL="0">
+              <a:lnSpc>
+                <a:spcPts val="1960"/>
+              </a:lnSpc>
+              <a:buNone/>
+            </a:pPr>
+            <a:r>
+              <a:rPr lang="en-US" sz="1400" b="1" dirty="0">
+                <a:solidFill>
+                  <a:srgbClr val="000000"/>
+                </a:solidFill>
+                <a:latin typeface="Arial" pitchFamily="34" charset="0"/>
+                <a:ea typeface="Arial" pitchFamily="34" charset="-122"/>
+                <a:cs typeface="Arial" pitchFamily="34" charset="-120"/>
+              </a:rPr>
+              <a:t>API Bank 資料庫</a:t>
+            </a:r>
+            <a:endParaRPr lang="en-US" sz="1400" dirty="0"/>
+          </a:p>
+        </p:txBody>
+      </p:sp>
+      <p:sp>
+        <p:nvSpPr>
+          <p:cNvPr id="31" name="Text 23"/>
+          <p:cNvSpPr/>
+          <p:nvPr/>
+        </p:nvSpPr>
+        <p:spPr>
+          <a:xfrm>
+            <a:off x="9667463" y="3751560"/>
+            <a:ext cx="1086624" cy="238720"/>
+          </a:xfrm>
+          <a:prstGeom prst="rect">
+            <a:avLst/>
+          </a:prstGeom>
+          <a:noFill/>
+          <a:ln/>
+        </p:spPr>
+        <p:txBody>
+          <a:bodyPr wrap="square" lIns="0" tIns="0" rIns="0" bIns="0" rtlCol="0" anchor="t">
+            <a:normAutofit/>
+          </a:bodyPr>
+          <a:lstStyle/>
+          <a:p>
+            <a:pPr algn="ctr" indent="0" marL="0">
+              <a:lnSpc>
+                <a:spcPts val="1680"/>
+              </a:lnSpc>
+              <a:buNone/>
+            </a:pPr>
+            <a:r>
+              <a:rPr lang="en-US" sz="1200" dirty="0">
+                <a:solidFill>
+                  <a:srgbClr val="000000"/>
+                </a:solidFill>
+                <a:latin typeface="Arial" pitchFamily="34" charset="0"/>
+                <a:ea typeface="Arial" pitchFamily="34" charset="-122"/>
+                <a:cs typeface="Arial" pitchFamily="34" charset="-120"/>
+              </a:rPr>
+              <a:t>API 相關資料</a:t>
+            </a:r>
+            <a:endParaRPr lang="en-US" sz="1200" dirty="0"/>
+          </a:p>
+        </p:txBody>
+      </p:sp>
+      <p:sp>
+        <p:nvSpPr>
+          <p:cNvPr id="32" name="Shape 24"/>
+          <p:cNvSpPr/>
+          <p:nvPr/>
+        </p:nvSpPr>
+        <p:spPr>
+          <a:xfrm>
+            <a:off x="9201150" y="4292600"/>
+            <a:ext cx="2019300" cy="1225550"/>
+          </a:xfrm>
+          <a:prstGeom prst="rect">
+            <a:avLst/>
+          </a:prstGeom>
+          <a:solidFill>
+            <a:srgbClr val="FFFFFF"/>
+          </a:solidFill>
+          <a:ln w="12700">
+            <a:solidFill>
+              <a:srgbClr val="D9DAD9"/>
+            </a:solidFill>
+            <a:prstDash val="solid"/>
+          </a:ln>
+        </p:spPr>
+      </p:sp>
+      <p:pic>
+        <p:nvPicPr>
+          <p:cNvPr id="33" name="Image 6" descr="Database">    </p:cNvPr>
+          <p:cNvPicPr>
+            <a:picLocks noChangeAspect="1"/>
+          </p:cNvPicPr>
+          <p:nvPr/>
+        </p:nvPicPr>
+        <p:blipFill>
+          <a:blip r:embed="rId7"/>
+          <a:srcRect l="0" r="0" t="0" b="0"/>
+          <a:stretch/>
+        </p:blipFill>
+        <p:spPr>
+          <a:xfrm>
+            <a:off x="10071100" y="4389785"/>
+            <a:ext cx="279400" cy="279400"/>
+          </a:xfrm>
+          <a:prstGeom prst="rect">
+            <a:avLst/>
+          </a:prstGeom>
+        </p:spPr>
+      </p:pic>
+      <p:sp>
+        <p:nvSpPr>
+          <p:cNvPr id="34" name="Text 25"/>
+          <p:cNvSpPr/>
+          <p:nvPr/>
+        </p:nvSpPr>
+        <p:spPr>
+          <a:xfrm>
+            <a:off x="9608046" y="4707285"/>
+            <a:ext cx="1205508" cy="274290"/>
+          </a:xfrm>
+          <a:prstGeom prst="rect">
+            <a:avLst/>
+          </a:prstGeom>
+          <a:noFill/>
+          <a:ln/>
+        </p:spPr>
+        <p:txBody>
+          <a:bodyPr wrap="square" lIns="0" tIns="0" rIns="0" bIns="0" rtlCol="0" anchor="t">
+            <a:normAutofit/>
+          </a:bodyPr>
+          <a:lstStyle/>
+          <a:p>
+            <a:pPr algn="ctr" indent="0" marL="0">
+              <a:lnSpc>
+                <a:spcPts val="1960"/>
+              </a:lnSpc>
+              <a:buNone/>
+            </a:pPr>
+            <a:r>
+              <a:rPr lang="en-US" sz="1400" b="1" dirty="0">
+                <a:solidFill>
+                  <a:srgbClr val="000000"/>
+                </a:solidFill>
+                <a:latin typeface="Arial" pitchFamily="34" charset="0"/>
+                <a:ea typeface="Arial" pitchFamily="34" charset="-122"/>
+                <a:cs typeface="Arial" pitchFamily="34" charset="-120"/>
+              </a:rPr>
+              <a:t>GMB 資料庫</a:t>
+            </a:r>
+            <a:endParaRPr lang="en-US" sz="1400" dirty="0"/>
+          </a:p>
+        </p:txBody>
+      </p:sp>
+      <p:sp>
+        <p:nvSpPr>
+          <p:cNvPr id="35" name="Text 26"/>
+          <p:cNvSpPr/>
+          <p:nvPr/>
+        </p:nvSpPr>
+        <p:spPr>
+          <a:xfrm>
+            <a:off x="9567863" y="4994275"/>
+            <a:ext cx="1285875" cy="452041"/>
+          </a:xfrm>
+          <a:prstGeom prst="rect">
+            <a:avLst/>
+          </a:prstGeom>
+          <a:noFill/>
+          <a:ln/>
+        </p:spPr>
+        <p:txBody>
+          <a:bodyPr wrap="square" lIns="0" tIns="0" rIns="0" bIns="0" rtlCol="0" anchor="t">
+            <a:normAutofit/>
+          </a:bodyPr>
+          <a:lstStyle/>
+          <a:p>
+            <a:pPr algn="ctr" indent="0" marL="0">
+              <a:lnSpc>
+                <a:spcPts val="1680"/>
+              </a:lnSpc>
+              <a:buNone/>
+            </a:pPr>
+            <a:r>
+              <a:rPr lang="en-US" sz="1200" dirty="0">
+                <a:solidFill>
+                  <a:srgbClr val="000000"/>
+                </a:solidFill>
+                <a:latin typeface="Arial" pitchFamily="34" charset="0"/>
+                <a:ea typeface="Arial" pitchFamily="34" charset="-122"/>
+                <a:cs typeface="Arial" pitchFamily="34" charset="-120"/>
+              </a:rPr>
+              <a:t>統編、帳號、密碼</a:t>
+            </a:r>
+            <a:endParaRPr lang="en-US" sz="1200" dirty="0"/>
+          </a:p>
+          <a:p>
+            <a:pPr algn="ctr" indent="0" marL="0">
+              <a:lnSpc>
+                <a:spcPts val="1680"/>
+              </a:lnSpc>
+              <a:buNone/>
+            </a:pPr>
+            <a:r>
+              <a:rPr lang="en-US" sz="1200" dirty="0">
+                <a:solidFill>
+                  <a:srgbClr val="000000"/>
+                </a:solidFill>
+                <a:latin typeface="Arial" pitchFamily="34" charset="0"/>
+                <a:ea typeface="Arial" pitchFamily="34" charset="-122"/>
+                <a:cs typeface="Arial" pitchFamily="34" charset="-120"/>
+              </a:rPr>
+              <a:t>Token 資訊</a:t>
+            </a:r>
+            <a:endParaRPr lang="en-US" sz="1200" dirty="0"/>
+          </a:p>
+        </p:txBody>
+      </p:sp>
+      <p:pic>
+        <p:nvPicPr>
+          <p:cNvPr id="36" name="Image 7" descr="connector">    </p:cNvPr>
+          <p:cNvPicPr>
+            <a:picLocks noChangeAspect="1"/>
+          </p:cNvPicPr>
+          <p:nvPr/>
+        </p:nvPicPr>
+        <p:blipFill>
+          <a:blip r:embed="rId8"/>
+          <a:srcRect l="0" r="0" t="0" b="0"/>
+          <a:stretch/>
+        </p:blipFill>
+        <p:spPr>
+          <a:xfrm>
+            <a:off x="1701800" y="2730500"/>
+            <a:ext cx="127000" cy="1714500"/>
+          </a:xfrm>
+          <a:prstGeom prst="rect">
+            <a:avLst/>
+          </a:prstGeom>
+        </p:spPr>
+      </p:pic>
+      <p:pic>
+        <p:nvPicPr>
+          <p:cNvPr id="37" name="Image 8" descr="connector">    </p:cNvPr>
+          <p:cNvPicPr>
+            <a:picLocks noChangeAspect="1"/>
+          </p:cNvPicPr>
+          <p:nvPr/>
+        </p:nvPicPr>
+        <p:blipFill>
+          <a:blip r:embed="rId9"/>
+          <a:srcRect l="0" r="0" t="0" b="0"/>
+          <a:stretch/>
+        </p:blipFill>
+        <p:spPr>
+          <a:xfrm>
+            <a:off x="2654300" y="4921250"/>
+            <a:ext cx="1524000" cy="127000"/>
+          </a:xfrm>
+          <a:prstGeom prst="rect">
+            <a:avLst/>
+          </a:prstGeom>
+        </p:spPr>
+      </p:pic>
+      <p:pic>
+        <p:nvPicPr>
+          <p:cNvPr id="38" name="Image 9" descr="connector">    </p:cNvPr>
+          <p:cNvPicPr>
+            <a:picLocks noChangeAspect="1"/>
+          </p:cNvPicPr>
+          <p:nvPr/>
+        </p:nvPicPr>
+        <p:blipFill>
+          <a:blip r:embed="rId10"/>
+          <a:srcRect l="0" r="0" t="0" b="0"/>
+          <a:stretch/>
+        </p:blipFill>
+        <p:spPr>
+          <a:xfrm>
+            <a:off x="2654300" y="2413000"/>
+            <a:ext cx="1524000" cy="127000"/>
+          </a:xfrm>
+          <a:prstGeom prst="rect">
+            <a:avLst/>
+          </a:prstGeom>
+        </p:spPr>
+      </p:pic>
+      <p:pic>
+        <p:nvPicPr>
+          <p:cNvPr id="39" name="Image 10" descr="connector">    </p:cNvPr>
+          <p:cNvPicPr>
+            <a:picLocks noChangeAspect="1"/>
+          </p:cNvPicPr>
+          <p:nvPr/>
+        </p:nvPicPr>
+        <p:blipFill>
+          <a:blip r:embed="rId11"/>
+          <a:srcRect l="0" r="0" t="0" b="0"/>
+          <a:stretch/>
+        </p:blipFill>
+        <p:spPr>
+          <a:xfrm>
+            <a:off x="2654300" y="1905000"/>
+            <a:ext cx="1524000" cy="127000"/>
+          </a:xfrm>
+          <a:prstGeom prst="rect">
+            <a:avLst/>
+          </a:prstGeom>
+        </p:spPr>
+      </p:pic>
+      <p:pic>
+        <p:nvPicPr>
+          <p:cNvPr id="40" name="Image 11" descr="connector">    </p:cNvPr>
+          <p:cNvPicPr>
+            <a:picLocks noChangeAspect="1"/>
+          </p:cNvPicPr>
+          <p:nvPr/>
+        </p:nvPicPr>
+        <p:blipFill>
+          <a:blip r:embed="rId12"/>
+          <a:srcRect l="0" r="0" t="0" b="0"/>
+          <a:stretch/>
+        </p:blipFill>
+        <p:spPr>
+          <a:xfrm>
+            <a:off x="5956300" y="4921250"/>
+            <a:ext cx="889000" cy="127000"/>
+          </a:xfrm>
+          <a:prstGeom prst="rect">
+            <a:avLst/>
+          </a:prstGeom>
+        </p:spPr>
+      </p:pic>
+      <p:pic>
+        <p:nvPicPr>
+          <p:cNvPr id="41" name="Image 12" descr="connector">    </p:cNvPr>
+          <p:cNvPicPr>
+            <a:picLocks noChangeAspect="1"/>
+          </p:cNvPicPr>
+          <p:nvPr/>
+        </p:nvPicPr>
+        <p:blipFill>
+          <a:blip r:embed="rId13"/>
+          <a:srcRect l="0" r="0" t="0" b="0"/>
+          <a:stretch/>
+        </p:blipFill>
+        <p:spPr>
+          <a:xfrm>
+            <a:off x="8496300" y="4921250"/>
+            <a:ext cx="762000" cy="127000"/>
+          </a:xfrm>
+          <a:prstGeom prst="rect">
+            <a:avLst/>
+          </a:prstGeom>
+        </p:spPr>
+      </p:pic>
+      <p:pic>
+        <p:nvPicPr>
+          <p:cNvPr id="42" name="Image 13" descr="connector">    </p:cNvPr>
+          <p:cNvPicPr>
+            <a:picLocks noChangeAspect="1"/>
+          </p:cNvPicPr>
+          <p:nvPr/>
+        </p:nvPicPr>
+        <p:blipFill>
+          <a:blip r:embed="rId14"/>
+          <a:srcRect l="0" r="0" t="0" b="0"/>
+          <a:stretch/>
+        </p:blipFill>
+        <p:spPr>
+          <a:xfrm>
+            <a:off x="5956300" y="2127250"/>
+            <a:ext cx="3302000" cy="127000"/>
+          </a:xfrm>
+          <a:prstGeom prst="rect">
+            <a:avLst/>
+          </a:prstGeom>
+        </p:spPr>
+      </p:pic>
+      <p:pic>
+        <p:nvPicPr>
+          <p:cNvPr id="43" name="Image 14" descr="connector">    </p:cNvPr>
+          <p:cNvPicPr>
+            <a:picLocks noChangeAspect="1"/>
+          </p:cNvPicPr>
+          <p:nvPr/>
+        </p:nvPicPr>
+        <p:blipFill>
+          <a:blip r:embed="rId15"/>
+          <a:srcRect l="0" r="0" t="0" b="0"/>
+          <a:stretch/>
+        </p:blipFill>
+        <p:spPr>
+          <a:xfrm>
+            <a:off x="10147300" y="2635250"/>
+            <a:ext cx="127000" cy="476250"/>
+          </a:xfrm>
+          <a:prstGeom prst="rect">
+            <a:avLst/>
+          </a:prstGeom>
+        </p:spPr>
+      </p:pic>
+      <p:sp>
+        <p:nvSpPr>
+          <p:cNvPr id="44" name="Text 27"/>
+          <p:cNvSpPr/>
+          <p:nvPr/>
+        </p:nvSpPr>
+        <p:spPr>
+          <a:xfrm>
+            <a:off x="1866900" y="3238500"/>
+            <a:ext cx="876300" cy="452041"/>
+          </a:xfrm>
+          <a:prstGeom prst="rect">
+            <a:avLst/>
+          </a:prstGeom>
+          <a:noFill/>
+          <a:ln/>
+        </p:spPr>
+        <p:txBody>
+          <a:bodyPr wrap="square" lIns="0" tIns="0" rIns="0" bIns="0" rtlCol="0" anchor="t">
+            <a:normAutofit/>
+          </a:bodyPr>
+          <a:lstStyle/>
+          <a:p>
+            <a:pPr algn="l" indent="0" marL="0">
+              <a:lnSpc>
+                <a:spcPts val="1680"/>
+              </a:lnSpc>
+              <a:buNone/>
+            </a:pPr>
+            <a:r>
+              <a:rPr lang="en-US" sz="1200" b="1" dirty="0">
+                <a:solidFill>
+                  <a:srgbClr val="036B3F"/>
+                </a:solidFill>
+                <a:latin typeface="Arial" pitchFamily="34" charset="0"/>
+                <a:ea typeface="Arial" pitchFamily="34" charset="-122"/>
+                <a:cs typeface="Arial" pitchFamily="34" charset="-120"/>
+              </a:rPr>
+              <a:t>① 設定 MCP</a:t>
+            </a:r>
+            <a:endParaRPr lang="en-US" sz="1200" dirty="0"/>
+          </a:p>
+        </p:txBody>
+      </p:sp>
+      <p:sp>
+        <p:nvSpPr>
+          <p:cNvPr id="45" name="Text 28"/>
+          <p:cNvSpPr/>
+          <p:nvPr/>
+        </p:nvSpPr>
+        <p:spPr>
+          <a:xfrm>
+            <a:off x="2794000" y="4686300"/>
+            <a:ext cx="1320800" cy="238720"/>
+          </a:xfrm>
+          <a:prstGeom prst="rect">
+            <a:avLst/>
+          </a:prstGeom>
+          <a:noFill/>
+          <a:ln/>
+        </p:spPr>
+        <p:txBody>
+          <a:bodyPr wrap="square" lIns="0" tIns="0" rIns="0" bIns="0" rtlCol="0" anchor="t">
+            <a:normAutofit/>
+          </a:bodyPr>
+          <a:lstStyle/>
+          <a:p>
+            <a:pPr algn="l" indent="0" marL="0">
+              <a:lnSpc>
+                <a:spcPts val="1680"/>
+              </a:lnSpc>
+              <a:buNone/>
+            </a:pPr>
+            <a:r>
+              <a:rPr lang="en-US" sz="1200" b="1" dirty="0">
+                <a:solidFill>
+                  <a:srgbClr val="036B3F"/>
+                </a:solidFill>
+                <a:latin typeface="Arial" pitchFamily="34" charset="0"/>
+                <a:ea typeface="Arial" pitchFamily="34" charset="-122"/>
+                <a:cs typeface="Arial" pitchFamily="34" charset="-120"/>
+              </a:rPr>
+              <a:t>② 登入驗證</a:t>
+            </a:r>
+            <a:endParaRPr lang="en-US" sz="1200" dirty="0"/>
+          </a:p>
+        </p:txBody>
+      </p:sp>
+      <p:sp>
+        <p:nvSpPr>
+          <p:cNvPr id="46" name="Text 29"/>
+          <p:cNvSpPr/>
+          <p:nvPr/>
+        </p:nvSpPr>
+        <p:spPr>
+          <a:xfrm>
+            <a:off x="2794000" y="2552700"/>
+            <a:ext cx="1320800" cy="452041"/>
+          </a:xfrm>
+          <a:prstGeom prst="rect">
+            <a:avLst/>
+          </a:prstGeom>
+          <a:noFill/>
+          <a:ln/>
+        </p:spPr>
+        <p:txBody>
+          <a:bodyPr wrap="square" lIns="0" tIns="0" rIns="0" bIns="0" rtlCol="0" anchor="t">
+            <a:normAutofit/>
+          </a:bodyPr>
+          <a:lstStyle/>
+          <a:p>
+            <a:pPr algn="l" indent="0" marL="0">
+              <a:lnSpc>
+                <a:spcPts val="1680"/>
+              </a:lnSpc>
+              <a:buNone/>
+            </a:pPr>
+            <a:r>
+              <a:rPr lang="en-US" sz="1200" b="1" dirty="0">
+                <a:solidFill>
+                  <a:srgbClr val="036B3F"/>
+                </a:solidFill>
+                <a:latin typeface="Arial" pitchFamily="34" charset="0"/>
+                <a:ea typeface="Arial" pitchFamily="34" charset="-122"/>
+                <a:cs typeface="Arial" pitchFamily="34" charset="-120"/>
+              </a:rPr>
+              <a:t>③ 發放 Token</a:t>
+            </a:r>
+            <a:endParaRPr lang="en-US" sz="1200" dirty="0"/>
+          </a:p>
+          <a:p>
+            <a:pPr algn="l" indent="0" marL="0">
+              <a:lnSpc>
+                <a:spcPts val="1680"/>
+              </a:lnSpc>
+              <a:buNone/>
+            </a:pPr>
+            <a:r>
+              <a:rPr lang="en-US" sz="1200" b="1" dirty="0">
+                <a:solidFill>
+                  <a:srgbClr val="036B3F"/>
+                </a:solidFill>
+                <a:latin typeface="Arial" pitchFamily="34" charset="0"/>
+                <a:ea typeface="Arial" pitchFamily="34" charset="-122"/>
+                <a:cs typeface="Arial" pitchFamily="34" charset="-120"/>
+              </a:rPr>
+              <a:t>給 AI 工具</a:t>
+            </a:r>
+            <a:endParaRPr lang="en-US" sz="1200" dirty="0"/>
+          </a:p>
+        </p:txBody>
+      </p:sp>
+      <p:sp>
+        <p:nvSpPr>
+          <p:cNvPr id="47" name="Text 30"/>
+          <p:cNvSpPr/>
+          <p:nvPr/>
+        </p:nvSpPr>
+        <p:spPr>
+          <a:xfrm>
+            <a:off x="2794000" y="1397000"/>
+            <a:ext cx="1320800" cy="452041"/>
+          </a:xfrm>
+          <a:prstGeom prst="rect">
+            <a:avLst/>
+          </a:prstGeom>
+          <a:noFill/>
+          <a:ln/>
+        </p:spPr>
+        <p:txBody>
+          <a:bodyPr wrap="square" lIns="0" tIns="0" rIns="0" bIns="0" rtlCol="0" anchor="t">
+            <a:normAutofit/>
+          </a:bodyPr>
+          <a:lstStyle/>
+          <a:p>
+            <a:pPr algn="l" indent="0" marL="0">
+              <a:lnSpc>
+                <a:spcPts val="1680"/>
+              </a:lnSpc>
+              <a:buNone/>
+            </a:pPr>
+            <a:r>
+              <a:rPr lang="en-US" sz="1200" b="1" dirty="0">
+                <a:solidFill>
+                  <a:srgbClr val="036B3F"/>
+                </a:solidFill>
+                <a:latin typeface="Arial" pitchFamily="34" charset="0"/>
+                <a:ea typeface="Arial" pitchFamily="34" charset="-122"/>
+                <a:cs typeface="Arial" pitchFamily="34" charset="-120"/>
+              </a:rPr>
+              <a:t>④ 帶 Token 呼叫</a:t>
+            </a:r>
+            <a:endParaRPr lang="en-US" sz="1200" dirty="0"/>
+          </a:p>
+          <a:p>
+            <a:pPr algn="l" indent="0" marL="0">
+              <a:lnSpc>
+                <a:spcPts val="1680"/>
+              </a:lnSpc>
+              <a:buNone/>
+            </a:pPr>
+            <a:r>
+              <a:rPr lang="en-US" sz="1200" b="1" dirty="0">
+                <a:solidFill>
+                  <a:srgbClr val="036B3F"/>
+                </a:solidFill>
+                <a:latin typeface="Arial" pitchFamily="34" charset="0"/>
+                <a:ea typeface="Arial" pitchFamily="34" charset="-122"/>
+                <a:cs typeface="Arial" pitchFamily="34" charset="-120"/>
+              </a:rPr>
+              <a:t>MCP 工具</a:t>
+            </a:r>
+            <a:endParaRPr lang="en-US" sz="1200" dirty="0"/>
+          </a:p>
+        </p:txBody>
+      </p:sp>
+      <p:sp>
+        <p:nvSpPr>
+          <p:cNvPr id="48" name="Text 31"/>
+          <p:cNvSpPr/>
+          <p:nvPr/>
+        </p:nvSpPr>
+        <p:spPr>
+          <a:xfrm>
+            <a:off x="6070600" y="4521200"/>
+            <a:ext cx="749300" cy="452041"/>
+          </a:xfrm>
+          <a:prstGeom prst="rect">
+            <a:avLst/>
+          </a:prstGeom>
+          <a:noFill/>
+          <a:ln/>
+        </p:spPr>
+        <p:txBody>
+          <a:bodyPr wrap="square" lIns="0" tIns="0" rIns="0" bIns="0" rtlCol="0" anchor="t">
+            <a:normAutofit/>
+          </a:bodyPr>
+          <a:lstStyle/>
+          <a:p>
+            <a:pPr algn="l" indent="0" marL="0">
+              <a:lnSpc>
+                <a:spcPts val="1680"/>
+              </a:lnSpc>
+              <a:buNone/>
+            </a:pPr>
+            <a:r>
+              <a:rPr lang="en-US" sz="1200" b="1" dirty="0">
+                <a:solidFill>
+                  <a:srgbClr val="036B3F"/>
+                </a:solidFill>
+                <a:latin typeface="Arial" pitchFamily="34" charset="0"/>
+                <a:ea typeface="Arial" pitchFamily="34" charset="-122"/>
+                <a:cs typeface="Arial" pitchFamily="34" charset="-120"/>
+              </a:rPr>
+              <a:t>轉送</a:t>
+            </a:r>
+            <a:endParaRPr lang="en-US" sz="1200" dirty="0"/>
+          </a:p>
+          <a:p>
+            <a:pPr algn="l" indent="0" marL="0">
+              <a:lnSpc>
+                <a:spcPts val="1680"/>
+              </a:lnSpc>
+              <a:buNone/>
+            </a:pPr>
+            <a:r>
+              <a:rPr lang="en-US" sz="1200" b="1" dirty="0">
+                <a:solidFill>
+                  <a:srgbClr val="036B3F"/>
+                </a:solidFill>
+                <a:latin typeface="Arial" pitchFamily="34" charset="0"/>
+                <a:ea typeface="Arial" pitchFamily="34" charset="-122"/>
+                <a:cs typeface="Arial" pitchFamily="34" charset="-120"/>
+              </a:rPr>
+              <a:t>Auth 請求</a:t>
+            </a:r>
+            <a:endParaRPr lang="en-US" sz="1200" dirty="0"/>
+          </a:p>
+        </p:txBody>
+      </p:sp>
+      <p:sp>
+        <p:nvSpPr>
+          <p:cNvPr id="49" name="Text 32"/>
+          <p:cNvSpPr/>
+          <p:nvPr/>
+        </p:nvSpPr>
+        <p:spPr>
+          <a:xfrm>
+            <a:off x="8585200" y="5054600"/>
+            <a:ext cx="660400" cy="452041"/>
+          </a:xfrm>
+          <a:prstGeom prst="rect">
+            <a:avLst/>
+          </a:prstGeom>
+          <a:noFill/>
+          <a:ln/>
+        </p:spPr>
+        <p:txBody>
+          <a:bodyPr wrap="square" lIns="0" tIns="0" rIns="0" bIns="0" rtlCol="0" anchor="t">
+            <a:normAutofit/>
+          </a:bodyPr>
+          <a:lstStyle/>
+          <a:p>
+            <a:pPr algn="l" indent="0" marL="0">
+              <a:lnSpc>
+                <a:spcPts val="1680"/>
+              </a:lnSpc>
+              <a:buNone/>
+            </a:pPr>
+            <a:r>
+              <a:rPr lang="en-US" sz="1200" b="1" dirty="0">
+                <a:solidFill>
                   <a:srgbClr val="7F7F7F"/>
                 </a:solidFill>
                 <a:latin typeface="Arial" pitchFamily="34" charset="0"/>
                 <a:ea typeface="Arial" pitchFamily="34" charset="-122"/>
                 <a:cs typeface="Arial" pitchFamily="34" charset="-120"/>
               </a:rPr>
-              <a:t>3 / 4</a:t>
+              <a:t>比對帳密</a:t>
+            </a:r>
+            <a:endParaRPr lang="en-US" sz="1200" dirty="0"/>
+          </a:p>
+        </p:txBody>
+      </p:sp>
+      <p:sp>
+        <p:nvSpPr>
+          <p:cNvPr id="50" name="Text 33"/>
+          <p:cNvSpPr/>
+          <p:nvPr/>
+        </p:nvSpPr>
+        <p:spPr>
+          <a:xfrm>
+            <a:off x="10312400" y="2768600"/>
+            <a:ext cx="939800" cy="238720"/>
+          </a:xfrm>
+          <a:prstGeom prst="rect">
+            <a:avLst/>
+          </a:prstGeom>
+          <a:noFill/>
+          <a:ln/>
+        </p:spPr>
+        <p:txBody>
+          <a:bodyPr wrap="square" lIns="0" tIns="0" rIns="0" bIns="0" rtlCol="0" anchor="t">
+            <a:normAutofit/>
+          </a:bodyPr>
+          <a:lstStyle/>
+          <a:p>
+            <a:pPr algn="l" indent="0" marL="0">
+              <a:lnSpc>
+                <a:spcPts val="1680"/>
+              </a:lnSpc>
+              <a:buNone/>
+            </a:pPr>
+            <a:r>
+              <a:rPr lang="en-US" sz="1200" b="1" dirty="0">
+                <a:solidFill>
+                  <a:srgbClr val="7F7F7F"/>
+                </a:solidFill>
+                <a:latin typeface="Arial" pitchFamily="34" charset="0"/>
+                <a:ea typeface="Arial" pitchFamily="34" charset="-122"/>
+                <a:cs typeface="Arial" pitchFamily="34" charset="-120"/>
+              </a:rPr>
+              <a:t>讀取資料</a:t>
+            </a:r>
+            <a:endParaRPr lang="en-US" sz="1200" dirty="0"/>
+          </a:p>
+        </p:txBody>
+      </p:sp>
+      <p:sp>
+        <p:nvSpPr>
+          <p:cNvPr id="51" name="Text 34"/>
+          <p:cNvSpPr/>
+          <p:nvPr/>
+        </p:nvSpPr>
+        <p:spPr>
+          <a:xfrm>
+            <a:off x="6908800" y="1879600"/>
+            <a:ext cx="2223770" cy="238720"/>
+          </a:xfrm>
+          <a:prstGeom prst="rect">
+            <a:avLst/>
+          </a:prstGeom>
+          <a:noFill/>
+          <a:ln/>
+        </p:spPr>
+        <p:txBody>
+          <a:bodyPr wrap="square" lIns="0" tIns="0" rIns="0" bIns="0" rtlCol="0" anchor="t">
+            <a:normAutofit/>
+          </a:bodyPr>
+          <a:lstStyle/>
+          <a:p>
+            <a:pPr algn="l" indent="0" marL="0">
+              <a:lnSpc>
+                <a:spcPts val="1680"/>
+              </a:lnSpc>
+              <a:buNone/>
+            </a:pPr>
+            <a:r>
+              <a:rPr lang="en-US" sz="1200" b="1" dirty="0">
+                <a:solidFill>
+                  <a:srgbClr val="036B3F"/>
+                </a:solidFill>
+                <a:latin typeface="Arial" pitchFamily="34" charset="0"/>
+                <a:ea typeface="Arial" pitchFamily="34" charset="-122"/>
+                <a:cs typeface="Arial" pitchFamily="34" charset="-120"/>
+              </a:rPr>
+              <a:t>⑤ 驗證 Token 後呼叫 API</a:t>
+            </a:r>
+            <a:endParaRPr lang="en-US" sz="1200" dirty="0"/>
+          </a:p>
+        </p:txBody>
+      </p:sp>
+      <p:sp>
+        <p:nvSpPr>
+          <p:cNvPr id="52" name="Text 35"/>
+          <p:cNvSpPr/>
+          <p:nvPr/>
+        </p:nvSpPr>
+        <p:spPr>
+          <a:xfrm>
+            <a:off x="3987800" y="5613400"/>
+            <a:ext cx="3924300" cy="238720"/>
+          </a:xfrm>
+          <a:prstGeom prst="rect">
+            <a:avLst/>
+          </a:prstGeom>
+          <a:noFill/>
+          <a:ln/>
+        </p:spPr>
+        <p:txBody>
+          <a:bodyPr wrap="square" lIns="0" tIns="0" rIns="0" bIns="0" rtlCol="0" anchor="t">
+            <a:normAutofit/>
+          </a:bodyPr>
+          <a:lstStyle/>
+          <a:p>
+            <a:pPr algn="l" indent="0" marL="0">
+              <a:lnSpc>
+                <a:spcPts val="1680"/>
+              </a:lnSpc>
+              <a:buNone/>
+            </a:pPr>
+            <a:r>
+              <a:rPr lang="en-US" sz="1200" b="1" dirty="0">
+                <a:solidFill>
+                  <a:srgbClr val="036B3F"/>
+                </a:solidFill>
+                <a:latin typeface="Arial" pitchFamily="34" charset="0"/>
+                <a:ea typeface="Arial" pitchFamily="34" charset="-122"/>
+                <a:cs typeface="Arial" pitchFamily="34" charset="-120"/>
+              </a:rPr>
+              <a:t>公有雲</a:t>
+            </a:r>
+            <a:endParaRPr lang="en-US" sz="1200" dirty="0"/>
+          </a:p>
+        </p:txBody>
+      </p:sp>
+      <p:sp>
+        <p:nvSpPr>
+          <p:cNvPr id="53" name="Text 36"/>
+          <p:cNvSpPr/>
+          <p:nvPr/>
+        </p:nvSpPr>
+        <p:spPr>
+          <a:xfrm>
+            <a:off x="9004300" y="1435100"/>
+            <a:ext cx="1320800" cy="238720"/>
+          </a:xfrm>
+          <a:prstGeom prst="rect">
+            <a:avLst/>
+          </a:prstGeom>
+          <a:noFill/>
+          <a:ln/>
+        </p:spPr>
+        <p:txBody>
+          <a:bodyPr wrap="square" lIns="0" tIns="0" rIns="0" bIns="0" rtlCol="0" anchor="t">
+            <a:normAutofit/>
+          </a:bodyPr>
+          <a:lstStyle/>
+          <a:p>
+            <a:pPr algn="l" indent="0" marL="0">
+              <a:lnSpc>
+                <a:spcPts val="1680"/>
+              </a:lnSpc>
+              <a:buNone/>
+            </a:pPr>
+            <a:r>
+              <a:rPr lang="en-US" sz="1200" b="1" dirty="0">
+                <a:solidFill>
+                  <a:srgbClr val="3B6E99"/>
+                </a:solidFill>
+                <a:latin typeface="Arial" pitchFamily="34" charset="0"/>
+                <a:ea typeface="Arial" pitchFamily="34" charset="-122"/>
+                <a:cs typeface="Arial" pitchFamily="34" charset="-120"/>
+              </a:rPr>
+              <a:t>資訊雲</a:t>
+            </a:r>
+            <a:endParaRPr lang="en-US" sz="1200" dirty="0"/>
+          </a:p>
+        </p:txBody>
+      </p:sp>
+      <p:sp>
+        <p:nvSpPr>
+          <p:cNvPr id="54" name="Text 37"/>
+          <p:cNvSpPr/>
+          <p:nvPr/>
+        </p:nvSpPr>
+        <p:spPr>
+          <a:xfrm>
+            <a:off x="9004300" y="5613400"/>
+            <a:ext cx="2354580" cy="238720"/>
+          </a:xfrm>
+          <a:prstGeom prst="rect">
+            <a:avLst/>
+          </a:prstGeom>
+          <a:noFill/>
+          <a:ln/>
+        </p:spPr>
+        <p:txBody>
+          <a:bodyPr wrap="square" lIns="0" tIns="0" rIns="0" bIns="0" rtlCol="0" anchor="t">
+            <a:normAutofit/>
+          </a:bodyPr>
+          <a:lstStyle/>
+          <a:p>
+            <a:pPr algn="l" indent="0" marL="0">
+              <a:lnSpc>
+                <a:spcPts val="1680"/>
+              </a:lnSpc>
+              <a:buNone/>
+            </a:pPr>
+            <a:r>
+              <a:rPr lang="en-US" sz="1200" b="1" dirty="0">
+                <a:solidFill>
+                  <a:srgbClr val="7F7F7F"/>
+                </a:solidFill>
+                <a:latin typeface="Arial" pitchFamily="34" charset="0"/>
+                <a:ea typeface="Arial" pitchFamily="34" charset="-122"/>
+                <a:cs typeface="Arial" pitchFamily="34" charset="-120"/>
+              </a:rPr>
+              <a:t>地端（On-Premises）</a:t>
             </a:r>
             <a:endParaRPr lang="en-US" sz="1200" dirty="0"/>
           </a:p>
@@ -3977,6 +6026,151 @@
 <file path=ppt/slides/slide4.xml><?xml version="1.0" encoding="utf-8"?>
 <p:sld xmlns:a="http://schemas.openxmlformats.org/drawingml/2006/main" xmlns:r="http://schemas.openxmlformats.org/officeDocument/2006/relationships" xmlns:p="http://schemas.openxmlformats.org/presentationml/2006/main">
   <p:cSld name="Slide 4">
+    <p:bg>
+      <p:bgPr>
+        <a:solidFill>
+          <a:srgbClr val="FFFFFF"/>
+        </a:solidFill>
+      </p:bgPr>
+    </p:bg>
+    <p:spTree>
+      <p:nvGrpSpPr>
+        <p:cNvPr id="1" name=""/>
+        <p:cNvGrpSpPr/>
+        <p:nvPr/>
+      </p:nvGrpSpPr>
+      <p:grpSpPr>
+        <a:xfrm>
+          <a:off x="0" y="0"/>
+          <a:ext cx="0" cy="0"/>
+          <a:chOff x="0" y="0"/>
+          <a:chExt cx="0" cy="0"/>
+        </a:xfrm>
+      </p:grpSpPr>
+      <p:sp>
+        <p:nvSpPr>
+          <p:cNvPr id="2" name="Text 0"/>
+          <p:cNvSpPr/>
+          <p:nvPr>
+            <p:ph type="title"/>
+          </p:nvPr>
+        </p:nvSpPr>
+        <p:spPr>
+          <a:xfrm>
+            <a:off x="812800" y="457200"/>
+            <a:ext cx="10883392" cy="528290"/>
+          </a:xfrm>
+          <a:prstGeom prst="rect">
+            <a:avLst/>
+          </a:prstGeom>
+          <a:noFill/>
+          <a:ln/>
+        </p:spPr>
+        <p:txBody>
+          <a:bodyPr wrap="square" lIns="0" tIns="0" rIns="0" bIns="0" rtlCol="0" anchor="t">
+            <a:normAutofit/>
+          </a:bodyPr>
+          <a:lstStyle/>
+          <a:p>
+            <a:pPr algn="l" indent="0" marL="0">
+              <a:lnSpc>
+                <a:spcPts val="3960"/>
+              </a:lnSpc>
+              <a:buNone/>
+            </a:pPr>
+            <a:r>
+              <a:rPr lang="en-US" sz="3600" b="1" i="0" dirty="0">
+                <a:solidFill>
+                  <a:srgbClr val="036B3F"/>
+                </a:solidFill>
+                <a:latin typeface="Arial" pitchFamily="34" charset="0"/>
+                <a:ea typeface="Arial" pitchFamily="34" charset="-122"/>
+                <a:cs typeface="Arial" pitchFamily="34" charset="-120"/>
+              </a:rPr>
+              <a:t>一步步看：AI 工具怎麼拿到通行證</a:t>
+            </a:r>
+            <a:endParaRPr lang="en-US" sz="3600" dirty="0"/>
+          </a:p>
+        </p:txBody>
+      </p:sp>
+      <p:pic>
+        <p:nvPicPr>
+          <p:cNvPr id="3" name="Image 0" descr="OAuth 授權碼加 PKCE 流程時序圖：Client 產生 PKCE 參數並將使用者導向 OAuth Server，使用者在 OAuth Server輸入統編、帳號、密碼， OAuth Server以授權碼導回，Client 以授權碼加 code_verifier 換取 Access Token 與 Refresh Token，再帶 Token 呼叫 MCP Server，MCP Server 以 JWKS 驗證">    </p:cNvPr>
+          <p:cNvPicPr>
+            <a:picLocks noChangeAspect="1"/>
+          </p:cNvPicPr>
+          <p:nvPr/>
+        </p:nvPicPr>
+        <p:blipFill>
+          <a:blip r:embed="rId1"/>
+          <a:srcRect l="-18" r="-18" t="0" b="0"/>
+          <a:stretch/>
+        </p:blipFill>
+        <p:spPr>
+          <a:xfrm>
+            <a:off x="812800" y="1112490"/>
+            <a:ext cx="10566400" cy="4476750"/>
+          </a:xfrm>
+          <a:prstGeom prst="rect">
+            <a:avLst/>
+          </a:prstGeom>
+        </p:spPr>
+      </p:pic>
+      <p:sp>
+        <p:nvSpPr>
+          <p:cNvPr id="4" name="Text 1"/>
+          <p:cNvSpPr/>
+          <p:nvPr/>
+        </p:nvSpPr>
+        <p:spPr>
+          <a:xfrm>
+            <a:off x="10058400" y="6441480"/>
+            <a:ext cx="1320800" cy="238720"/>
+          </a:xfrm>
+          <a:prstGeom prst="rect">
+            <a:avLst/>
+          </a:prstGeom>
+          <a:noFill/>
+          <a:ln/>
+        </p:spPr>
+        <p:txBody>
+          <a:bodyPr wrap="square" lIns="0" tIns="0" rIns="0" bIns="0" rtlCol="0" anchor="t">
+            <a:normAutofit/>
+          </a:bodyPr>
+          <a:lstStyle/>
+          <a:p>
+            <a:pPr algn="r" indent="0" marL="0">
+              <a:lnSpc>
+                <a:spcPts val="1680"/>
+              </a:lnSpc>
+              <a:buNone/>
+            </a:pPr>
+            <a:r>
+              <a:rPr lang="en-US" sz="1200" dirty="0">
+                <a:solidFill>
+                  <a:srgbClr val="7F7F7F"/>
+                </a:solidFill>
+                <a:latin typeface="Arial" pitchFamily="34" charset="0"/>
+                <a:ea typeface="Arial" pitchFamily="34" charset="-122"/>
+                <a:cs typeface="Arial" pitchFamily="34" charset="-120"/>
+              </a:rPr>
+              <a:t>4 / 5</a:t>
+            </a:r>
+            <a:endParaRPr lang="en-US" sz="1200" dirty="0"/>
+          </a:p>
+        </p:txBody>
+      </p:sp>
+    </p:spTree>
+  </p:cSld>
+  <p:clrMapOvr>
+    <a:masterClrMapping/>
+  </p:clrMapOvr>
+</p:sld>
+</file>
+
+<file path=ppt/slides/slide5.xml><?xml version="1.0" encoding="utf-8"?>
+<p:sld xmlns:a="http://schemas.openxmlformats.org/drawingml/2006/main" xmlns:r="http://schemas.openxmlformats.org/officeDocument/2006/relationships" xmlns:p="http://schemas.openxmlformats.org/presentationml/2006/main">
+  <p:cSld name="Slide 5">
     <p:bg>
       <p:bgPr>
         <a:solidFill>
@@ -6263,7 +8457,7 @@
                 <a:ea typeface="Arial" pitchFamily="34" charset="-122"/>
                 <a:cs typeface="Arial" pitchFamily="34" charset="-120"/>
               </a:rPr>
-              <a:t>4 / 4</a:t>
+              <a:t>5 / 5</a:t>
             </a:r>
             <a:endParaRPr lang="en-US" sz="1200" dirty="0"/>
           </a:p>
@@ -6297,19 +8491,19 @@
         <a:srgbClr val="01A964"/>
       </a:accent1>
       <a:accent2>
-        <a:srgbClr val="E6FED2"/>
+        <a:srgbClr val="3B6E99"/>
       </a:accent2>
       <a:accent3>
-        <a:srgbClr val="7F7F7F"/>
+        <a:srgbClr val="E6FED2"/>
       </a:accent3>
       <a:accent4>
-        <a:srgbClr val="9AA0A6"/>
+        <a:srgbClr val="7F7F7F"/>
       </a:accent4>
       <a:accent5>
-        <a:srgbClr val="68A68C"/>
+        <a:srgbClr val="9AA0A6"/>
       </a:accent5>
       <a:accent6>
-        <a:srgbClr val="8EBCA9"/>
+        <a:srgbClr val="68A68C"/>
       </a:accent6>
       <a:hlink>
         <a:srgbClr val="0563C1"/>
